--- a/T9936_VITV_Pokala Sushma.pptx
+++ b/T9936_VITV_Pokala Sushma.pptx
@@ -138,7 +138,7 @@
   <pc:docChgLst>
     <pc:chgData name="Pokala Sushma" userId="8f92d326-2e04-4742-8ef3-263f618652de" providerId="ADAL" clId="{860254D0-E9E9-4D19-A949-C8C025EE3C1D}"/>
     <pc:docChg chg="undo custSel addSld delSld modSld modSection">
-      <pc:chgData name="Pokala Sushma" userId="8f92d326-2e04-4742-8ef3-263f618652de" providerId="ADAL" clId="{860254D0-E9E9-4D19-A949-C8C025EE3C1D}" dt="2026-08-28T04:49:38.518" v="336" actId="113"/>
+      <pc:chgData name="Pokala Sushma" userId="8f92d326-2e04-4742-8ef3-263f618652de" providerId="ADAL" clId="{860254D0-E9E9-4D19-A949-C8C025EE3C1D}" dt="2026-08-28T06:28:59.581" v="478" actId="1076"/>
       <pc:docMkLst>
         <pc:docMk/>
       </pc:docMkLst>
@@ -150,21 +150,21 @@
         </pc:sldMkLst>
       </pc:sldChg>
       <pc:sldChg chg="addSp delSp modSp mod setBg">
-        <pc:chgData name="Pokala Sushma" userId="8f92d326-2e04-4742-8ef3-263f618652de" providerId="ADAL" clId="{860254D0-E9E9-4D19-A949-C8C025EE3C1D}" dt="2026-08-28T04:49:10.081" v="335" actId="113"/>
+        <pc:chgData name="Pokala Sushma" userId="8f92d326-2e04-4742-8ef3-263f618652de" providerId="ADAL" clId="{860254D0-E9E9-4D19-A949-C8C025EE3C1D}" dt="2026-08-28T06:20:55.046" v="357" actId="26606"/>
         <pc:sldMkLst>
           <pc:docMk/>
           <pc:sldMk cId="745131472" sldId="257"/>
         </pc:sldMkLst>
         <pc:spChg chg="mod">
-          <ac:chgData name="Pokala Sushma" userId="8f92d326-2e04-4742-8ef3-263f618652de" providerId="ADAL" clId="{860254D0-E9E9-4D19-A949-C8C025EE3C1D}" dt="2026-08-28T04:49:10.081" v="335" actId="113"/>
+          <ac:chgData name="Pokala Sushma" userId="8f92d326-2e04-4742-8ef3-263f618652de" providerId="ADAL" clId="{860254D0-E9E9-4D19-A949-C8C025EE3C1D}" dt="2026-08-28T06:20:55.046" v="357" actId="26606"/>
           <ac:spMkLst>
             <pc:docMk/>
             <pc:sldMk cId="745131472" sldId="257"/>
             <ac:spMk id="2" creationId="{C7B1BFF6-E1C0-54FF-3D2D-331CBEC602E8}"/>
           </ac:spMkLst>
         </pc:spChg>
-        <pc:spChg chg="mod">
-          <ac:chgData name="Pokala Sushma" userId="8f92d326-2e04-4742-8ef3-263f618652de" providerId="ADAL" clId="{860254D0-E9E9-4D19-A949-C8C025EE3C1D}" dt="2026-08-28T04:48:45.801" v="334" actId="26606"/>
+        <pc:spChg chg="add del mod">
+          <ac:chgData name="Pokala Sushma" userId="8f92d326-2e04-4742-8ef3-263f618652de" providerId="ADAL" clId="{860254D0-E9E9-4D19-A949-C8C025EE3C1D}" dt="2026-08-28T06:20:55.046" v="357" actId="26606"/>
           <ac:spMkLst>
             <pc:docMk/>
             <pc:sldMk cId="745131472" sldId="257"/>
@@ -172,6 +172,22 @@
           </ac:spMkLst>
         </pc:spChg>
         <pc:spChg chg="add del">
+          <ac:chgData name="Pokala Sushma" userId="8f92d326-2e04-4742-8ef3-263f618652de" providerId="ADAL" clId="{860254D0-E9E9-4D19-A949-C8C025EE3C1D}" dt="2026-08-28T06:20:01.278" v="340" actId="26606"/>
+          <ac:spMkLst>
+            <pc:docMk/>
+            <pc:sldMk cId="745131472" sldId="257"/>
+            <ac:spMk id="6" creationId="{C0763A76-9F1C-4FC5-82B7-DD475DA461B2}"/>
+          </ac:spMkLst>
+        </pc:spChg>
+        <pc:spChg chg="add del">
+          <ac:chgData name="Pokala Sushma" userId="8f92d326-2e04-4742-8ef3-263f618652de" providerId="ADAL" clId="{860254D0-E9E9-4D19-A949-C8C025EE3C1D}" dt="2026-08-28T06:20:01.278" v="340" actId="26606"/>
+          <ac:spMkLst>
+            <pc:docMk/>
+            <pc:sldMk cId="745131472" sldId="257"/>
+            <ac:spMk id="7" creationId="{E81BF4F6-F2CF-4984-9D14-D6966D92F99F}"/>
+          </ac:spMkLst>
+        </pc:spChg>
+        <pc:spChg chg="add del">
           <ac:chgData name="Pokala Sushma" userId="8f92d326-2e04-4742-8ef3-263f618652de" providerId="ADAL" clId="{860254D0-E9E9-4D19-A949-C8C025EE3C1D}" dt="2026-08-28T04:48:45.801" v="334" actId="26606"/>
           <ac:spMkLst>
             <pc:docMk/>
@@ -180,6 +196,14 @@
           </ac:spMkLst>
         </pc:spChg>
         <pc:spChg chg="add del">
+          <ac:chgData name="Pokala Sushma" userId="8f92d326-2e04-4742-8ef3-263f618652de" providerId="ADAL" clId="{860254D0-E9E9-4D19-A949-C8C025EE3C1D}" dt="2026-08-28T06:20:12.279" v="342" actId="26606"/>
+          <ac:spMkLst>
+            <pc:docMk/>
+            <pc:sldMk cId="745131472" sldId="257"/>
+            <ac:spMk id="10" creationId="{35DB3719-6FDC-4E5D-891D-FF40B7300F64}"/>
+          </ac:spMkLst>
+        </pc:spChg>
+        <pc:spChg chg="add del">
           <ac:chgData name="Pokala Sushma" userId="8f92d326-2e04-4742-8ef3-263f618652de" providerId="ADAL" clId="{860254D0-E9E9-4D19-A949-C8C025EE3C1D}" dt="2026-08-28T04:48:45.801" v="334" actId="26606"/>
           <ac:spMkLst>
             <pc:docMk/>
@@ -187,6 +211,318 @@
             <ac:spMk id="11" creationId="{E81BF4F6-F2CF-4984-9D14-D6966D92F99F}"/>
           </ac:spMkLst>
         </pc:spChg>
+        <pc:spChg chg="add del">
+          <ac:chgData name="Pokala Sushma" userId="8f92d326-2e04-4742-8ef3-263f618652de" providerId="ADAL" clId="{860254D0-E9E9-4D19-A949-C8C025EE3C1D}" dt="2026-08-28T06:20:12.279" v="342" actId="26606"/>
+          <ac:spMkLst>
+            <pc:docMk/>
+            <pc:sldMk cId="745131472" sldId="257"/>
+            <ac:spMk id="12" creationId="{E0CBAC23-2E3F-4A90-BA59-F8299F6A5439}"/>
+          </ac:spMkLst>
+        </pc:spChg>
+        <pc:spChg chg="add del">
+          <ac:chgData name="Pokala Sushma" userId="8f92d326-2e04-4742-8ef3-263f618652de" providerId="ADAL" clId="{860254D0-E9E9-4D19-A949-C8C025EE3C1D}" dt="2026-08-28T06:20:17.673" v="344" actId="26606"/>
+          <ac:spMkLst>
+            <pc:docMk/>
+            <pc:sldMk cId="745131472" sldId="257"/>
+            <ac:spMk id="15" creationId="{3150CB11-0C61-439E-910F-5787759E72A0}"/>
+          </ac:spMkLst>
+        </pc:spChg>
+        <pc:spChg chg="add del">
+          <ac:chgData name="Pokala Sushma" userId="8f92d326-2e04-4742-8ef3-263f618652de" providerId="ADAL" clId="{860254D0-E9E9-4D19-A949-C8C025EE3C1D}" dt="2026-08-28T06:20:17.673" v="344" actId="26606"/>
+          <ac:spMkLst>
+            <pc:docMk/>
+            <pc:sldMk cId="745131472" sldId="257"/>
+            <ac:spMk id="16" creationId="{BACC6370-2D7E-4714-9D71-7542949D7D5D}"/>
+          </ac:spMkLst>
+        </pc:spChg>
+        <pc:spChg chg="add del">
+          <ac:chgData name="Pokala Sushma" userId="8f92d326-2e04-4742-8ef3-263f618652de" providerId="ADAL" clId="{860254D0-E9E9-4D19-A949-C8C025EE3C1D}" dt="2026-08-28T06:20:17.673" v="344" actId="26606"/>
+          <ac:spMkLst>
+            <pc:docMk/>
+            <pc:sldMk cId="745131472" sldId="257"/>
+            <ac:spMk id="17" creationId="{43F8A58B-5155-44CE-A5FF-7647B47D0A7A}"/>
+          </ac:spMkLst>
+        </pc:spChg>
+        <pc:spChg chg="add del">
+          <ac:chgData name="Pokala Sushma" userId="8f92d326-2e04-4742-8ef3-263f618652de" providerId="ADAL" clId="{860254D0-E9E9-4D19-A949-C8C025EE3C1D}" dt="2026-08-28T06:20:17.673" v="344" actId="26606"/>
+          <ac:spMkLst>
+            <pc:docMk/>
+            <pc:sldMk cId="745131472" sldId="257"/>
+            <ac:spMk id="18" creationId="{256B2C21-A230-48C0-8DF1-C46611373C44}"/>
+          </ac:spMkLst>
+        </pc:spChg>
+        <pc:spChg chg="add del">
+          <ac:chgData name="Pokala Sushma" userId="8f92d326-2e04-4742-8ef3-263f618652de" providerId="ADAL" clId="{860254D0-E9E9-4D19-A949-C8C025EE3C1D}" dt="2026-08-28T06:20:17.673" v="344" actId="26606"/>
+          <ac:spMkLst>
+            <pc:docMk/>
+            <pc:sldMk cId="745131472" sldId="257"/>
+            <ac:spMk id="19" creationId="{443F2ACA-E6D6-4028-82DD-F03C262D5DE6}"/>
+          </ac:spMkLst>
+        </pc:spChg>
+        <pc:spChg chg="add del">
+          <ac:chgData name="Pokala Sushma" userId="8f92d326-2e04-4742-8ef3-263f618652de" providerId="ADAL" clId="{860254D0-E9E9-4D19-A949-C8C025EE3C1D}" dt="2026-08-28T06:20:17.673" v="344" actId="26606"/>
+          <ac:spMkLst>
+            <pc:docMk/>
+            <pc:sldMk cId="745131472" sldId="257"/>
+            <ac:spMk id="20" creationId="{3847E18C-932D-4C95-AABA-FEC7C9499AD7}"/>
+          </ac:spMkLst>
+        </pc:spChg>
+        <pc:spChg chg="add del">
+          <ac:chgData name="Pokala Sushma" userId="8f92d326-2e04-4742-8ef3-263f618652de" providerId="ADAL" clId="{860254D0-E9E9-4D19-A949-C8C025EE3C1D}" dt="2026-08-28T06:20:24.930" v="346" actId="26606"/>
+          <ac:spMkLst>
+            <pc:docMk/>
+            <pc:sldMk cId="745131472" sldId="257"/>
+            <ac:spMk id="23" creationId="{18873D23-2DCF-4B31-A009-95721C06E8E1}"/>
+          </ac:spMkLst>
+        </pc:spChg>
+        <pc:spChg chg="add del">
+          <ac:chgData name="Pokala Sushma" userId="8f92d326-2e04-4742-8ef3-263f618652de" providerId="ADAL" clId="{860254D0-E9E9-4D19-A949-C8C025EE3C1D}" dt="2026-08-28T06:20:24.930" v="346" actId="26606"/>
+          <ac:spMkLst>
+            <pc:docMk/>
+            <pc:sldMk cId="745131472" sldId="257"/>
+            <ac:spMk id="24" creationId="{C13EF075-D4EF-4929-ADBC-91B27DA19955}"/>
+          </ac:spMkLst>
+        </pc:spChg>
+        <pc:spChg chg="add del">
+          <ac:chgData name="Pokala Sushma" userId="8f92d326-2e04-4742-8ef3-263f618652de" providerId="ADAL" clId="{860254D0-E9E9-4D19-A949-C8C025EE3C1D}" dt="2026-08-28T06:20:24.930" v="346" actId="26606"/>
+          <ac:spMkLst>
+            <pc:docMk/>
+            <pc:sldMk cId="745131472" sldId="257"/>
+            <ac:spMk id="29" creationId="{34A6A842-99BE-6789-4477-F230AB5C4425}"/>
+          </ac:spMkLst>
+        </pc:spChg>
+        <pc:spChg chg="add del">
+          <ac:chgData name="Pokala Sushma" userId="8f92d326-2e04-4742-8ef3-263f618652de" providerId="ADAL" clId="{860254D0-E9E9-4D19-A949-C8C025EE3C1D}" dt="2026-08-28T06:20:44.526" v="350" actId="26606"/>
+          <ac:spMkLst>
+            <pc:docMk/>
+            <pc:sldMk cId="745131472" sldId="257"/>
+            <ac:spMk id="33" creationId="{35DB3719-6FDC-4E5D-891D-FF40B7300F64}"/>
+          </ac:spMkLst>
+        </pc:spChg>
+        <pc:spChg chg="add del">
+          <ac:chgData name="Pokala Sushma" userId="8f92d326-2e04-4742-8ef3-263f618652de" providerId="ADAL" clId="{860254D0-E9E9-4D19-A949-C8C025EE3C1D}" dt="2026-08-28T06:20:44.526" v="350" actId="26606"/>
+          <ac:spMkLst>
+            <pc:docMk/>
+            <pc:sldMk cId="745131472" sldId="257"/>
+            <ac:spMk id="34" creationId="{E0CBAC23-2E3F-4A90-BA59-F8299F6A5439}"/>
+          </ac:spMkLst>
+        </pc:spChg>
+        <pc:spChg chg="add del">
+          <ac:chgData name="Pokala Sushma" userId="8f92d326-2e04-4742-8ef3-263f618652de" providerId="ADAL" clId="{860254D0-E9E9-4D19-A949-C8C025EE3C1D}" dt="2026-08-28T06:20:47.736" v="352" actId="26606"/>
+          <ac:spMkLst>
+            <pc:docMk/>
+            <pc:sldMk cId="745131472" sldId="257"/>
+            <ac:spMk id="37" creationId="{BACC6370-2D7E-4714-9D71-7542949D7D5D}"/>
+          </ac:spMkLst>
+        </pc:spChg>
+        <pc:spChg chg="add del">
+          <ac:chgData name="Pokala Sushma" userId="8f92d326-2e04-4742-8ef3-263f618652de" providerId="ADAL" clId="{860254D0-E9E9-4D19-A949-C8C025EE3C1D}" dt="2026-08-28T06:20:47.736" v="352" actId="26606"/>
+          <ac:spMkLst>
+            <pc:docMk/>
+            <pc:sldMk cId="745131472" sldId="257"/>
+            <ac:spMk id="38" creationId="{256B2C21-A230-48C0-8DF1-C46611373C44}"/>
+          </ac:spMkLst>
+        </pc:spChg>
+        <pc:spChg chg="add del">
+          <ac:chgData name="Pokala Sushma" userId="8f92d326-2e04-4742-8ef3-263f618652de" providerId="ADAL" clId="{860254D0-E9E9-4D19-A949-C8C025EE3C1D}" dt="2026-08-28T06:20:47.736" v="352" actId="26606"/>
+          <ac:spMkLst>
+            <pc:docMk/>
+            <pc:sldMk cId="745131472" sldId="257"/>
+            <ac:spMk id="39" creationId="{3847E18C-932D-4C95-AABA-FEC7C9499AD7}"/>
+          </ac:spMkLst>
+        </pc:spChg>
+        <pc:spChg chg="add del">
+          <ac:chgData name="Pokala Sushma" userId="8f92d326-2e04-4742-8ef3-263f618652de" providerId="ADAL" clId="{860254D0-E9E9-4D19-A949-C8C025EE3C1D}" dt="2026-08-28T06:20:47.736" v="352" actId="26606"/>
+          <ac:spMkLst>
+            <pc:docMk/>
+            <pc:sldMk cId="745131472" sldId="257"/>
+            <ac:spMk id="40" creationId="{3150CB11-0C61-439E-910F-5787759E72A0}"/>
+          </ac:spMkLst>
+        </pc:spChg>
+        <pc:spChg chg="add del">
+          <ac:chgData name="Pokala Sushma" userId="8f92d326-2e04-4742-8ef3-263f618652de" providerId="ADAL" clId="{860254D0-E9E9-4D19-A949-C8C025EE3C1D}" dt="2026-08-28T06:20:47.736" v="352" actId="26606"/>
+          <ac:spMkLst>
+            <pc:docMk/>
+            <pc:sldMk cId="745131472" sldId="257"/>
+            <ac:spMk id="41" creationId="{43F8A58B-5155-44CE-A5FF-7647B47D0A7A}"/>
+          </ac:spMkLst>
+        </pc:spChg>
+        <pc:spChg chg="add del">
+          <ac:chgData name="Pokala Sushma" userId="8f92d326-2e04-4742-8ef3-263f618652de" providerId="ADAL" clId="{860254D0-E9E9-4D19-A949-C8C025EE3C1D}" dt="2026-08-28T06:20:47.736" v="352" actId="26606"/>
+          <ac:spMkLst>
+            <pc:docMk/>
+            <pc:sldMk cId="745131472" sldId="257"/>
+            <ac:spMk id="42" creationId="{443F2ACA-E6D6-4028-82DD-F03C262D5DE6}"/>
+          </ac:spMkLst>
+        </pc:spChg>
+        <pc:spChg chg="add del">
+          <ac:chgData name="Pokala Sushma" userId="8f92d326-2e04-4742-8ef3-263f618652de" providerId="ADAL" clId="{860254D0-E9E9-4D19-A949-C8C025EE3C1D}" dt="2026-08-28T06:20:48.822" v="354" actId="26606"/>
+          <ac:spMkLst>
+            <pc:docMk/>
+            <pc:sldMk cId="745131472" sldId="257"/>
+            <ac:spMk id="45" creationId="{BACC6370-2D7E-4714-9D71-7542949D7D5D}"/>
+          </ac:spMkLst>
+        </pc:spChg>
+        <pc:spChg chg="add del">
+          <ac:chgData name="Pokala Sushma" userId="8f92d326-2e04-4742-8ef3-263f618652de" providerId="ADAL" clId="{860254D0-E9E9-4D19-A949-C8C025EE3C1D}" dt="2026-08-28T06:20:48.822" v="354" actId="26606"/>
+          <ac:spMkLst>
+            <pc:docMk/>
+            <pc:sldMk cId="745131472" sldId="257"/>
+            <ac:spMk id="46" creationId="{256B2C21-A230-48C0-8DF1-C46611373C44}"/>
+          </ac:spMkLst>
+        </pc:spChg>
+        <pc:spChg chg="add del">
+          <ac:chgData name="Pokala Sushma" userId="8f92d326-2e04-4742-8ef3-263f618652de" providerId="ADAL" clId="{860254D0-E9E9-4D19-A949-C8C025EE3C1D}" dt="2026-08-28T06:20:48.822" v="354" actId="26606"/>
+          <ac:spMkLst>
+            <pc:docMk/>
+            <pc:sldMk cId="745131472" sldId="257"/>
+            <ac:spMk id="47" creationId="{3847E18C-932D-4C95-AABA-FEC7C9499AD7}"/>
+          </ac:spMkLst>
+        </pc:spChg>
+        <pc:spChg chg="add del">
+          <ac:chgData name="Pokala Sushma" userId="8f92d326-2e04-4742-8ef3-263f618652de" providerId="ADAL" clId="{860254D0-E9E9-4D19-A949-C8C025EE3C1D}" dt="2026-08-28T06:20:48.822" v="354" actId="26606"/>
+          <ac:spMkLst>
+            <pc:docMk/>
+            <pc:sldMk cId="745131472" sldId="257"/>
+            <ac:spMk id="48" creationId="{3150CB11-0C61-439E-910F-5787759E72A0}"/>
+          </ac:spMkLst>
+        </pc:spChg>
+        <pc:spChg chg="add del">
+          <ac:chgData name="Pokala Sushma" userId="8f92d326-2e04-4742-8ef3-263f618652de" providerId="ADAL" clId="{860254D0-E9E9-4D19-A949-C8C025EE3C1D}" dt="2026-08-28T06:20:48.822" v="354" actId="26606"/>
+          <ac:spMkLst>
+            <pc:docMk/>
+            <pc:sldMk cId="745131472" sldId="257"/>
+            <ac:spMk id="49" creationId="{43F8A58B-5155-44CE-A5FF-7647B47D0A7A}"/>
+          </ac:spMkLst>
+        </pc:spChg>
+        <pc:spChg chg="add del">
+          <ac:chgData name="Pokala Sushma" userId="8f92d326-2e04-4742-8ef3-263f618652de" providerId="ADAL" clId="{860254D0-E9E9-4D19-A949-C8C025EE3C1D}" dt="2026-08-28T06:20:48.822" v="354" actId="26606"/>
+          <ac:spMkLst>
+            <pc:docMk/>
+            <pc:sldMk cId="745131472" sldId="257"/>
+            <ac:spMk id="50" creationId="{443F2ACA-E6D6-4028-82DD-F03C262D5DE6}"/>
+          </ac:spMkLst>
+        </pc:spChg>
+        <pc:spChg chg="add del">
+          <ac:chgData name="Pokala Sushma" userId="8f92d326-2e04-4742-8ef3-263f618652de" providerId="ADAL" clId="{860254D0-E9E9-4D19-A949-C8C025EE3C1D}" dt="2026-08-28T06:20:55.030" v="356" actId="26606"/>
+          <ac:spMkLst>
+            <pc:docMk/>
+            <pc:sldMk cId="745131472" sldId="257"/>
+            <ac:spMk id="53" creationId="{18873D23-2DCF-4B31-A009-95721C06E8E1}"/>
+          </ac:spMkLst>
+        </pc:spChg>
+        <pc:spChg chg="add del">
+          <ac:chgData name="Pokala Sushma" userId="8f92d326-2e04-4742-8ef3-263f618652de" providerId="ADAL" clId="{860254D0-E9E9-4D19-A949-C8C025EE3C1D}" dt="2026-08-28T06:20:55.030" v="356" actId="26606"/>
+          <ac:spMkLst>
+            <pc:docMk/>
+            <pc:sldMk cId="745131472" sldId="257"/>
+            <ac:spMk id="54" creationId="{C13EF075-D4EF-4929-ADBC-91B27DA19955}"/>
+          </ac:spMkLst>
+        </pc:spChg>
+        <pc:spChg chg="add del">
+          <ac:chgData name="Pokala Sushma" userId="8f92d326-2e04-4742-8ef3-263f618652de" providerId="ADAL" clId="{860254D0-E9E9-4D19-A949-C8C025EE3C1D}" dt="2026-08-28T06:20:55.030" v="356" actId="26606"/>
+          <ac:spMkLst>
+            <pc:docMk/>
+            <pc:sldMk cId="745131472" sldId="257"/>
+            <ac:spMk id="59" creationId="{34A6A842-99BE-6789-4477-F230AB5C4425}"/>
+          </ac:spMkLst>
+        </pc:spChg>
+        <pc:spChg chg="add">
+          <ac:chgData name="Pokala Sushma" userId="8f92d326-2e04-4742-8ef3-263f618652de" providerId="ADAL" clId="{860254D0-E9E9-4D19-A949-C8C025EE3C1D}" dt="2026-08-28T06:20:55.046" v="357" actId="26606"/>
+          <ac:spMkLst>
+            <pc:docMk/>
+            <pc:sldMk cId="745131472" sldId="257"/>
+            <ac:spMk id="61" creationId="{907EF6B7-1338-4443-8C46-6A318D952DFD}"/>
+          </ac:spMkLst>
+        </pc:spChg>
+        <pc:spChg chg="add">
+          <ac:chgData name="Pokala Sushma" userId="8f92d326-2e04-4742-8ef3-263f618652de" providerId="ADAL" clId="{860254D0-E9E9-4D19-A949-C8C025EE3C1D}" dt="2026-08-28T06:20:55.046" v="357" actId="26606"/>
+          <ac:spMkLst>
+            <pc:docMk/>
+            <pc:sldMk cId="745131472" sldId="257"/>
+            <ac:spMk id="62" creationId="{DAAE4CDD-124C-4DCF-9584-B6033B545DD5}"/>
+          </ac:spMkLst>
+        </pc:spChg>
+        <pc:spChg chg="add">
+          <ac:chgData name="Pokala Sushma" userId="8f92d326-2e04-4742-8ef3-263f618652de" providerId="ADAL" clId="{860254D0-E9E9-4D19-A949-C8C025EE3C1D}" dt="2026-08-28T06:20:55.046" v="357" actId="26606"/>
+          <ac:spMkLst>
+            <pc:docMk/>
+            <pc:sldMk cId="745131472" sldId="257"/>
+            <ac:spMk id="63" creationId="{081E4A58-353D-44AE-B2FC-2A74E2E400F7}"/>
+          </ac:spMkLst>
+        </pc:spChg>
+        <pc:spChg chg="add">
+          <ac:chgData name="Pokala Sushma" userId="8f92d326-2e04-4742-8ef3-263f618652de" providerId="ADAL" clId="{860254D0-E9E9-4D19-A949-C8C025EE3C1D}" dt="2026-08-28T06:20:55.046" v="357" actId="26606"/>
+          <ac:spMkLst>
+            <pc:docMk/>
+            <pc:sldMk cId="745131472" sldId="257"/>
+            <ac:spMk id="64" creationId="{34A6A842-99BE-6789-4477-F230AB5C4425}"/>
+          </ac:spMkLst>
+        </pc:spChg>
+        <pc:grpChg chg="add del">
+          <ac:chgData name="Pokala Sushma" userId="8f92d326-2e04-4742-8ef3-263f618652de" providerId="ADAL" clId="{860254D0-E9E9-4D19-A949-C8C025EE3C1D}" dt="2026-08-28T06:20:24.930" v="346" actId="26606"/>
+          <ac:grpSpMkLst>
+            <pc:docMk/>
+            <pc:sldMk cId="745131472" sldId="257"/>
+            <ac:grpSpMk id="25" creationId="{DAA26DFA-AAB2-4973-9C17-16D587C7B198}"/>
+          </ac:grpSpMkLst>
+        </pc:grpChg>
+        <pc:grpChg chg="add del">
+          <ac:chgData name="Pokala Sushma" userId="8f92d326-2e04-4742-8ef3-263f618652de" providerId="ADAL" clId="{860254D0-E9E9-4D19-A949-C8C025EE3C1D}" dt="2026-08-28T06:20:55.030" v="356" actId="26606"/>
+          <ac:grpSpMkLst>
+            <pc:docMk/>
+            <pc:sldMk cId="745131472" sldId="257"/>
+            <ac:grpSpMk id="55" creationId="{DAA26DFA-AAB2-4973-9C17-16D587C7B198}"/>
+          </ac:grpSpMkLst>
+        </pc:grpChg>
+        <pc:graphicFrameChg chg="add del">
+          <ac:chgData name="Pokala Sushma" userId="8f92d326-2e04-4742-8ef3-263f618652de" providerId="ADAL" clId="{860254D0-E9E9-4D19-A949-C8C025EE3C1D}" dt="2026-08-28T06:20:12.279" v="342" actId="26606"/>
+          <ac:graphicFrameMkLst>
+            <pc:docMk/>
+            <pc:sldMk cId="745131472" sldId="257"/>
+            <ac:graphicFrameMk id="13" creationId="{080B312F-A0E4-CDF2-2A8E-68C8A4E50D15}"/>
+          </ac:graphicFrameMkLst>
+        </pc:graphicFrameChg>
+        <pc:graphicFrameChg chg="add del">
+          <ac:chgData name="Pokala Sushma" userId="8f92d326-2e04-4742-8ef3-263f618652de" providerId="ADAL" clId="{860254D0-E9E9-4D19-A949-C8C025EE3C1D}" dt="2026-08-28T06:20:17.673" v="344" actId="26606"/>
+          <ac:graphicFrameMkLst>
+            <pc:docMk/>
+            <pc:sldMk cId="745131472" sldId="257"/>
+            <ac:graphicFrameMk id="21" creationId="{285E153B-7170-8710-3ADD-FA406C42176E}"/>
+          </ac:graphicFrameMkLst>
+        </pc:graphicFrameChg>
+        <pc:graphicFrameChg chg="add del">
+          <ac:chgData name="Pokala Sushma" userId="8f92d326-2e04-4742-8ef3-263f618652de" providerId="ADAL" clId="{860254D0-E9E9-4D19-A949-C8C025EE3C1D}" dt="2026-08-28T06:20:36.023" v="348" actId="26606"/>
+          <ac:graphicFrameMkLst>
+            <pc:docMk/>
+            <pc:sldMk cId="745131472" sldId="257"/>
+            <ac:graphicFrameMk id="31" creationId="{CB75B1E7-D05F-B924-24AA-C5CB5B4D0703}"/>
+          </ac:graphicFrameMkLst>
+        </pc:graphicFrameChg>
+        <pc:graphicFrameChg chg="add del">
+          <ac:chgData name="Pokala Sushma" userId="8f92d326-2e04-4742-8ef3-263f618652de" providerId="ADAL" clId="{860254D0-E9E9-4D19-A949-C8C025EE3C1D}" dt="2026-08-28T06:20:44.526" v="350" actId="26606"/>
+          <ac:graphicFrameMkLst>
+            <pc:docMk/>
+            <pc:sldMk cId="745131472" sldId="257"/>
+            <ac:graphicFrameMk id="35" creationId="{080B312F-A0E4-CDF2-2A8E-68C8A4E50D15}"/>
+          </ac:graphicFrameMkLst>
+        </pc:graphicFrameChg>
+        <pc:graphicFrameChg chg="add del">
+          <ac:chgData name="Pokala Sushma" userId="8f92d326-2e04-4742-8ef3-263f618652de" providerId="ADAL" clId="{860254D0-E9E9-4D19-A949-C8C025EE3C1D}" dt="2026-08-28T06:20:47.736" v="352" actId="26606"/>
+          <ac:graphicFrameMkLst>
+            <pc:docMk/>
+            <pc:sldMk cId="745131472" sldId="257"/>
+            <ac:graphicFrameMk id="43" creationId="{285E153B-7170-8710-3ADD-FA406C42176E}"/>
+          </ac:graphicFrameMkLst>
+        </pc:graphicFrameChg>
+        <pc:graphicFrameChg chg="add del">
+          <ac:chgData name="Pokala Sushma" userId="8f92d326-2e04-4742-8ef3-263f618652de" providerId="ADAL" clId="{860254D0-E9E9-4D19-A949-C8C025EE3C1D}" dt="2026-08-28T06:20:48.822" v="354" actId="26606"/>
+          <ac:graphicFrameMkLst>
+            <pc:docMk/>
+            <pc:sldMk cId="745131472" sldId="257"/>
+            <ac:graphicFrameMk id="51" creationId="{64D3153E-A272-BB06-CFC0-0C4C089ED268}"/>
+          </ac:graphicFrameMkLst>
+        </pc:graphicFrameChg>
         <pc:picChg chg="add del">
           <ac:chgData name="Pokala Sushma" userId="8f92d326-2e04-4742-8ef3-263f618652de" providerId="ADAL" clId="{860254D0-E9E9-4D19-A949-C8C025EE3C1D}" dt="2026-08-28T04:48:45.801" v="334" actId="26606"/>
           <ac:picMkLst>
@@ -195,30 +531,490 @@
             <ac:picMk id="5" creationId="{35492EB4-1568-E32B-8C34-E37E5306E8B1}"/>
           </ac:picMkLst>
         </pc:picChg>
+        <pc:picChg chg="add del">
+          <ac:chgData name="Pokala Sushma" userId="8f92d326-2e04-4742-8ef3-263f618652de" providerId="ADAL" clId="{860254D0-E9E9-4D19-A949-C8C025EE3C1D}" dt="2026-08-28T06:20:01.278" v="340" actId="26606"/>
+          <ac:picMkLst>
+            <pc:docMk/>
+            <pc:sldMk cId="745131472" sldId="257"/>
+            <ac:picMk id="8" creationId="{47A5A81B-049D-0D6F-0D95-67D7DAFEF635}"/>
+          </ac:picMkLst>
+        </pc:picChg>
       </pc:sldChg>
-      <pc:sldChg chg="modSp mod">
-        <pc:chgData name="Pokala Sushma" userId="8f92d326-2e04-4742-8ef3-263f618652de" providerId="ADAL" clId="{860254D0-E9E9-4D19-A949-C8C025EE3C1D}" dt="2026-08-28T04:49:38.518" v="336" actId="113"/>
+      <pc:sldChg chg="addSp delSp modSp mod setBg">
+        <pc:chgData name="Pokala Sushma" userId="8f92d326-2e04-4742-8ef3-263f618652de" providerId="ADAL" clId="{860254D0-E9E9-4D19-A949-C8C025EE3C1D}" dt="2026-08-28T06:21:39.204" v="367" actId="26606"/>
+        <pc:sldMkLst>
+          <pc:docMk/>
+          <pc:sldMk cId="726539673" sldId="258"/>
+        </pc:sldMkLst>
+        <pc:spChg chg="mod">
+          <ac:chgData name="Pokala Sushma" userId="8f92d326-2e04-4742-8ef3-263f618652de" providerId="ADAL" clId="{860254D0-E9E9-4D19-A949-C8C025EE3C1D}" dt="2026-08-28T06:21:39.204" v="367" actId="26606"/>
+          <ac:spMkLst>
+            <pc:docMk/>
+            <pc:sldMk cId="726539673" sldId="258"/>
+            <ac:spMk id="3" creationId="{A550F7F6-E1E0-58DC-6480-0DC0C1033026}"/>
+          </ac:spMkLst>
+        </pc:spChg>
+        <pc:spChg chg="add del">
+          <ac:chgData name="Pokala Sushma" userId="8f92d326-2e04-4742-8ef3-263f618652de" providerId="ADAL" clId="{860254D0-E9E9-4D19-A949-C8C025EE3C1D}" dt="2026-08-28T06:21:26.909" v="362" actId="26606"/>
+          <ac:spMkLst>
+            <pc:docMk/>
+            <pc:sldMk cId="726539673" sldId="258"/>
+            <ac:spMk id="8" creationId="{F837543A-6020-4505-A233-C9DB4BF74011}"/>
+          </ac:spMkLst>
+        </pc:spChg>
+        <pc:spChg chg="add del">
+          <ac:chgData name="Pokala Sushma" userId="8f92d326-2e04-4742-8ef3-263f618652de" providerId="ADAL" clId="{860254D0-E9E9-4D19-A949-C8C025EE3C1D}" dt="2026-08-28T06:21:26.909" v="362" actId="26606"/>
+          <ac:spMkLst>
+            <pc:docMk/>
+            <pc:sldMk cId="726539673" sldId="258"/>
+            <ac:spMk id="10" creationId="{35B16301-FB18-48BA-A6DD-C37CAF6F9A18}"/>
+          </ac:spMkLst>
+        </pc:spChg>
+        <pc:spChg chg="add del">
+          <ac:chgData name="Pokala Sushma" userId="8f92d326-2e04-4742-8ef3-263f618652de" providerId="ADAL" clId="{860254D0-E9E9-4D19-A949-C8C025EE3C1D}" dt="2026-08-28T06:21:26.909" v="362" actId="26606"/>
+          <ac:spMkLst>
+            <pc:docMk/>
+            <pc:sldMk cId="726539673" sldId="258"/>
+            <ac:spMk id="12" creationId="{C3C0D90E-074A-4F52-9B11-B52BEF4BCBE5}"/>
+          </ac:spMkLst>
+        </pc:spChg>
+        <pc:spChg chg="add del">
+          <ac:chgData name="Pokala Sushma" userId="8f92d326-2e04-4742-8ef3-263f618652de" providerId="ADAL" clId="{860254D0-E9E9-4D19-A949-C8C025EE3C1D}" dt="2026-08-28T06:21:26.909" v="362" actId="26606"/>
+          <ac:spMkLst>
+            <pc:docMk/>
+            <pc:sldMk cId="726539673" sldId="258"/>
+            <ac:spMk id="14" creationId="{CABBD4C1-E6F8-46F6-8152-A8A97490BF4D}"/>
+          </ac:spMkLst>
+        </pc:spChg>
+        <pc:spChg chg="add del">
+          <ac:chgData name="Pokala Sushma" userId="8f92d326-2e04-4742-8ef3-263f618652de" providerId="ADAL" clId="{860254D0-E9E9-4D19-A949-C8C025EE3C1D}" dt="2026-08-28T06:21:26.909" v="362" actId="26606"/>
+          <ac:spMkLst>
+            <pc:docMk/>
+            <pc:sldMk cId="726539673" sldId="258"/>
+            <ac:spMk id="16" creationId="{83BA5EF5-1FE9-4BF9-83BB-269BCDDF6156}"/>
+          </ac:spMkLst>
+        </pc:spChg>
+        <pc:spChg chg="add del">
+          <ac:chgData name="Pokala Sushma" userId="8f92d326-2e04-4742-8ef3-263f618652de" providerId="ADAL" clId="{860254D0-E9E9-4D19-A949-C8C025EE3C1D}" dt="2026-08-28T06:21:26.909" v="362" actId="26606"/>
+          <ac:spMkLst>
+            <pc:docMk/>
+            <pc:sldMk cId="726539673" sldId="258"/>
+            <ac:spMk id="20" creationId="{88853921-7BC9-4BDE-ACAB-133C683C82D6}"/>
+          </ac:spMkLst>
+        </pc:spChg>
+        <pc:spChg chg="add del">
+          <ac:chgData name="Pokala Sushma" userId="8f92d326-2e04-4742-8ef3-263f618652de" providerId="ADAL" clId="{860254D0-E9E9-4D19-A949-C8C025EE3C1D}" dt="2026-08-28T06:21:26.909" v="362" actId="26606"/>
+          <ac:spMkLst>
+            <pc:docMk/>
+            <pc:sldMk cId="726539673" sldId="258"/>
+            <ac:spMk id="22" creationId="{09192968-3AE7-4470-A61C-97294BB92731}"/>
+          </ac:spMkLst>
+        </pc:spChg>
+        <pc:spChg chg="add del">
+          <ac:chgData name="Pokala Sushma" userId="8f92d326-2e04-4742-8ef3-263f618652de" providerId="ADAL" clId="{860254D0-E9E9-4D19-A949-C8C025EE3C1D}" dt="2026-08-28T06:21:26.909" v="362" actId="26606"/>
+          <ac:spMkLst>
+            <pc:docMk/>
+            <pc:sldMk cId="726539673" sldId="258"/>
+            <ac:spMk id="24" creationId="{3AB72E55-43E4-4356-BFE8-E2102CB0B505}"/>
+          </ac:spMkLst>
+        </pc:spChg>
+        <pc:spChg chg="add del">
+          <ac:chgData name="Pokala Sushma" userId="8f92d326-2e04-4742-8ef3-263f618652de" providerId="ADAL" clId="{860254D0-E9E9-4D19-A949-C8C025EE3C1D}" dt="2026-08-28T06:21:32.417" v="364" actId="26606"/>
+          <ac:spMkLst>
+            <pc:docMk/>
+            <pc:sldMk cId="726539673" sldId="258"/>
+            <ac:spMk id="26" creationId="{907EF6B7-1338-4443-8C46-6A318D952DFD}"/>
+          </ac:spMkLst>
+        </pc:spChg>
+        <pc:spChg chg="add del">
+          <ac:chgData name="Pokala Sushma" userId="8f92d326-2e04-4742-8ef3-263f618652de" providerId="ADAL" clId="{860254D0-E9E9-4D19-A949-C8C025EE3C1D}" dt="2026-08-28T06:21:32.417" v="364" actId="26606"/>
+          <ac:spMkLst>
+            <pc:docMk/>
+            <pc:sldMk cId="726539673" sldId="258"/>
+            <ac:spMk id="27" creationId="{DAAE4CDD-124C-4DCF-9584-B6033B545DD5}"/>
+          </ac:spMkLst>
+        </pc:spChg>
+        <pc:spChg chg="add del">
+          <ac:chgData name="Pokala Sushma" userId="8f92d326-2e04-4742-8ef3-263f618652de" providerId="ADAL" clId="{860254D0-E9E9-4D19-A949-C8C025EE3C1D}" dt="2026-08-28T06:21:32.417" v="364" actId="26606"/>
+          <ac:spMkLst>
+            <pc:docMk/>
+            <pc:sldMk cId="726539673" sldId="258"/>
+            <ac:spMk id="28" creationId="{081E4A58-353D-44AE-B2FC-2A74E2E400F7}"/>
+          </ac:spMkLst>
+        </pc:spChg>
+        <pc:spChg chg="add del">
+          <ac:chgData name="Pokala Sushma" userId="8f92d326-2e04-4742-8ef3-263f618652de" providerId="ADAL" clId="{860254D0-E9E9-4D19-A949-C8C025EE3C1D}" dt="2026-08-28T06:21:39.188" v="366" actId="26606"/>
+          <ac:spMkLst>
+            <pc:docMk/>
+            <pc:sldMk cId="726539673" sldId="258"/>
+            <ac:spMk id="30" creationId="{C2554CA6-288E-4202-BC52-2E5A8F0C0AED}"/>
+          </ac:spMkLst>
+        </pc:spChg>
+        <pc:spChg chg="add del">
+          <ac:chgData name="Pokala Sushma" userId="8f92d326-2e04-4742-8ef3-263f618652de" providerId="ADAL" clId="{860254D0-E9E9-4D19-A949-C8C025EE3C1D}" dt="2026-08-28T06:21:39.188" v="366" actId="26606"/>
+          <ac:spMkLst>
+            <pc:docMk/>
+            <pc:sldMk cId="726539673" sldId="258"/>
+            <ac:spMk id="31" creationId="{B10BB131-AC8E-4A8E-A5D1-36260F720C3B}"/>
+          </ac:spMkLst>
+        </pc:spChg>
+        <pc:spChg chg="add del">
+          <ac:chgData name="Pokala Sushma" userId="8f92d326-2e04-4742-8ef3-263f618652de" providerId="ADAL" clId="{860254D0-E9E9-4D19-A949-C8C025EE3C1D}" dt="2026-08-28T06:21:39.188" v="366" actId="26606"/>
+          <ac:spMkLst>
+            <pc:docMk/>
+            <pc:sldMk cId="726539673" sldId="258"/>
+            <ac:spMk id="32" creationId="{5B7778FC-632E-4DCA-A7CB-0D7731CCF970}"/>
+          </ac:spMkLst>
+        </pc:spChg>
+        <pc:spChg chg="add del">
+          <ac:chgData name="Pokala Sushma" userId="8f92d326-2e04-4742-8ef3-263f618652de" providerId="ADAL" clId="{860254D0-E9E9-4D19-A949-C8C025EE3C1D}" dt="2026-08-28T06:21:39.188" v="366" actId="26606"/>
+          <ac:spMkLst>
+            <pc:docMk/>
+            <pc:sldMk cId="726539673" sldId="258"/>
+            <ac:spMk id="33" creationId="{FA23A907-97FB-4A8F-880A-DD77401C4296}"/>
+          </ac:spMkLst>
+        </pc:spChg>
+        <pc:spChg chg="add">
+          <ac:chgData name="Pokala Sushma" userId="8f92d326-2e04-4742-8ef3-263f618652de" providerId="ADAL" clId="{860254D0-E9E9-4D19-A949-C8C025EE3C1D}" dt="2026-08-28T06:21:39.204" v="367" actId="26606"/>
+          <ac:spMkLst>
+            <pc:docMk/>
+            <pc:sldMk cId="726539673" sldId="258"/>
+            <ac:spMk id="35" creationId="{907EF6B7-1338-4443-8C46-6A318D952DFD}"/>
+          </ac:spMkLst>
+        </pc:spChg>
+        <pc:spChg chg="add">
+          <ac:chgData name="Pokala Sushma" userId="8f92d326-2e04-4742-8ef3-263f618652de" providerId="ADAL" clId="{860254D0-E9E9-4D19-A949-C8C025EE3C1D}" dt="2026-08-28T06:21:39.204" v="367" actId="26606"/>
+          <ac:spMkLst>
+            <pc:docMk/>
+            <pc:sldMk cId="726539673" sldId="258"/>
+            <ac:spMk id="36" creationId="{DAAE4CDD-124C-4DCF-9584-B6033B545DD5}"/>
+          </ac:spMkLst>
+        </pc:spChg>
+        <pc:spChg chg="add">
+          <ac:chgData name="Pokala Sushma" userId="8f92d326-2e04-4742-8ef3-263f618652de" providerId="ADAL" clId="{860254D0-E9E9-4D19-A949-C8C025EE3C1D}" dt="2026-08-28T06:21:39.204" v="367" actId="26606"/>
+          <ac:spMkLst>
+            <pc:docMk/>
+            <pc:sldMk cId="726539673" sldId="258"/>
+            <ac:spMk id="37" creationId="{081E4A58-353D-44AE-B2FC-2A74E2E400F7}"/>
+          </ac:spMkLst>
+        </pc:spChg>
+        <pc:cxnChg chg="add del">
+          <ac:chgData name="Pokala Sushma" userId="8f92d326-2e04-4742-8ef3-263f618652de" providerId="ADAL" clId="{860254D0-E9E9-4D19-A949-C8C025EE3C1D}" dt="2026-08-28T06:21:26.909" v="362" actId="26606"/>
+          <ac:cxnSpMkLst>
+            <pc:docMk/>
+            <pc:sldMk cId="726539673" sldId="258"/>
+            <ac:cxnSpMk id="18" creationId="{4B3BCACB-5880-460B-9606-8C433A9AF99D}"/>
+          </ac:cxnSpMkLst>
+        </pc:cxnChg>
+      </pc:sldChg>
+      <pc:sldChg chg="addSp delSp modSp mod setBg">
+        <pc:chgData name="Pokala Sushma" userId="8f92d326-2e04-4742-8ef3-263f618652de" providerId="ADAL" clId="{860254D0-E9E9-4D19-A949-C8C025EE3C1D}" dt="2026-08-28T06:23:38.716" v="383" actId="26606"/>
+        <pc:sldMkLst>
+          <pc:docMk/>
+          <pc:sldMk cId="2595635731" sldId="259"/>
+        </pc:sldMkLst>
+        <pc:spChg chg="mod">
+          <ac:chgData name="Pokala Sushma" userId="8f92d326-2e04-4742-8ef3-263f618652de" providerId="ADAL" clId="{860254D0-E9E9-4D19-A949-C8C025EE3C1D}" dt="2026-08-28T06:21:57.999" v="369" actId="26606"/>
+          <ac:spMkLst>
+            <pc:docMk/>
+            <pc:sldMk cId="2595635731" sldId="259"/>
+            <ac:spMk id="3" creationId="{C00D0799-00FE-4692-4D66-995E18F0B146}"/>
+          </ac:spMkLst>
+        </pc:spChg>
+        <pc:spChg chg="add del">
+          <ac:chgData name="Pokala Sushma" userId="8f92d326-2e04-4742-8ef3-263f618652de" providerId="ADAL" clId="{860254D0-E9E9-4D19-A949-C8C025EE3C1D}" dt="2026-08-28T06:21:09.844" v="359" actId="26606"/>
+          <ac:spMkLst>
+            <pc:docMk/>
+            <pc:sldMk cId="2595635731" sldId="259"/>
+            <ac:spMk id="9" creationId="{2EB492CD-616E-47F8-933B-5E2D952A0593}"/>
+          </ac:spMkLst>
+        </pc:spChg>
+        <pc:spChg chg="add del">
+          <ac:chgData name="Pokala Sushma" userId="8f92d326-2e04-4742-8ef3-263f618652de" providerId="ADAL" clId="{860254D0-E9E9-4D19-A949-C8C025EE3C1D}" dt="2026-08-28T06:21:09.844" v="359" actId="26606"/>
+          <ac:spMkLst>
+            <pc:docMk/>
+            <pc:sldMk cId="2595635731" sldId="259"/>
+            <ac:spMk id="11" creationId="{59383CF9-23B5-4335-9B21-1791C4CF1C75}"/>
+          </ac:spMkLst>
+        </pc:spChg>
+        <pc:spChg chg="add del">
+          <ac:chgData name="Pokala Sushma" userId="8f92d326-2e04-4742-8ef3-263f618652de" providerId="ADAL" clId="{860254D0-E9E9-4D19-A949-C8C025EE3C1D}" dt="2026-08-28T06:21:09.844" v="359" actId="26606"/>
+          <ac:spMkLst>
+            <pc:docMk/>
+            <pc:sldMk cId="2595635731" sldId="259"/>
+            <ac:spMk id="13" creationId="{0007FE00-9498-4706-B255-6437B0252C02}"/>
+          </ac:spMkLst>
+        </pc:spChg>
+        <pc:spChg chg="add del">
+          <ac:chgData name="Pokala Sushma" userId="8f92d326-2e04-4742-8ef3-263f618652de" providerId="ADAL" clId="{860254D0-E9E9-4D19-A949-C8C025EE3C1D}" dt="2026-08-28T06:21:57.999" v="369" actId="26606"/>
+          <ac:spMkLst>
+            <pc:docMk/>
+            <pc:sldMk cId="2595635731" sldId="259"/>
+            <ac:spMk id="15" creationId="{2EB492CD-616E-47F8-933B-5E2D952A0593}"/>
+          </ac:spMkLst>
+        </pc:spChg>
+        <pc:spChg chg="add del">
+          <ac:chgData name="Pokala Sushma" userId="8f92d326-2e04-4742-8ef3-263f618652de" providerId="ADAL" clId="{860254D0-E9E9-4D19-A949-C8C025EE3C1D}" dt="2026-08-28T06:21:57.999" v="369" actId="26606"/>
+          <ac:spMkLst>
+            <pc:docMk/>
+            <pc:sldMk cId="2595635731" sldId="259"/>
+            <ac:spMk id="16" creationId="{59383CF9-23B5-4335-9B21-1791C4CF1C75}"/>
+          </ac:spMkLst>
+        </pc:spChg>
+        <pc:spChg chg="add del">
+          <ac:chgData name="Pokala Sushma" userId="8f92d326-2e04-4742-8ef3-263f618652de" providerId="ADAL" clId="{860254D0-E9E9-4D19-A949-C8C025EE3C1D}" dt="2026-08-28T06:21:57.999" v="369" actId="26606"/>
+          <ac:spMkLst>
+            <pc:docMk/>
+            <pc:sldMk cId="2595635731" sldId="259"/>
+            <ac:spMk id="17" creationId="{0007FE00-9498-4706-B255-6437B0252C02}"/>
+          </ac:spMkLst>
+        </pc:spChg>
+        <pc:spChg chg="add del">
+          <ac:chgData name="Pokala Sushma" userId="8f92d326-2e04-4742-8ef3-263f618652de" providerId="ADAL" clId="{860254D0-E9E9-4D19-A949-C8C025EE3C1D}" dt="2026-08-28T06:22:30.220" v="372" actId="26606"/>
+          <ac:spMkLst>
+            <pc:docMk/>
+            <pc:sldMk cId="2595635731" sldId="259"/>
+            <ac:spMk id="22" creationId="{A2679492-7988-4050-9056-542444452411}"/>
+          </ac:spMkLst>
+        </pc:spChg>
+        <pc:spChg chg="add del">
+          <ac:chgData name="Pokala Sushma" userId="8f92d326-2e04-4742-8ef3-263f618652de" providerId="ADAL" clId="{860254D0-E9E9-4D19-A949-C8C025EE3C1D}" dt="2026-08-28T06:22:30.220" v="372" actId="26606"/>
+          <ac:spMkLst>
+            <pc:docMk/>
+            <pc:sldMk cId="2595635731" sldId="259"/>
+            <ac:spMk id="24" creationId="{B091B163-7D61-4891-ABCF-5C13D9C418D0}"/>
+          </ac:spMkLst>
+        </pc:spChg>
+        <pc:spChg chg="add del">
+          <ac:chgData name="Pokala Sushma" userId="8f92d326-2e04-4742-8ef3-263f618652de" providerId="ADAL" clId="{860254D0-E9E9-4D19-A949-C8C025EE3C1D}" dt="2026-08-28T06:23:38.716" v="383" actId="26606"/>
+          <ac:spMkLst>
+            <pc:docMk/>
+            <pc:sldMk cId="2595635731" sldId="259"/>
+            <ac:spMk id="31" creationId="{A2679492-7988-4050-9056-542444452411}"/>
+          </ac:spMkLst>
+        </pc:spChg>
+        <pc:spChg chg="add del">
+          <ac:chgData name="Pokala Sushma" userId="8f92d326-2e04-4742-8ef3-263f618652de" providerId="ADAL" clId="{860254D0-E9E9-4D19-A949-C8C025EE3C1D}" dt="2026-08-28T06:23:38.716" v="383" actId="26606"/>
+          <ac:spMkLst>
+            <pc:docMk/>
+            <pc:sldMk cId="2595635731" sldId="259"/>
+            <ac:spMk id="33" creationId="{B091B163-7D61-4891-ABCF-5C13D9C418D0}"/>
+          </ac:spMkLst>
+        </pc:spChg>
+        <pc:spChg chg="add">
+          <ac:chgData name="Pokala Sushma" userId="8f92d326-2e04-4742-8ef3-263f618652de" providerId="ADAL" clId="{860254D0-E9E9-4D19-A949-C8C025EE3C1D}" dt="2026-08-28T06:23:38.716" v="383" actId="26606"/>
+          <ac:spMkLst>
+            <pc:docMk/>
+            <pc:sldMk cId="2595635731" sldId="259"/>
+            <ac:spMk id="40" creationId="{A2679492-7988-4050-9056-542444452411}"/>
+          </ac:spMkLst>
+        </pc:spChg>
+        <pc:spChg chg="add">
+          <ac:chgData name="Pokala Sushma" userId="8f92d326-2e04-4742-8ef3-263f618652de" providerId="ADAL" clId="{860254D0-E9E9-4D19-A949-C8C025EE3C1D}" dt="2026-08-28T06:23:38.716" v="383" actId="26606"/>
+          <ac:spMkLst>
+            <pc:docMk/>
+            <pc:sldMk cId="2595635731" sldId="259"/>
+            <ac:spMk id="42" creationId="{B091B163-7D61-4891-ABCF-5C13D9C418D0}"/>
+          </ac:spMkLst>
+        </pc:spChg>
+        <pc:graphicFrameChg chg="add mod modGraphic">
+          <ac:chgData name="Pokala Sushma" userId="8f92d326-2e04-4742-8ef3-263f618652de" providerId="ADAL" clId="{860254D0-E9E9-4D19-A949-C8C025EE3C1D}" dt="2026-08-28T06:23:38.716" v="383" actId="26606"/>
+          <ac:graphicFrameMkLst>
+            <pc:docMk/>
+            <pc:sldMk cId="2595635731" sldId="259"/>
+            <ac:graphicFrameMk id="4" creationId="{80510BE6-C3DD-2076-FEB2-2B8F89408168}"/>
+          </ac:graphicFrameMkLst>
+        </pc:graphicFrameChg>
+        <pc:cxnChg chg="add del">
+          <ac:chgData name="Pokala Sushma" userId="8f92d326-2e04-4742-8ef3-263f618652de" providerId="ADAL" clId="{860254D0-E9E9-4D19-A949-C8C025EE3C1D}" dt="2026-08-28T06:22:30.220" v="372" actId="26606"/>
+          <ac:cxnSpMkLst>
+            <pc:docMk/>
+            <pc:sldMk cId="2595635731" sldId="259"/>
+            <ac:cxnSpMk id="26" creationId="{C49DA8F6-BCC1-4447-B54C-57856834B94B}"/>
+          </ac:cxnSpMkLst>
+        </pc:cxnChg>
+        <pc:cxnChg chg="add del">
+          <ac:chgData name="Pokala Sushma" userId="8f92d326-2e04-4742-8ef3-263f618652de" providerId="ADAL" clId="{860254D0-E9E9-4D19-A949-C8C025EE3C1D}" dt="2026-08-28T06:23:38.716" v="383" actId="26606"/>
+          <ac:cxnSpMkLst>
+            <pc:docMk/>
+            <pc:sldMk cId="2595635731" sldId="259"/>
+            <ac:cxnSpMk id="35" creationId="{C49DA8F6-BCC1-4447-B54C-57856834B94B}"/>
+          </ac:cxnSpMkLst>
+        </pc:cxnChg>
+        <pc:cxnChg chg="add">
+          <ac:chgData name="Pokala Sushma" userId="8f92d326-2e04-4742-8ef3-263f618652de" providerId="ADAL" clId="{860254D0-E9E9-4D19-A949-C8C025EE3C1D}" dt="2026-08-28T06:23:38.716" v="383" actId="26606"/>
+          <ac:cxnSpMkLst>
+            <pc:docMk/>
+            <pc:sldMk cId="2595635731" sldId="259"/>
+            <ac:cxnSpMk id="44" creationId="{C49DA8F6-BCC1-4447-B54C-57856834B94B}"/>
+          </ac:cxnSpMkLst>
+        </pc:cxnChg>
+      </pc:sldChg>
+      <pc:sldChg chg="addSp modSp mod setBg">
+        <pc:chgData name="Pokala Sushma" userId="8f92d326-2e04-4742-8ef3-263f618652de" providerId="ADAL" clId="{860254D0-E9E9-4D19-A949-C8C025EE3C1D}" dt="2026-08-28T06:22:10.685" v="370" actId="26606"/>
         <pc:sldMkLst>
           <pc:docMk/>
           <pc:sldMk cId="2796664089" sldId="260"/>
         </pc:sldMkLst>
         <pc:spChg chg="mod">
-          <ac:chgData name="Pokala Sushma" userId="8f92d326-2e04-4742-8ef3-263f618652de" providerId="ADAL" clId="{860254D0-E9E9-4D19-A949-C8C025EE3C1D}" dt="2026-08-28T04:49:38.518" v="336" actId="113"/>
+          <ac:chgData name="Pokala Sushma" userId="8f92d326-2e04-4742-8ef3-263f618652de" providerId="ADAL" clId="{860254D0-E9E9-4D19-A949-C8C025EE3C1D}" dt="2026-08-28T06:22:10.685" v="370" actId="26606"/>
           <ac:spMkLst>
             <pc:docMk/>
             <pc:sldMk cId="2796664089" sldId="260"/>
             <ac:spMk id="2" creationId="{49570EC0-E527-BF2A-89BC-6AB1B8F67A9A}"/>
           </ac:spMkLst>
         </pc:spChg>
+        <pc:spChg chg="mod">
+          <ac:chgData name="Pokala Sushma" userId="8f92d326-2e04-4742-8ef3-263f618652de" providerId="ADAL" clId="{860254D0-E9E9-4D19-A949-C8C025EE3C1D}" dt="2026-08-28T06:22:10.685" v="370" actId="26606"/>
+          <ac:spMkLst>
+            <pc:docMk/>
+            <pc:sldMk cId="2796664089" sldId="260"/>
+            <ac:spMk id="3" creationId="{89C69E6B-595E-4C1A-2D5B-31B66E2CC4EA}"/>
+          </ac:spMkLst>
+        </pc:spChg>
+        <pc:spChg chg="add">
+          <ac:chgData name="Pokala Sushma" userId="8f92d326-2e04-4742-8ef3-263f618652de" providerId="ADAL" clId="{860254D0-E9E9-4D19-A949-C8C025EE3C1D}" dt="2026-08-28T06:22:10.685" v="370" actId="26606"/>
+          <ac:spMkLst>
+            <pc:docMk/>
+            <pc:sldMk cId="2796664089" sldId="260"/>
+            <ac:spMk id="8" creationId="{907EF6B7-1338-4443-8C46-6A318D952DFD}"/>
+          </ac:spMkLst>
+        </pc:spChg>
+        <pc:spChg chg="add">
+          <ac:chgData name="Pokala Sushma" userId="8f92d326-2e04-4742-8ef3-263f618652de" providerId="ADAL" clId="{860254D0-E9E9-4D19-A949-C8C025EE3C1D}" dt="2026-08-28T06:22:10.685" v="370" actId="26606"/>
+          <ac:spMkLst>
+            <pc:docMk/>
+            <pc:sldMk cId="2796664089" sldId="260"/>
+            <ac:spMk id="10" creationId="{DAAE4CDD-124C-4DCF-9584-B6033B545DD5}"/>
+          </ac:spMkLst>
+        </pc:spChg>
+        <pc:spChg chg="add">
+          <ac:chgData name="Pokala Sushma" userId="8f92d326-2e04-4742-8ef3-263f618652de" providerId="ADAL" clId="{860254D0-E9E9-4D19-A949-C8C025EE3C1D}" dt="2026-08-28T06:22:10.685" v="370" actId="26606"/>
+          <ac:spMkLst>
+            <pc:docMk/>
+            <pc:sldMk cId="2796664089" sldId="260"/>
+            <ac:spMk id="12" creationId="{081E4A58-353D-44AE-B2FC-2A74E2E400F7}"/>
+          </ac:spMkLst>
+        </pc:spChg>
+      </pc:sldChg>
+      <pc:sldChg chg="addSp delSp modSp mod setBg">
+        <pc:chgData name="Pokala Sushma" userId="8f92d326-2e04-4742-8ef3-263f618652de" providerId="ADAL" clId="{860254D0-E9E9-4D19-A949-C8C025EE3C1D}" dt="2026-08-28T06:24:06.578" v="384" actId="26606"/>
+        <pc:sldMkLst>
+          <pc:docMk/>
+          <pc:sldMk cId="2780105295" sldId="261"/>
+        </pc:sldMkLst>
+        <pc:spChg chg="mod">
+          <ac:chgData name="Pokala Sushma" userId="8f92d326-2e04-4742-8ef3-263f618652de" providerId="ADAL" clId="{860254D0-E9E9-4D19-A949-C8C025EE3C1D}" dt="2026-08-28T06:22:18.215" v="371" actId="26606"/>
+          <ac:spMkLst>
+            <pc:docMk/>
+            <pc:sldMk cId="2780105295" sldId="261"/>
+            <ac:spMk id="3" creationId="{739ED762-6028-226D-BFB7-BD2C630BB980}"/>
+          </ac:spMkLst>
+        </pc:spChg>
+        <pc:spChg chg="add del">
+          <ac:chgData name="Pokala Sushma" userId="8f92d326-2e04-4742-8ef3-263f618652de" providerId="ADAL" clId="{860254D0-E9E9-4D19-A949-C8C025EE3C1D}" dt="2026-08-28T06:24:06.578" v="384" actId="26606"/>
+          <ac:spMkLst>
+            <pc:docMk/>
+            <pc:sldMk cId="2780105295" sldId="261"/>
+            <ac:spMk id="9" creationId="{A2679492-7988-4050-9056-542444452411}"/>
+          </ac:spMkLst>
+        </pc:spChg>
+        <pc:spChg chg="add del">
+          <ac:chgData name="Pokala Sushma" userId="8f92d326-2e04-4742-8ef3-263f618652de" providerId="ADAL" clId="{860254D0-E9E9-4D19-A949-C8C025EE3C1D}" dt="2026-08-28T06:24:06.578" v="384" actId="26606"/>
+          <ac:spMkLst>
+            <pc:docMk/>
+            <pc:sldMk cId="2780105295" sldId="261"/>
+            <ac:spMk id="11" creationId="{B091B163-7D61-4891-ABCF-5C13D9C418D0}"/>
+          </ac:spMkLst>
+        </pc:spChg>
+        <pc:spChg chg="add">
+          <ac:chgData name="Pokala Sushma" userId="8f92d326-2e04-4742-8ef3-263f618652de" providerId="ADAL" clId="{860254D0-E9E9-4D19-A949-C8C025EE3C1D}" dt="2026-08-28T06:24:06.578" v="384" actId="26606"/>
+          <ac:spMkLst>
+            <pc:docMk/>
+            <pc:sldMk cId="2780105295" sldId="261"/>
+            <ac:spMk id="18" creationId="{A2679492-7988-4050-9056-542444452411}"/>
+          </ac:spMkLst>
+        </pc:spChg>
+        <pc:spChg chg="add">
+          <ac:chgData name="Pokala Sushma" userId="8f92d326-2e04-4742-8ef3-263f618652de" providerId="ADAL" clId="{860254D0-E9E9-4D19-A949-C8C025EE3C1D}" dt="2026-08-28T06:24:06.578" v="384" actId="26606"/>
+          <ac:spMkLst>
+            <pc:docMk/>
+            <pc:sldMk cId="2780105295" sldId="261"/>
+            <ac:spMk id="20" creationId="{B091B163-7D61-4891-ABCF-5C13D9C418D0}"/>
+          </ac:spMkLst>
+        </pc:spChg>
+        <pc:graphicFrameChg chg="add mod modGraphic">
+          <ac:chgData name="Pokala Sushma" userId="8f92d326-2e04-4742-8ef3-263f618652de" providerId="ADAL" clId="{860254D0-E9E9-4D19-A949-C8C025EE3C1D}" dt="2026-08-28T06:24:06.578" v="384" actId="26606"/>
+          <ac:graphicFrameMkLst>
+            <pc:docMk/>
+            <pc:sldMk cId="2780105295" sldId="261"/>
+            <ac:graphicFrameMk id="4" creationId="{F995CEC0-F24A-64FA-5224-699D04BD6A9D}"/>
+          </ac:graphicFrameMkLst>
+        </pc:graphicFrameChg>
+        <pc:cxnChg chg="add del">
+          <ac:chgData name="Pokala Sushma" userId="8f92d326-2e04-4742-8ef3-263f618652de" providerId="ADAL" clId="{860254D0-E9E9-4D19-A949-C8C025EE3C1D}" dt="2026-08-28T06:24:06.578" v="384" actId="26606"/>
+          <ac:cxnSpMkLst>
+            <pc:docMk/>
+            <pc:sldMk cId="2780105295" sldId="261"/>
+            <ac:cxnSpMk id="13" creationId="{C49DA8F6-BCC1-4447-B54C-57856834B94B}"/>
+          </ac:cxnSpMkLst>
+        </pc:cxnChg>
+        <pc:cxnChg chg="add">
+          <ac:chgData name="Pokala Sushma" userId="8f92d326-2e04-4742-8ef3-263f618652de" providerId="ADAL" clId="{860254D0-E9E9-4D19-A949-C8C025EE3C1D}" dt="2026-08-28T06:24:06.578" v="384" actId="26606"/>
+          <ac:cxnSpMkLst>
+            <pc:docMk/>
+            <pc:sldMk cId="2780105295" sldId="261"/>
+            <ac:cxnSpMk id="22" creationId="{C49DA8F6-BCC1-4447-B54C-57856834B94B}"/>
+          </ac:cxnSpMkLst>
+        </pc:cxnChg>
+      </pc:sldChg>
+      <pc:sldChg chg="addSp modSp mod setBg">
+        <pc:chgData name="Pokala Sushma" userId="8f92d326-2e04-4742-8ef3-263f618652de" providerId="ADAL" clId="{860254D0-E9E9-4D19-A949-C8C025EE3C1D}" dt="2026-08-28T06:22:35.465" v="373" actId="26606"/>
+        <pc:sldMkLst>
+          <pc:docMk/>
+          <pc:sldMk cId="2256237774" sldId="262"/>
+        </pc:sldMkLst>
+        <pc:spChg chg="mod">
+          <ac:chgData name="Pokala Sushma" userId="8f92d326-2e04-4742-8ef3-263f618652de" providerId="ADAL" clId="{860254D0-E9E9-4D19-A949-C8C025EE3C1D}" dt="2026-08-28T06:22:35.465" v="373" actId="26606"/>
+          <ac:spMkLst>
+            <pc:docMk/>
+            <pc:sldMk cId="2256237774" sldId="262"/>
+            <ac:spMk id="3" creationId="{B1921924-79BE-2CD4-998B-076D3EFCC772}"/>
+          </ac:spMkLst>
+        </pc:spChg>
+        <pc:spChg chg="add">
+          <ac:chgData name="Pokala Sushma" userId="8f92d326-2e04-4742-8ef3-263f618652de" providerId="ADAL" clId="{860254D0-E9E9-4D19-A949-C8C025EE3C1D}" dt="2026-08-28T06:22:35.465" v="373" actId="26606"/>
+          <ac:spMkLst>
+            <pc:docMk/>
+            <pc:sldMk cId="2256237774" sldId="262"/>
+            <ac:spMk id="8" creationId="{907EF6B7-1338-4443-8C46-6A318D952DFD}"/>
+          </ac:spMkLst>
+        </pc:spChg>
+        <pc:spChg chg="add">
+          <ac:chgData name="Pokala Sushma" userId="8f92d326-2e04-4742-8ef3-263f618652de" providerId="ADAL" clId="{860254D0-E9E9-4D19-A949-C8C025EE3C1D}" dt="2026-08-28T06:22:35.465" v="373" actId="26606"/>
+          <ac:spMkLst>
+            <pc:docMk/>
+            <pc:sldMk cId="2256237774" sldId="262"/>
+            <ac:spMk id="10" creationId="{DAAE4CDD-124C-4DCF-9584-B6033B545DD5}"/>
+          </ac:spMkLst>
+        </pc:spChg>
+        <pc:spChg chg="add">
+          <ac:chgData name="Pokala Sushma" userId="8f92d326-2e04-4742-8ef3-263f618652de" providerId="ADAL" clId="{860254D0-E9E9-4D19-A949-C8C025EE3C1D}" dt="2026-08-28T06:22:35.465" v="373" actId="26606"/>
+          <ac:spMkLst>
+            <pc:docMk/>
+            <pc:sldMk cId="2256237774" sldId="262"/>
+            <ac:spMk id="12" creationId="{081E4A58-353D-44AE-B2FC-2A74E2E400F7}"/>
+          </ac:spMkLst>
+        </pc:spChg>
       </pc:sldChg>
       <pc:sldChg chg="addSp delSp modSp new mod setBg">
-        <pc:chgData name="Pokala Sushma" userId="8f92d326-2e04-4742-8ef3-263f618652de" providerId="ADAL" clId="{860254D0-E9E9-4D19-A949-C8C025EE3C1D}" dt="2026-08-28T04:46:37.486" v="332" actId="26606"/>
+        <pc:chgData name="Pokala Sushma" userId="8f92d326-2e04-4742-8ef3-263f618652de" providerId="ADAL" clId="{860254D0-E9E9-4D19-A949-C8C025EE3C1D}" dt="2026-08-28T06:28:59.581" v="478" actId="1076"/>
         <pc:sldMkLst>
           <pc:docMk/>
           <pc:sldMk cId="1148864122" sldId="263"/>
         </pc:sldMkLst>
         <pc:spChg chg="mod">
-          <ac:chgData name="Pokala Sushma" userId="8f92d326-2e04-4742-8ef3-263f618652de" providerId="ADAL" clId="{860254D0-E9E9-4D19-A949-C8C025EE3C1D}" dt="2026-08-28T04:46:37.486" v="332" actId="26606"/>
+          <ac:chgData name="Pokala Sushma" userId="8f92d326-2e04-4742-8ef3-263f618652de" providerId="ADAL" clId="{860254D0-E9E9-4D19-A949-C8C025EE3C1D}" dt="2026-08-28T06:23:19.778" v="382" actId="26606"/>
           <ac:spMkLst>
             <pc:docMk/>
             <pc:sldMk cId="1148864122" sldId="263"/>
@@ -226,7 +1022,7 @@
           </ac:spMkLst>
         </pc:spChg>
         <pc:spChg chg="mod">
-          <ac:chgData name="Pokala Sushma" userId="8f92d326-2e04-4742-8ef3-263f618652de" providerId="ADAL" clId="{860254D0-E9E9-4D19-A949-C8C025EE3C1D}" dt="2026-08-28T04:46:37.486" v="332" actId="26606"/>
+          <ac:chgData name="Pokala Sushma" userId="8f92d326-2e04-4742-8ef3-263f618652de" providerId="ADAL" clId="{860254D0-E9E9-4D19-A949-C8C025EE3C1D}" dt="2026-08-28T06:28:59.581" v="478" actId="1076"/>
           <ac:spMkLst>
             <pc:docMk/>
             <pc:sldMk cId="1148864122" sldId="263"/>
@@ -513,28 +1309,148 @@
             <ac:spMk id="91" creationId="{8D1AD6B3-BE88-4CEB-BA17-790657CC4729}"/>
           </ac:spMkLst>
         </pc:spChg>
-        <pc:spChg chg="add">
-          <ac:chgData name="Pokala Sushma" userId="8f92d326-2e04-4742-8ef3-263f618652de" providerId="ADAL" clId="{860254D0-E9E9-4D19-A949-C8C025EE3C1D}" dt="2026-08-28T04:46:37.486" v="332" actId="26606"/>
+        <pc:spChg chg="add del">
+          <ac:chgData name="Pokala Sushma" userId="8f92d326-2e04-4742-8ef3-263f618652de" providerId="ADAL" clId="{860254D0-E9E9-4D19-A949-C8C025EE3C1D}" dt="2026-08-28T06:21:49.740" v="368" actId="26606"/>
           <ac:spMkLst>
             <pc:docMk/>
             <pc:sldMk cId="1148864122" sldId="263"/>
             <ac:spMk id="97" creationId="{081EA652-8C6A-4E69-BEB9-170809474553}"/>
           </ac:spMkLst>
         </pc:spChg>
-        <pc:spChg chg="add">
-          <ac:chgData name="Pokala Sushma" userId="8f92d326-2e04-4742-8ef3-263f618652de" providerId="ADAL" clId="{860254D0-E9E9-4D19-A949-C8C025EE3C1D}" dt="2026-08-28T04:46:37.486" v="332" actId="26606"/>
+        <pc:spChg chg="add del">
+          <ac:chgData name="Pokala Sushma" userId="8f92d326-2e04-4742-8ef3-263f618652de" providerId="ADAL" clId="{860254D0-E9E9-4D19-A949-C8C025EE3C1D}" dt="2026-08-28T06:21:49.740" v="368" actId="26606"/>
           <ac:spMkLst>
             <pc:docMk/>
             <pc:sldMk cId="1148864122" sldId="263"/>
             <ac:spMk id="98" creationId="{5298780A-33B9-4EA2-8F67-DE68AD62841B}"/>
           </ac:spMkLst>
         </pc:spChg>
-        <pc:spChg chg="add">
-          <ac:chgData name="Pokala Sushma" userId="8f92d326-2e04-4742-8ef3-263f618652de" providerId="ADAL" clId="{860254D0-E9E9-4D19-A949-C8C025EE3C1D}" dt="2026-08-28T04:46:37.486" v="332" actId="26606"/>
+        <pc:spChg chg="add del">
+          <ac:chgData name="Pokala Sushma" userId="8f92d326-2e04-4742-8ef3-263f618652de" providerId="ADAL" clId="{860254D0-E9E9-4D19-A949-C8C025EE3C1D}" dt="2026-08-28T06:21:49.740" v="368" actId="26606"/>
           <ac:spMkLst>
             <pc:docMk/>
             <pc:sldMk cId="1148864122" sldId="263"/>
             <ac:spMk id="99" creationId="{7F488E8B-4E1E-4402-8935-D4E6C02615C7}"/>
+          </ac:spMkLst>
+        </pc:spChg>
+        <pc:spChg chg="add del">
+          <ac:chgData name="Pokala Sushma" userId="8f92d326-2e04-4742-8ef3-263f618652de" providerId="ADAL" clId="{860254D0-E9E9-4D19-A949-C8C025EE3C1D}" dt="2026-08-28T06:23:19.778" v="382" actId="26606"/>
+          <ac:spMkLst>
+            <pc:docMk/>
+            <pc:sldMk cId="1148864122" sldId="263"/>
+            <ac:spMk id="104" creationId="{907EF6B7-1338-4443-8C46-6A318D952DFD}"/>
+          </ac:spMkLst>
+        </pc:spChg>
+        <pc:spChg chg="add del">
+          <ac:chgData name="Pokala Sushma" userId="8f92d326-2e04-4742-8ef3-263f618652de" providerId="ADAL" clId="{860254D0-E9E9-4D19-A949-C8C025EE3C1D}" dt="2026-08-28T06:23:19.778" v="382" actId="26606"/>
+          <ac:spMkLst>
+            <pc:docMk/>
+            <pc:sldMk cId="1148864122" sldId="263"/>
+            <ac:spMk id="106" creationId="{DAAE4CDD-124C-4DCF-9584-B6033B545DD5}"/>
+          </ac:spMkLst>
+        </pc:spChg>
+        <pc:spChg chg="add del">
+          <ac:chgData name="Pokala Sushma" userId="8f92d326-2e04-4742-8ef3-263f618652de" providerId="ADAL" clId="{860254D0-E9E9-4D19-A949-C8C025EE3C1D}" dt="2026-08-28T06:23:19.778" v="382" actId="26606"/>
+          <ac:spMkLst>
+            <pc:docMk/>
+            <pc:sldMk cId="1148864122" sldId="263"/>
+            <ac:spMk id="108" creationId="{081E4A58-353D-44AE-B2FC-2A74E2E400F7}"/>
+          </ac:spMkLst>
+        </pc:spChg>
+        <pc:spChg chg="add del">
+          <ac:chgData name="Pokala Sushma" userId="8f92d326-2e04-4742-8ef3-263f618652de" providerId="ADAL" clId="{860254D0-E9E9-4D19-A949-C8C025EE3C1D}" dt="2026-08-28T06:23:08.494" v="375" actId="26606"/>
+          <ac:spMkLst>
+            <pc:docMk/>
+            <pc:sldMk cId="1148864122" sldId="263"/>
+            <ac:spMk id="113" creationId="{18873D23-2DCF-4B31-A009-95721C06E8E1}"/>
+          </ac:spMkLst>
+        </pc:spChg>
+        <pc:spChg chg="add del">
+          <ac:chgData name="Pokala Sushma" userId="8f92d326-2e04-4742-8ef3-263f618652de" providerId="ADAL" clId="{860254D0-E9E9-4D19-A949-C8C025EE3C1D}" dt="2026-08-28T06:23:08.494" v="375" actId="26606"/>
+          <ac:spMkLst>
+            <pc:docMk/>
+            <pc:sldMk cId="1148864122" sldId="263"/>
+            <ac:spMk id="115" creationId="{C13EF075-D4EF-4929-ADBC-91B27DA19955}"/>
+          </ac:spMkLst>
+        </pc:spChg>
+        <pc:spChg chg="add del">
+          <ac:chgData name="Pokala Sushma" userId="8f92d326-2e04-4742-8ef3-263f618652de" providerId="ADAL" clId="{860254D0-E9E9-4D19-A949-C8C025EE3C1D}" dt="2026-08-28T06:23:11.434" v="377" actId="26606"/>
+          <ac:spMkLst>
+            <pc:docMk/>
+            <pc:sldMk cId="1148864122" sldId="263"/>
+            <ac:spMk id="129" creationId="{815925C2-A704-4D47-B1C1-3FCA52512EC1}"/>
+          </ac:spMkLst>
+        </pc:spChg>
+        <pc:spChg chg="add del">
+          <ac:chgData name="Pokala Sushma" userId="8f92d326-2e04-4742-8ef3-263f618652de" providerId="ADAL" clId="{860254D0-E9E9-4D19-A949-C8C025EE3C1D}" dt="2026-08-28T06:23:11.434" v="377" actId="26606"/>
+          <ac:spMkLst>
+            <pc:docMk/>
+            <pc:sldMk cId="1148864122" sldId="263"/>
+            <ac:spMk id="130" creationId="{01D4315C-C23C-4FD3-98DF-08C29E2292A8}"/>
+          </ac:spMkLst>
+        </pc:spChg>
+        <pc:spChg chg="add del">
+          <ac:chgData name="Pokala Sushma" userId="8f92d326-2e04-4742-8ef3-263f618652de" providerId="ADAL" clId="{860254D0-E9E9-4D19-A949-C8C025EE3C1D}" dt="2026-08-28T06:23:13.973" v="379" actId="26606"/>
+          <ac:spMkLst>
+            <pc:docMk/>
+            <pc:sldMk cId="1148864122" sldId="263"/>
+            <ac:spMk id="136" creationId="{18873D23-2DCF-4B31-A009-95721C06E8E1}"/>
+          </ac:spMkLst>
+        </pc:spChg>
+        <pc:spChg chg="add del">
+          <ac:chgData name="Pokala Sushma" userId="8f92d326-2e04-4742-8ef3-263f618652de" providerId="ADAL" clId="{860254D0-E9E9-4D19-A949-C8C025EE3C1D}" dt="2026-08-28T06:23:13.973" v="379" actId="26606"/>
+          <ac:spMkLst>
+            <pc:docMk/>
+            <pc:sldMk cId="1148864122" sldId="263"/>
+            <ac:spMk id="137" creationId="{C13EF075-D4EF-4929-ADBC-91B27DA19955}"/>
+          </ac:spMkLst>
+        </pc:spChg>
+        <pc:spChg chg="add del">
+          <ac:chgData name="Pokala Sushma" userId="8f92d326-2e04-4742-8ef3-263f618652de" providerId="ADAL" clId="{860254D0-E9E9-4D19-A949-C8C025EE3C1D}" dt="2026-08-28T06:23:19.771" v="381" actId="26606"/>
+          <ac:spMkLst>
+            <pc:docMk/>
+            <pc:sldMk cId="1148864122" sldId="263"/>
+            <ac:spMk id="140" creationId="{907EF6B7-1338-4443-8C46-6A318D952DFD}"/>
+          </ac:spMkLst>
+        </pc:spChg>
+        <pc:spChg chg="add del">
+          <ac:chgData name="Pokala Sushma" userId="8f92d326-2e04-4742-8ef3-263f618652de" providerId="ADAL" clId="{860254D0-E9E9-4D19-A949-C8C025EE3C1D}" dt="2026-08-28T06:23:19.771" v="381" actId="26606"/>
+          <ac:spMkLst>
+            <pc:docMk/>
+            <pc:sldMk cId="1148864122" sldId="263"/>
+            <ac:spMk id="141" creationId="{DAAE4CDD-124C-4DCF-9584-B6033B545DD5}"/>
+          </ac:spMkLst>
+        </pc:spChg>
+        <pc:spChg chg="add del">
+          <ac:chgData name="Pokala Sushma" userId="8f92d326-2e04-4742-8ef3-263f618652de" providerId="ADAL" clId="{860254D0-E9E9-4D19-A949-C8C025EE3C1D}" dt="2026-08-28T06:23:19.771" v="381" actId="26606"/>
+          <ac:spMkLst>
+            <pc:docMk/>
+            <pc:sldMk cId="1148864122" sldId="263"/>
+            <ac:spMk id="142" creationId="{081E4A58-353D-44AE-B2FC-2A74E2E400F7}"/>
+          </ac:spMkLst>
+        </pc:spChg>
+        <pc:spChg chg="add">
+          <ac:chgData name="Pokala Sushma" userId="8f92d326-2e04-4742-8ef3-263f618652de" providerId="ADAL" clId="{860254D0-E9E9-4D19-A949-C8C025EE3C1D}" dt="2026-08-28T06:23:19.778" v="382" actId="26606"/>
+          <ac:spMkLst>
+            <pc:docMk/>
+            <pc:sldMk cId="1148864122" sldId="263"/>
+            <ac:spMk id="144" creationId="{081EA652-8C6A-4E69-BEB9-170809474553}"/>
+          </ac:spMkLst>
+        </pc:spChg>
+        <pc:spChg chg="add">
+          <ac:chgData name="Pokala Sushma" userId="8f92d326-2e04-4742-8ef3-263f618652de" providerId="ADAL" clId="{860254D0-E9E9-4D19-A949-C8C025EE3C1D}" dt="2026-08-28T06:23:19.778" v="382" actId="26606"/>
+          <ac:spMkLst>
+            <pc:docMk/>
+            <pc:sldMk cId="1148864122" sldId="263"/>
+            <ac:spMk id="145" creationId="{5298780A-33B9-4EA2-8F67-DE68AD62841B}"/>
+          </ac:spMkLst>
+        </pc:spChg>
+        <pc:spChg chg="add">
+          <ac:chgData name="Pokala Sushma" userId="8f92d326-2e04-4742-8ef3-263f618652de" providerId="ADAL" clId="{860254D0-E9E9-4D19-A949-C8C025EE3C1D}" dt="2026-08-28T06:23:19.778" v="382" actId="26606"/>
+          <ac:spMkLst>
+            <pc:docMk/>
+            <pc:sldMk cId="1148864122" sldId="263"/>
+            <ac:spMk id="146" creationId="{7F488E8B-4E1E-4402-8935-D4E6C02615C7}"/>
           </ac:spMkLst>
         </pc:spChg>
         <pc:grpChg chg="add del">
@@ -593,6 +1509,38 @@
             <ac:grpSpMk id="93" creationId="{89D1390B-7E13-4B4F-9CB2-391063412E54}"/>
           </ac:grpSpMkLst>
         </pc:grpChg>
+        <pc:grpChg chg="add del">
+          <ac:chgData name="Pokala Sushma" userId="8f92d326-2e04-4742-8ef3-263f618652de" providerId="ADAL" clId="{860254D0-E9E9-4D19-A949-C8C025EE3C1D}" dt="2026-08-28T06:23:08.494" v="375" actId="26606"/>
+          <ac:grpSpMkLst>
+            <pc:docMk/>
+            <pc:sldMk cId="1148864122" sldId="263"/>
+            <ac:grpSpMk id="117" creationId="{DAA26DFA-AAB2-4973-9C17-16D587C7B198}"/>
+          </ac:grpSpMkLst>
+        </pc:grpChg>
+        <pc:grpChg chg="add del">
+          <ac:chgData name="Pokala Sushma" userId="8f92d326-2e04-4742-8ef3-263f618652de" providerId="ADAL" clId="{860254D0-E9E9-4D19-A949-C8C025EE3C1D}" dt="2026-08-28T06:23:11.434" v="377" actId="26606"/>
+          <ac:grpSpMkLst>
+            <pc:docMk/>
+            <pc:sldMk cId="1148864122" sldId="263"/>
+            <ac:grpSpMk id="131" creationId="{5E6B47BC-43FD-4C91-8BFF-B41B99A8A39E}"/>
+          </ac:grpSpMkLst>
+        </pc:grpChg>
+        <pc:grpChg chg="add del">
+          <ac:chgData name="Pokala Sushma" userId="8f92d326-2e04-4742-8ef3-263f618652de" providerId="ADAL" clId="{860254D0-E9E9-4D19-A949-C8C025EE3C1D}" dt="2026-08-28T06:23:11.434" v="377" actId="26606"/>
+          <ac:grpSpMkLst>
+            <pc:docMk/>
+            <pc:sldMk cId="1148864122" sldId="263"/>
+            <ac:grpSpMk id="134" creationId="{43F5E015-E085-4624-B431-B42414448684}"/>
+          </ac:grpSpMkLst>
+        </pc:grpChg>
+        <pc:grpChg chg="add del">
+          <ac:chgData name="Pokala Sushma" userId="8f92d326-2e04-4742-8ef3-263f618652de" providerId="ADAL" clId="{860254D0-E9E9-4D19-A949-C8C025EE3C1D}" dt="2026-08-28T06:23:13.973" v="379" actId="26606"/>
+          <ac:grpSpMkLst>
+            <pc:docMk/>
+            <pc:sldMk cId="1148864122" sldId="263"/>
+            <ac:grpSpMk id="138" creationId="{DAA26DFA-AAB2-4973-9C17-16D587C7B198}"/>
+          </ac:grpSpMkLst>
+        </pc:grpChg>
         <pc:picChg chg="add del">
           <ac:chgData name="Pokala Sushma" userId="8f92d326-2e04-4742-8ef3-263f618652de" providerId="ADAL" clId="{860254D0-E9E9-4D19-A949-C8C025EE3C1D}" dt="2026-08-28T04:45:01.612" v="309" actId="26606"/>
           <ac:picMkLst>
@@ -625,6 +1573,21 @@
             <ac:cxnSpMk id="63" creationId="{C49DA8F6-BCC1-4447-B54C-57856834B94B}"/>
           </ac:cxnSpMkLst>
         </pc:cxnChg>
+        <pc:cxnChg chg="add">
+          <ac:chgData name="Pokala Sushma" userId="8f92d326-2e04-4742-8ef3-263f618652de" providerId="ADAL" clId="{860254D0-E9E9-4D19-A949-C8C025EE3C1D}" dt="2026-08-28T06:23:19.778" v="382" actId="26606"/>
+          <ac:cxnSpMkLst>
+            <pc:docMk/>
+            <pc:sldMk cId="1148864122" sldId="263"/>
+            <ac:cxnSpMk id="119" creationId="{23AAC9B5-8015-485C-ACF9-A750390E9A56}"/>
+          </ac:cxnSpMkLst>
+        </pc:cxnChg>
+      </pc:sldChg>
+      <pc:sldChg chg="add del">
+        <pc:chgData name="Pokala Sushma" userId="8f92d326-2e04-4742-8ef3-263f618652de" providerId="ADAL" clId="{860254D0-E9E9-4D19-A949-C8C025EE3C1D}" dt="2026-08-28T06:19:45.257" v="338" actId="47"/>
+        <pc:sldMkLst>
+          <pc:docMk/>
+          <pc:sldMk cId="3098679658" sldId="264"/>
+        </pc:sldMkLst>
       </pc:sldChg>
     </pc:docChg>
   </pc:docChgLst>
@@ -3876,7 +4839,7 @@
       </p:grpSpPr>
       <p:sp useBgFill="1">
         <p:nvSpPr>
-          <p:cNvPr id="97" name="Rectangle 96">
+          <p:cNvPr id="144" name="Rectangle 143">
             <a:extLst>
               <a:ext uri="{FF2B5EF4-FFF2-40B4-BE49-F238E27FC236}">
                 <a16:creationId xmlns:a16="http://schemas.microsoft.com/office/drawing/2014/main" id="{081EA652-8C6A-4E69-BEB9-170809474553}"/>
@@ -3936,7 +4899,7 @@
       </p:sp>
       <p:sp>
         <p:nvSpPr>
-          <p:cNvPr id="98" name="Right Triangle 97">
+          <p:cNvPr id="145" name="Right Triangle 144">
             <a:extLst>
               <a:ext uri="{FF2B5EF4-FFF2-40B4-BE49-F238E27FC236}">
                 <a16:creationId xmlns:a16="http://schemas.microsoft.com/office/drawing/2014/main" id="{5298780A-33B9-4EA2-8F67-DE68AD62841B}"/>
@@ -3999,7 +4962,7 @@
       </p:sp>
       <p:sp>
         <p:nvSpPr>
-          <p:cNvPr id="99" name="Rectangle 98">
+          <p:cNvPr id="146" name="Rectangle 145">
             <a:extLst>
               <a:ext uri="{FF2B5EF4-FFF2-40B4-BE49-F238E27FC236}">
                 <a16:creationId xmlns:a16="http://schemas.microsoft.com/office/drawing/2014/main" id="{7F488E8B-4E1E-4402-8935-D4E6C02615C7}"/>
@@ -4081,8 +5044,8 @@
         </p:nvSpPr>
         <p:spPr>
           <a:xfrm>
-            <a:off x="1285240" y="1050595"/>
-            <a:ext cx="8074815" cy="1618489"/>
+            <a:off x="1075767" y="1188637"/>
+            <a:ext cx="2988234" cy="4480726"/>
           </a:xfrm>
         </p:spPr>
         <p:txBody>
@@ -4091,9 +5054,9 @@
           </a:bodyPr>
           <a:lstStyle/>
           <a:p>
-            <a:pPr algn="l"/>
+            <a:pPr algn="r"/>
             <a:r>
-              <a:rPr lang="en-US" sz="7200" b="1" kern="1200">
+              <a:rPr lang="en-US" sz="5600" b="1" kern="1200" dirty="0">
                 <a:solidFill>
                   <a:schemeClr val="tx1"/>
                 </a:solidFill>
@@ -4106,6 +5069,61 @@
           </a:p>
         </p:txBody>
       </p:sp>
+      <p:cxnSp>
+        <p:nvCxnSpPr>
+          <p:cNvPr id="119" name="Straight Connector 118">
+            <a:extLst>
+              <a:ext uri="{FF2B5EF4-FFF2-40B4-BE49-F238E27FC236}">
+                <a16:creationId xmlns:a16="http://schemas.microsoft.com/office/drawing/2014/main" id="{23AAC9B5-8015-485C-ACF9-A750390E9A56}"/>
+              </a:ext>
+              <a:ext uri="{C183D7F6-B498-43B3-948B-1728B52AA6E4}">
+                <adec:decorative xmlns:adec="http://schemas.microsoft.com/office/drawing/2017/decorative" val="1"/>
+              </a:ext>
+            </a:extLst>
+          </p:cNvPr>
+          <p:cNvCxnSpPr>
+            <a:cxnSpLocks noGrp="1" noRot="1" noChangeAspect="1" noMove="1" noResize="1" noEditPoints="1" noAdjustHandles="1" noChangeArrowheads="1" noChangeShapeType="1"/>
+          </p:cNvCxnSpPr>
+          <p:nvPr>
+            <p:extLst>
+              <p:ext uri="{386F3935-93C4-4BCD-93E2-E3B085C9AB24}">
+                <p16:designElem xmlns:p16="http://schemas.microsoft.com/office/powerpoint/2015/main" val="1"/>
+              </p:ext>
+            </p:extLst>
+          </p:nvPr>
+        </p:nvCxnSpPr>
+        <p:spPr>
+          <a:xfrm>
+            <a:off x="4654296" y="1852863"/>
+            <a:ext cx="0" cy="3236495"/>
+          </a:xfrm>
+          <a:prstGeom prst="line">
+            <a:avLst/>
+          </a:prstGeom>
+          <a:ln w="19050" cap="sq">
+            <a:solidFill>
+              <a:schemeClr val="tx1">
+                <a:lumMod val="75000"/>
+                <a:lumOff val="25000"/>
+              </a:schemeClr>
+            </a:solidFill>
+          </a:ln>
+        </p:spPr>
+        <p:style>
+          <a:lnRef idx="1">
+            <a:schemeClr val="accent1"/>
+          </a:lnRef>
+          <a:fillRef idx="0">
+            <a:schemeClr val="accent1"/>
+          </a:fillRef>
+          <a:effectRef idx="0">
+            <a:schemeClr val="accent1"/>
+          </a:effectRef>
+          <a:fontRef idx="minor">
+            <a:schemeClr val="tx1"/>
+          </a:fontRef>
+        </p:style>
+      </p:cxnSp>
       <p:sp>
         <p:nvSpPr>
           <p:cNvPr id="3" name="Subtitle 2">
@@ -4124,78 +5142,56 @@
         </p:nvSpPr>
         <p:spPr>
           <a:xfrm>
-            <a:off x="1285240" y="2969469"/>
-            <a:ext cx="8074815" cy="2800395"/>
+            <a:off x="5170017" y="2327730"/>
+            <a:ext cx="4878087" cy="2608337"/>
           </a:xfrm>
         </p:spPr>
         <p:txBody>
-          <a:bodyPr vert="horz" lIns="91440" tIns="45720" rIns="91440" bIns="45720" rtlCol="0" anchor="t">
+          <a:bodyPr vert="horz" lIns="91440" tIns="45720" rIns="91440" bIns="45720" rtlCol="0" anchor="ctr">
             <a:normAutofit/>
           </a:bodyPr>
           <a:lstStyle/>
+          <a:p>
+            <a:pPr algn="l"/>
+            <a:r>
+              <a:rPr lang="en-US" b="1" dirty="0"/>
+              <a:t>Pokala Sushma</a:t>
+            </a:r>
+          </a:p>
+          <a:p>
+            <a:pPr algn="l"/>
+            <a:r>
+              <a:rPr lang="en-US" b="1" dirty="0"/>
+              <a:t>VIT, Vellore</a:t>
+            </a:r>
+          </a:p>
+          <a:p>
+            <a:pPr algn="l"/>
+            <a:r>
+              <a:rPr lang="en-US" b="1" dirty="0"/>
+              <a:t>MTech AI &amp; ML (in collaboration with LTI Mindtree)</a:t>
+            </a:r>
+          </a:p>
+          <a:p>
+            <a:pPr algn="l"/>
+            <a:r>
+              <a:rPr lang="en-US" b="1" dirty="0"/>
+              <a:t>T9936</a:t>
+            </a:r>
+          </a:p>
           <a:p>
             <a:pPr indent="-228600" algn="l">
               <a:buFont typeface="Arial" panose="020B0604020202020204" pitchFamily="34" charset="0"/>
               <a:buChar char="•"/>
             </a:pPr>
-            <a:r>
-              <a:rPr lang="en-US"/>
-              <a:t>Name : Pokala Sushma</a:t>
-            </a:r>
+            <a:endParaRPr lang="en-US" b="1" dirty="0"/>
           </a:p>
           <a:p>
             <a:pPr indent="-228600" algn="l">
               <a:buFont typeface="Arial" panose="020B0604020202020204" pitchFamily="34" charset="0"/>
               <a:buChar char="•"/>
             </a:pPr>
-            <a:r>
-              <a:rPr lang="en-US"/>
-              <a:t>Roll No : 25MML0050</a:t>
-            </a:r>
-          </a:p>
-          <a:p>
-            <a:pPr indent="-228600" algn="l">
-              <a:buFont typeface="Arial" panose="020B0604020202020204" pitchFamily="34" charset="0"/>
-              <a:buChar char="•"/>
-            </a:pPr>
-            <a:r>
-              <a:rPr lang="en-US"/>
-              <a:t>University : Vellore Institute of Technology, Vellore</a:t>
-            </a:r>
-          </a:p>
-          <a:p>
-            <a:pPr indent="-228600" algn="l">
-              <a:buFont typeface="Arial" panose="020B0604020202020204" pitchFamily="34" charset="0"/>
-              <a:buChar char="•"/>
-            </a:pPr>
-            <a:r>
-              <a:rPr lang="en-US"/>
-              <a:t>Programme : MTech AI &amp; ML (in collaboration with LTI Mindtree)</a:t>
-            </a:r>
-          </a:p>
-          <a:p>
-            <a:pPr indent="-228600" algn="l">
-              <a:buFont typeface="Arial" panose="020B0604020202020204" pitchFamily="34" charset="0"/>
-              <a:buChar char="•"/>
-            </a:pPr>
-            <a:r>
-              <a:rPr lang="en-US"/>
-              <a:t>T Series ID : T9936</a:t>
-            </a:r>
-          </a:p>
-          <a:p>
-            <a:pPr indent="-228600" algn="l">
-              <a:buFont typeface="Arial" panose="020B0604020202020204" pitchFamily="34" charset="0"/>
-              <a:buChar char="•"/>
-            </a:pPr>
-            <a:endParaRPr lang="en-US"/>
-          </a:p>
-          <a:p>
-            <a:pPr indent="-228600" algn="l">
-              <a:buFont typeface="Arial" panose="020B0604020202020204" pitchFamily="34" charset="0"/>
-              <a:buChar char="•"/>
-            </a:pPr>
-            <a:endParaRPr lang="en-US"/>
+            <a:endParaRPr lang="en-US" dirty="0"/>
           </a:p>
         </p:txBody>
       </p:sp>
@@ -4215,6 +5211,14 @@
 <file path=ppt/slides/slide2.xml><?xml version="1.0" encoding="utf-8"?>
 <p:sld xmlns:a="http://schemas.openxmlformats.org/drawingml/2006/main" xmlns:r="http://schemas.openxmlformats.org/officeDocument/2006/relationships" xmlns:p="http://schemas.openxmlformats.org/presentationml/2006/main">
   <p:cSld>
+    <p:bg>
+      <p:bgPr>
+        <a:solidFill>
+          <a:schemeClr val="bg1"/>
+        </a:solidFill>
+        <a:effectLst/>
+      </p:bgPr>
+    </p:bg>
     <p:spTree>
       <p:nvGrpSpPr>
         <p:cNvPr id="1" name=""/>
@@ -4229,6 +5233,200 @@
           <a:chExt cx="0" cy="0"/>
         </a:xfrm>
       </p:grpSpPr>
+      <p:sp useBgFill="1">
+        <p:nvSpPr>
+          <p:cNvPr id="61" name="Rectangle 60">
+            <a:extLst>
+              <a:ext uri="{FF2B5EF4-FFF2-40B4-BE49-F238E27FC236}">
+                <a16:creationId xmlns:a16="http://schemas.microsoft.com/office/drawing/2014/main" id="{907EF6B7-1338-4443-8C46-6A318D952DFD}"/>
+              </a:ext>
+              <a:ext uri="{C183D7F6-B498-43B3-948B-1728B52AA6E4}">
+                <adec:decorative xmlns:adec="http://schemas.microsoft.com/office/drawing/2017/decorative" val="1"/>
+              </a:ext>
+            </a:extLst>
+          </p:cNvPr>
+          <p:cNvSpPr>
+            <a:spLocks noGrp="1" noRot="1" noChangeAspect="1" noMove="1" noResize="1" noEditPoints="1" noAdjustHandles="1" noChangeArrowheads="1" noChangeShapeType="1" noTextEdit="1"/>
+          </p:cNvSpPr>
+          <p:nvPr>
+            <p:extLst>
+              <p:ext uri="{386F3935-93C4-4BCD-93E2-E3B085C9AB24}">
+                <p16:designElem xmlns:p16="http://schemas.microsoft.com/office/powerpoint/2015/main" val="1"/>
+              </p:ext>
+            </p:extLst>
+          </p:nvPr>
+        </p:nvSpPr>
+        <p:spPr>
+          <a:xfrm>
+            <a:off x="3048" y="0"/>
+            <a:ext cx="12188952" cy="6858000"/>
+          </a:xfrm>
+          <a:prstGeom prst="rect">
+            <a:avLst/>
+          </a:prstGeom>
+          <a:ln>
+            <a:noFill/>
+          </a:ln>
+        </p:spPr>
+        <p:style>
+          <a:lnRef idx="2">
+            <a:schemeClr val="accent1">
+              <a:shade val="50000"/>
+            </a:schemeClr>
+          </a:lnRef>
+          <a:fillRef idx="1">
+            <a:schemeClr val="accent1"/>
+          </a:fillRef>
+          <a:effectRef idx="0">
+            <a:schemeClr val="accent1"/>
+          </a:effectRef>
+          <a:fontRef idx="minor">
+            <a:schemeClr val="lt1"/>
+          </a:fontRef>
+        </p:style>
+        <p:txBody>
+          <a:bodyPr rtlCol="0" anchor="ctr"/>
+          <a:lstStyle/>
+          <a:p>
+            <a:pPr algn="ctr"/>
+            <a:endParaRPr lang="en-US"/>
+          </a:p>
+        </p:txBody>
+      </p:sp>
+      <p:sp>
+        <p:nvSpPr>
+          <p:cNvPr id="62" name="Freeform: Shape 9">
+            <a:extLst>
+              <a:ext uri="{FF2B5EF4-FFF2-40B4-BE49-F238E27FC236}">
+                <a16:creationId xmlns:a16="http://schemas.microsoft.com/office/drawing/2014/main" id="{DAAE4CDD-124C-4DCF-9584-B6033B545DD5}"/>
+              </a:ext>
+              <a:ext uri="{C183D7F6-B498-43B3-948B-1728B52AA6E4}">
+                <adec:decorative xmlns:adec="http://schemas.microsoft.com/office/drawing/2017/decorative" val="1"/>
+              </a:ext>
+            </a:extLst>
+          </p:cNvPr>
+          <p:cNvSpPr>
+            <a:spLocks noGrp="1" noRot="1" noChangeAspect="1" noMove="1" noResize="1" noEditPoints="1" noAdjustHandles="1" noChangeArrowheads="1" noChangeShapeType="1" noTextEdit="1"/>
+          </p:cNvSpPr>
+          <p:nvPr>
+            <p:extLst>
+              <p:ext uri="{386F3935-93C4-4BCD-93E2-E3B085C9AB24}">
+                <p16:designElem xmlns:p16="http://schemas.microsoft.com/office/powerpoint/2015/main" val="1"/>
+              </p:ext>
+            </p:extLst>
+          </p:nvPr>
+        </p:nvSpPr>
+        <p:spPr>
+          <a:xfrm>
+            <a:off x="1" y="0"/>
+            <a:ext cx="4167271" cy="6858000"/>
+          </a:xfrm>
+          <a:custGeom>
+            <a:avLst/>
+            <a:gdLst>
+              <a:gd name="connsiteX0" fmla="*/ 0 w 4167271"/>
+              <a:gd name="connsiteY0" fmla="*/ 0 h 6858000"/>
+              <a:gd name="connsiteX1" fmla="*/ 2259550 w 4167271"/>
+              <a:gd name="connsiteY1" fmla="*/ 0 h 6858000"/>
+              <a:gd name="connsiteX2" fmla="*/ 2387803 w 4167271"/>
+              <a:gd name="connsiteY2" fmla="*/ 82222 h 6858000"/>
+              <a:gd name="connsiteX3" fmla="*/ 4167271 w 4167271"/>
+              <a:gd name="connsiteY3" fmla="*/ 3429000 h 6858000"/>
+              <a:gd name="connsiteX4" fmla="*/ 2387803 w 4167271"/>
+              <a:gd name="connsiteY4" fmla="*/ 6775779 h 6858000"/>
+              <a:gd name="connsiteX5" fmla="*/ 2259550 w 4167271"/>
+              <a:gd name="connsiteY5" fmla="*/ 6858000 h 6858000"/>
+              <a:gd name="connsiteX6" fmla="*/ 0 w 4167271"/>
+              <a:gd name="connsiteY6" fmla="*/ 6858000 h 6858000"/>
+            </a:gdLst>
+            <a:ahLst/>
+            <a:cxnLst>
+              <a:cxn ang="0">
+                <a:pos x="connsiteX0" y="connsiteY0"/>
+              </a:cxn>
+              <a:cxn ang="0">
+                <a:pos x="connsiteX1" y="connsiteY1"/>
+              </a:cxn>
+              <a:cxn ang="0">
+                <a:pos x="connsiteX2" y="connsiteY2"/>
+              </a:cxn>
+              <a:cxn ang="0">
+                <a:pos x="connsiteX3" y="connsiteY3"/>
+              </a:cxn>
+              <a:cxn ang="0">
+                <a:pos x="connsiteX4" y="connsiteY4"/>
+              </a:cxn>
+              <a:cxn ang="0">
+                <a:pos x="connsiteX5" y="connsiteY5"/>
+              </a:cxn>
+              <a:cxn ang="0">
+                <a:pos x="connsiteX6" y="connsiteY6"/>
+              </a:cxn>
+            </a:cxnLst>
+            <a:rect l="l" t="t" r="r" b="b"/>
+            <a:pathLst>
+              <a:path w="4167271" h="6858000">
+                <a:moveTo>
+                  <a:pt x="0" y="0"/>
+                </a:moveTo>
+                <a:lnTo>
+                  <a:pt x="2259550" y="0"/>
+                </a:lnTo>
+                <a:lnTo>
+                  <a:pt x="2387803" y="82222"/>
+                </a:lnTo>
+                <a:cubicBezTo>
+                  <a:pt x="3461407" y="807534"/>
+                  <a:pt x="4167271" y="2035835"/>
+                  <a:pt x="4167271" y="3429000"/>
+                </a:cubicBezTo>
+                <a:cubicBezTo>
+                  <a:pt x="4167271" y="4822165"/>
+                  <a:pt x="3461407" y="6050467"/>
+                  <a:pt x="2387803" y="6775779"/>
+                </a:cubicBezTo>
+                <a:lnTo>
+                  <a:pt x="2259550" y="6858000"/>
+                </a:lnTo>
+                <a:lnTo>
+                  <a:pt x="0" y="6858000"/>
+                </a:lnTo>
+                <a:close/>
+              </a:path>
+            </a:pathLst>
+          </a:custGeom>
+          <a:solidFill>
+            <a:schemeClr val="accent2"/>
+          </a:solidFill>
+          <a:ln>
+            <a:noFill/>
+          </a:ln>
+        </p:spPr>
+        <p:style>
+          <a:lnRef idx="2">
+            <a:schemeClr val="accent1">
+              <a:shade val="50000"/>
+            </a:schemeClr>
+          </a:lnRef>
+          <a:fillRef idx="1">
+            <a:schemeClr val="accent1"/>
+          </a:fillRef>
+          <a:effectRef idx="0">
+            <a:schemeClr val="accent1"/>
+          </a:effectRef>
+          <a:fontRef idx="minor">
+            <a:schemeClr val="lt1"/>
+          </a:fontRef>
+        </p:style>
+        <p:txBody>
+          <a:bodyPr rtlCol="0" anchor="ctr"/>
+          <a:lstStyle/>
+          <a:p>
+            <a:pPr algn="ctr"/>
+            <a:endParaRPr lang="en-US"/>
+          </a:p>
+        </p:txBody>
+      </p:sp>
       <p:sp>
         <p:nvSpPr>
           <p:cNvPr id="2" name="Title 1">
@@ -4245,7 +5443,12 @@
             <p:ph type="title"/>
           </p:nvPr>
         </p:nvSpPr>
-        <p:spPr/>
+        <p:spPr>
+          <a:xfrm>
+            <a:off x="686834" y="1153572"/>
+            <a:ext cx="3200400" cy="4461163"/>
+          </a:xfrm>
+        </p:spPr>
         <p:txBody>
           <a:bodyPr>
             <a:normAutofit/>
@@ -4253,16 +5456,85 @@
           <a:lstStyle/>
           <a:p>
             <a:r>
-              <a:rPr lang="en-GB" sz="2400" b="1" dirty="0"/>
+              <a:rPr lang="en-GB" sz="3100" b="1">
+                <a:solidFill>
+                  <a:srgbClr val="FFFFFF"/>
+                </a:solidFill>
+              </a:rPr>
               <a:t>Project 1: Adaptive Enterprise Knowledge Assistant using Hybrid RAG, Role-Aware Retrieval and Hallucination Detection</a:t>
             </a:r>
-            <a:endParaRPr lang="en-IN" sz="2400" b="1" dirty="0"/>
+            <a:endParaRPr lang="en-IN" sz="3100" b="1">
+              <a:solidFill>
+                <a:srgbClr val="FFFFFF"/>
+              </a:solidFill>
+            </a:endParaRPr>
           </a:p>
         </p:txBody>
       </p:sp>
       <p:sp>
         <p:nvSpPr>
-          <p:cNvPr id="3" name="Content Placeholder 2">
+          <p:cNvPr id="63" name="Arc 62">
+            <a:extLst>
+              <a:ext uri="{FF2B5EF4-FFF2-40B4-BE49-F238E27FC236}">
+                <a16:creationId xmlns:a16="http://schemas.microsoft.com/office/drawing/2014/main" id="{081E4A58-353D-44AE-B2FC-2A74E2E400F7}"/>
+              </a:ext>
+              <a:ext uri="{C183D7F6-B498-43B3-948B-1728B52AA6E4}">
+                <adec:decorative xmlns:adec="http://schemas.microsoft.com/office/drawing/2017/decorative" val="1"/>
+              </a:ext>
+            </a:extLst>
+          </p:cNvPr>
+          <p:cNvSpPr>
+            <a:spLocks noGrp="1" noRot="1" noChangeAspect="1" noMove="1" noResize="1" noEditPoints="1" noAdjustHandles="1" noChangeArrowheads="1" noChangeShapeType="1" noTextEdit="1"/>
+          </p:cNvSpPr>
+          <p:nvPr>
+            <p:extLst>
+              <p:ext uri="{386F3935-93C4-4BCD-93E2-E3B085C9AB24}">
+                <p16:designElem xmlns:p16="http://schemas.microsoft.com/office/powerpoint/2015/main" val="1"/>
+              </p:ext>
+            </p:extLst>
+          </p:nvPr>
+        </p:nvSpPr>
+        <p:spPr>
+          <a:xfrm flipV="1">
+            <a:off x="7550402" y="2455479"/>
+            <a:ext cx="4083433" cy="4083433"/>
+          </a:xfrm>
+          <a:prstGeom prst="arc">
+            <a:avLst/>
+          </a:prstGeom>
+          <a:ln w="127000" cap="rnd">
+            <a:solidFill>
+              <a:schemeClr val="accent4"/>
+            </a:solidFill>
+            <a:prstDash val="dash"/>
+          </a:ln>
+        </p:spPr>
+        <p:style>
+          <a:lnRef idx="1">
+            <a:schemeClr val="accent1"/>
+          </a:lnRef>
+          <a:fillRef idx="0">
+            <a:schemeClr val="accent1"/>
+          </a:fillRef>
+          <a:effectRef idx="0">
+            <a:schemeClr val="accent1"/>
+          </a:effectRef>
+          <a:fontRef idx="minor">
+            <a:schemeClr val="tx1"/>
+          </a:fontRef>
+        </p:style>
+        <p:txBody>
+          <a:bodyPr rtlCol="0" anchor="ctr"/>
+          <a:lstStyle/>
+          <a:p>
+            <a:pPr algn="ctr"/>
+            <a:endParaRPr lang="en-US" dirty="0"/>
+          </a:p>
+        </p:txBody>
+      </p:sp>
+      <p:sp>
+        <p:nvSpPr>
+          <p:cNvPr id="64" name="Content Placeholder 2">
             <a:extLst>
               <a:ext uri="{FF2B5EF4-FFF2-40B4-BE49-F238E27FC236}">
                 <a16:creationId xmlns:a16="http://schemas.microsoft.com/office/drawing/2014/main" id="{34A6A842-99BE-6789-4477-F230AB5C4425}"/>
@@ -4276,9 +5548,14 @@
             <p:ph idx="1"/>
           </p:nvPr>
         </p:nvSpPr>
-        <p:spPr/>
+        <p:spPr>
+          <a:xfrm>
+            <a:off x="4447308" y="591344"/>
+            <a:ext cx="6906491" cy="5585619"/>
+          </a:xfrm>
+        </p:spPr>
         <p:txBody>
-          <a:bodyPr>
+          <a:bodyPr anchor="ctr">
             <a:normAutofit/>
           </a:bodyPr>
           <a:lstStyle/>
@@ -4287,19 +5564,19 @@
               <a:buNone/>
             </a:pPr>
             <a:r>
-              <a:rPr lang="en-GB" sz="2400" b="1" dirty="0"/>
+              <a:rPr lang="en-GB" sz="2600" b="1"/>
               <a:t>Problem Statement:</a:t>
             </a:r>
           </a:p>
           <a:p>
             <a:r>
-              <a:rPr lang="en-GB" sz="2400" dirty="0"/>
+              <a:rPr lang="en-GB" sz="2600"/>
               <a:t>Employees spend significant time searching through large enterprise documents.</a:t>
             </a:r>
           </a:p>
           <a:p>
             <a:r>
-              <a:rPr lang="en-GB" sz="2400" dirty="0"/>
+              <a:rPr lang="en-GB" sz="2600"/>
               <a:t>Basic RAG systems may retrieve irrelevant information or generate unsupported answers.</a:t>
             </a:r>
           </a:p>
@@ -4308,27 +5585,27 @@
               <a:buNone/>
             </a:pPr>
             <a:r>
-              <a:rPr lang="en-GB" sz="2400" b="1" dirty="0"/>
+              <a:rPr lang="en-GB" sz="2600" b="1"/>
               <a:t>Objectives:</a:t>
             </a:r>
           </a:p>
           <a:p>
             <a:r>
-              <a:rPr lang="en-GB" sz="2400" dirty="0"/>
+              <a:rPr lang="en-GB" sz="2600"/>
               <a:t>Develop an AI assistant to provide accurate answers from enterprise documents.</a:t>
             </a:r>
           </a:p>
           <a:p>
             <a:r>
-              <a:rPr lang="en-GB" sz="2400" dirty="0"/>
+              <a:rPr lang="en-GB" sz="2600"/>
               <a:t>Improve reliability using Hybrid RAG, role-based retrieval and hallucination detection.</a:t>
             </a:r>
           </a:p>
           <a:p>
-            <a:pPr marL="0" indent="0" algn="just">
+            <a:pPr marL="0" indent="0">
               <a:buNone/>
             </a:pPr>
-            <a:endParaRPr lang="en-IN" sz="2400" dirty="0"/>
+            <a:endParaRPr lang="en-IN" sz="2600"/>
           </a:p>
         </p:txBody>
       </p:sp>
@@ -4348,6 +5625,14 @@
 <file path=ppt/slides/slide3.xml><?xml version="1.0" encoding="utf-8"?>
 <p:sld xmlns:a="http://schemas.openxmlformats.org/drawingml/2006/main" xmlns:r="http://schemas.openxmlformats.org/officeDocument/2006/relationships" xmlns:p="http://schemas.openxmlformats.org/presentationml/2006/main">
   <p:cSld>
+    <p:bg>
+      <p:bgPr>
+        <a:solidFill>
+          <a:schemeClr val="bg1"/>
+        </a:solidFill>
+        <a:effectLst/>
+      </p:bgPr>
+    </p:bg>
     <p:spTree>
       <p:nvGrpSpPr>
         <p:cNvPr id="1" name=""/>
@@ -4362,6 +5647,138 @@
           <a:chExt cx="0" cy="0"/>
         </a:xfrm>
       </p:grpSpPr>
+      <p:sp useBgFill="1">
+        <p:nvSpPr>
+          <p:cNvPr id="40" name="Rectangle 39">
+            <a:extLst>
+              <a:ext uri="{FF2B5EF4-FFF2-40B4-BE49-F238E27FC236}">
+                <a16:creationId xmlns:a16="http://schemas.microsoft.com/office/drawing/2014/main" id="{A2679492-7988-4050-9056-542444452411}"/>
+              </a:ext>
+              <a:ext uri="{C183D7F6-B498-43B3-948B-1728B52AA6E4}">
+                <adec:decorative xmlns:adec="http://schemas.microsoft.com/office/drawing/2017/decorative" val="1"/>
+              </a:ext>
+            </a:extLst>
+          </p:cNvPr>
+          <p:cNvSpPr>
+            <a:spLocks noGrp="1" noRot="1" noChangeAspect="1" noMove="1" noResize="1" noEditPoints="1" noAdjustHandles="1" noChangeArrowheads="1" noChangeShapeType="1" noTextEdit="1"/>
+          </p:cNvSpPr>
+          <p:nvPr>
+            <p:extLst>
+              <p:ext uri="{386F3935-93C4-4BCD-93E2-E3B085C9AB24}">
+                <p16:designElem xmlns:p16="http://schemas.microsoft.com/office/powerpoint/2015/main" val="1"/>
+              </p:ext>
+            </p:extLst>
+          </p:nvPr>
+        </p:nvSpPr>
+        <p:spPr>
+          <a:xfrm>
+            <a:off x="0" y="0"/>
+            <a:ext cx="12192000" cy="6858000"/>
+          </a:xfrm>
+          <a:prstGeom prst="rect">
+            <a:avLst/>
+          </a:prstGeom>
+          <a:ln>
+            <a:noFill/>
+          </a:ln>
+        </p:spPr>
+        <p:style>
+          <a:lnRef idx="2">
+            <a:schemeClr val="accent1">
+              <a:shade val="50000"/>
+            </a:schemeClr>
+          </a:lnRef>
+          <a:fillRef idx="1">
+            <a:schemeClr val="accent1"/>
+          </a:fillRef>
+          <a:effectRef idx="0">
+            <a:schemeClr val="accent1"/>
+          </a:effectRef>
+          <a:fontRef idx="minor">
+            <a:schemeClr val="lt1"/>
+          </a:fontRef>
+        </p:style>
+        <p:txBody>
+          <a:bodyPr rtlCol="0" anchor="ctr"/>
+          <a:lstStyle/>
+          <a:p>
+            <a:pPr algn="ctr"/>
+            <a:endParaRPr lang="en-US"/>
+          </a:p>
+        </p:txBody>
+      </p:sp>
+      <p:sp>
+        <p:nvSpPr>
+          <p:cNvPr id="42" name="Rectangle 41">
+            <a:extLst>
+              <a:ext uri="{FF2B5EF4-FFF2-40B4-BE49-F238E27FC236}">
+                <a16:creationId xmlns:a16="http://schemas.microsoft.com/office/drawing/2014/main" id="{B091B163-7D61-4891-ABCF-5C13D9C418D0}"/>
+              </a:ext>
+              <a:ext uri="{C183D7F6-B498-43B3-948B-1728B52AA6E4}">
+                <adec:decorative xmlns:adec="http://schemas.microsoft.com/office/drawing/2017/decorative" val="1"/>
+              </a:ext>
+            </a:extLst>
+          </p:cNvPr>
+          <p:cNvSpPr>
+            <a:spLocks noGrp="1" noRot="1" noChangeAspect="1" noMove="1" noResize="1" noEditPoints="1" noAdjustHandles="1" noChangeArrowheads="1" noChangeShapeType="1" noTextEdit="1"/>
+          </p:cNvSpPr>
+          <p:nvPr>
+            <p:extLst>
+              <p:ext uri="{386F3935-93C4-4BCD-93E2-E3B085C9AB24}">
+                <p16:designElem xmlns:p16="http://schemas.microsoft.com/office/powerpoint/2015/main" val="1"/>
+              </p:ext>
+            </p:extLst>
+          </p:nvPr>
+        </p:nvSpPr>
+        <p:spPr>
+          <a:xfrm>
+            <a:off x="0" y="0"/>
+            <a:ext cx="5779911" cy="6858000"/>
+          </a:xfrm>
+          <a:prstGeom prst="rect">
+            <a:avLst/>
+          </a:prstGeom>
+          <a:gradFill flip="none" rotWithShape="1">
+            <a:gsLst>
+              <a:gs pos="0">
+                <a:schemeClr val="accent1"/>
+              </a:gs>
+              <a:gs pos="100000">
+                <a:schemeClr val="accent2"/>
+              </a:gs>
+            </a:gsLst>
+            <a:lin ang="2700000" scaled="1"/>
+            <a:tileRect/>
+          </a:gradFill>
+          <a:ln>
+            <a:noFill/>
+          </a:ln>
+        </p:spPr>
+        <p:style>
+          <a:lnRef idx="2">
+            <a:schemeClr val="accent1">
+              <a:shade val="50000"/>
+            </a:schemeClr>
+          </a:lnRef>
+          <a:fillRef idx="1">
+            <a:schemeClr val="accent1"/>
+          </a:fillRef>
+          <a:effectRef idx="0">
+            <a:schemeClr val="accent1"/>
+          </a:effectRef>
+          <a:fontRef idx="minor">
+            <a:schemeClr val="lt1"/>
+          </a:fontRef>
+        </p:style>
+        <p:txBody>
+          <a:bodyPr rtlCol="0" anchor="ctr"/>
+          <a:lstStyle/>
+          <a:p>
+            <a:pPr algn="ctr"/>
+            <a:endParaRPr lang="en-US"/>
+          </a:p>
+        </p:txBody>
+      </p:sp>
       <p:sp>
         <p:nvSpPr>
           <p:cNvPr id="3" name="Content Placeholder 2">
@@ -4380,12 +5797,12 @@
         </p:nvSpPr>
         <p:spPr>
           <a:xfrm>
-            <a:off x="838200" y="659567"/>
-            <a:ext cx="10515600" cy="5517396"/>
+            <a:off x="6392583" y="2645922"/>
+            <a:ext cx="4434721" cy="3710427"/>
           </a:xfrm>
         </p:spPr>
         <p:txBody>
-          <a:bodyPr>
+          <a:bodyPr anchor="t">
             <a:normAutofit/>
           </a:bodyPr>
           <a:lstStyle/>
@@ -4394,7 +5811,13 @@
               <a:buNone/>
             </a:pPr>
             <a:r>
-              <a:rPr lang="en-GB" sz="2400" b="1" dirty="0"/>
+              <a:rPr lang="en-GB" sz="2000" b="1">
+                <a:solidFill>
+                  <a:schemeClr val="tx1">
+                    <a:alpha val="80000"/>
+                  </a:schemeClr>
+                </a:solidFill>
+              </a:rPr>
               <a:t>Technical Stack:</a:t>
             </a:r>
           </a:p>
@@ -4402,10 +5825,78 @@
             <a:pPr marL="0" indent="0">
               <a:buNone/>
             </a:pPr>
-            <a:endParaRPr lang="en-IN" sz="2400" dirty="0"/>
+            <a:endParaRPr lang="en-IN" sz="2000">
+              <a:solidFill>
+                <a:schemeClr val="tx1">
+                  <a:alpha val="80000"/>
+                </a:schemeClr>
+              </a:solidFill>
+            </a:endParaRPr>
           </a:p>
         </p:txBody>
       </p:sp>
+      <p:cxnSp>
+        <p:nvCxnSpPr>
+          <p:cNvPr id="44" name="Straight Connector 43">
+            <a:extLst>
+              <a:ext uri="{FF2B5EF4-FFF2-40B4-BE49-F238E27FC236}">
+                <a16:creationId xmlns:a16="http://schemas.microsoft.com/office/drawing/2014/main" id="{C49DA8F6-BCC1-4447-B54C-57856834B94B}"/>
+              </a:ext>
+              <a:ext uri="{C183D7F6-B498-43B3-948B-1728B52AA6E4}">
+                <adec:decorative xmlns:adec="http://schemas.microsoft.com/office/drawing/2017/decorative" val="1"/>
+              </a:ext>
+            </a:extLst>
+          </p:cNvPr>
+          <p:cNvCxnSpPr>
+            <a:cxnSpLocks noGrp="1" noRot="1" noChangeAspect="1" noMove="1" noResize="1" noEditPoints="1" noAdjustHandles="1" noChangeArrowheads="1" noChangeShapeType="1"/>
+          </p:cNvCxnSpPr>
+          <p:nvPr>
+            <p:extLst>
+              <p:ext uri="{386F3935-93C4-4BCD-93E2-E3B085C9AB24}">
+                <p16:designElem xmlns:p16="http://schemas.microsoft.com/office/powerpoint/2015/main" val="1"/>
+              </p:ext>
+            </p:extLst>
+          </p:nvPr>
+        </p:nvCxnSpPr>
+        <p:spPr>
+          <a:xfrm>
+            <a:off x="11586162" y="3610394"/>
+            <a:ext cx="0" cy="3238728"/>
+          </a:xfrm>
+          <a:prstGeom prst="line">
+            <a:avLst/>
+          </a:prstGeom>
+          <a:ln w="25400" cap="sq">
+            <a:gradFill flip="none" rotWithShape="1">
+              <a:gsLst>
+                <a:gs pos="0">
+                  <a:schemeClr val="accent1"/>
+                </a:gs>
+                <a:gs pos="100000">
+                  <a:schemeClr val="accent2"/>
+                </a:gs>
+              </a:gsLst>
+              <a:lin ang="16200000" scaled="1"/>
+              <a:tileRect/>
+            </a:gradFill>
+            <a:bevel/>
+          </a:ln>
+        </p:spPr>
+        <p:style>
+          <a:lnRef idx="1">
+            <a:schemeClr val="accent1"/>
+          </a:lnRef>
+          <a:fillRef idx="0">
+            <a:schemeClr val="accent1"/>
+          </a:fillRef>
+          <a:effectRef idx="0">
+            <a:schemeClr val="accent1"/>
+          </a:effectRef>
+          <a:fontRef idx="minor">
+            <a:schemeClr val="tx1"/>
+          </a:fontRef>
+        </p:style>
+      </p:cxnSp>
       <p:graphicFrame>
         <p:nvGraphicFramePr>
           <p:cNvPr id="4" name="Table 3">
@@ -4421,30 +5912,35 @@
           <p:nvPr>
             <p:extLst>
               <p:ext uri="{D42A27DB-BD31-4B8C-83A1-F6EECF244321}">
-                <p14:modId xmlns:p14="http://schemas.microsoft.com/office/powerpoint/2010/main" val="4052109620"/>
+                <p14:modId xmlns:p14="http://schemas.microsoft.com/office/powerpoint/2010/main" val="4015908366"/>
               </p:ext>
             </p:extLst>
           </p:nvPr>
         </p:nvGraphicFramePr>
         <p:xfrm>
-          <a:off x="838199" y="1169234"/>
-          <a:ext cx="8785486" cy="5029200"/>
+          <a:off x="301155" y="299509"/>
+          <a:ext cx="5177602" cy="6258989"/>
         </p:xfrm>
         <a:graphic>
           <a:graphicData uri="http://schemas.openxmlformats.org/drawingml/2006/table">
             <a:tbl>
               <a:tblPr firstRow="1" bandRow="1">
-                <a:tableStyleId>{5940675A-B579-460E-94D1-54222C63F5DA}</a:tableStyleId>
+                <a:solidFill>
+                  <a:srgbClr val="F2F2F2">
+                    <a:alpha val="30196"/>
+                  </a:srgbClr>
+                </a:solidFill>
+                <a:tableStyleId>{3B4B98B0-60AC-42C2-AFA5-B58CD77FA1E5}</a:tableStyleId>
               </a:tblPr>
               <a:tblGrid>
-                <a:gridCol w="4392743">
+                <a:gridCol w="2240273">
                   <a:extLst>
                     <a:ext uri="{9D8B030D-6E8A-4147-A177-3AD203B41FA5}">
                       <a16:colId xmlns:a16="http://schemas.microsoft.com/office/drawing/2014/main" val="2095070748"/>
                     </a:ext>
                   </a:extLst>
                 </a:gridCol>
-                <a:gridCol w="4392743">
+                <a:gridCol w="2937329">
                   <a:extLst>
                     <a:ext uri="{9D8B030D-6E8A-4147-A177-3AD203B41FA5}">
                       <a16:colId xmlns:a16="http://schemas.microsoft.com/office/drawing/2014/main" val="17695250"/>
@@ -4452,20 +5948,46 @@
                   </a:extLst>
                 </a:gridCol>
               </a:tblGrid>
-              <a:tr h="455248">
+              <a:tr h="568999">
                 <a:tc>
                   <a:txBody>
                     <a:bodyPr/>
                     <a:lstStyle/>
                     <a:p>
                       <a:r>
-                        <a:rPr lang="en-GB" sz="2400" b="1" dirty="0"/>
+                        <a:rPr lang="en-GB" sz="1800" b="0" cap="none" spc="0">
+                          <a:solidFill>
+                            <a:schemeClr val="bg1"/>
+                          </a:solidFill>
+                        </a:rPr>
                         <a:t>Category</a:t>
                       </a:r>
-                      <a:endParaRPr lang="en-IN" sz="2400" b="1" dirty="0"/>
+                      <a:endParaRPr lang="en-IN" sz="1800" b="0" cap="none" spc="0">
+                        <a:solidFill>
+                          <a:schemeClr val="bg1"/>
+                        </a:solidFill>
+                      </a:endParaRPr>
                     </a:p>
                   </a:txBody>
-                  <a:tcPr/>
+                  <a:tcPr marL="156274" marR="213572" marT="120211" marB="120211" anchor="ctr">
+                    <a:lnL w="19050" cap="flat" cmpd="sng" algn="ctr">
+                      <a:noFill/>
+                      <a:prstDash val="solid"/>
+                    </a:lnL>
+                    <a:lnR w="12700" cmpd="sng">
+                      <a:noFill/>
+                    </a:lnR>
+                    <a:lnT w="19050" cap="flat" cmpd="sng" algn="ctr">
+                      <a:noFill/>
+                      <a:prstDash val="solid"/>
+                    </a:lnT>
+                    <a:lnB w="38100" cmpd="sng">
+                      <a:noFill/>
+                    </a:lnB>
+                    <a:solidFill>
+                      <a:schemeClr val="accent1"/>
+                    </a:solidFill>
+                  </a:tcPr>
                 </a:tc>
                 <a:tc>
                   <a:txBody>
@@ -4473,13 +5995,38 @@
                     <a:lstStyle/>
                     <a:p>
                       <a:r>
-                        <a:rPr lang="en-GB" sz="2400" b="1" dirty="0"/>
+                        <a:rPr lang="en-GB" sz="1800" b="0" cap="none" spc="0">
+                          <a:solidFill>
+                            <a:schemeClr val="bg1"/>
+                          </a:solidFill>
+                        </a:rPr>
                         <a:t>Technology</a:t>
                       </a:r>
-                      <a:endParaRPr lang="en-IN" sz="2400" b="1" dirty="0"/>
+                      <a:endParaRPr lang="en-IN" sz="1800" b="0" cap="none" spc="0">
+                        <a:solidFill>
+                          <a:schemeClr val="bg1"/>
+                        </a:solidFill>
+                      </a:endParaRPr>
                     </a:p>
                   </a:txBody>
-                  <a:tcPr/>
+                  <a:tcPr marL="156274" marR="213572" marT="120211" marB="120211" anchor="ctr">
+                    <a:lnL w="12700" cmpd="sng">
+                      <a:noFill/>
+                    </a:lnL>
+                    <a:lnR w="12700" cmpd="sng">
+                      <a:noFill/>
+                    </a:lnR>
+                    <a:lnT w="19050" cap="flat" cmpd="sng" algn="ctr">
+                      <a:noFill/>
+                      <a:prstDash val="solid"/>
+                    </a:lnT>
+                    <a:lnB w="38100" cmpd="sng">
+                      <a:noFill/>
+                    </a:lnB>
+                    <a:solidFill>
+                      <a:schemeClr val="accent1"/>
+                    </a:solidFill>
+                  </a:tcPr>
                 </a:tc>
                 <a:extLst>
                   <a:ext uri="{0D108BD9-81ED-4DB2-BD59-A6C34878D82A}">
@@ -4487,20 +6034,54 @@
                   </a:ext>
                 </a:extLst>
               </a:tr>
-              <a:tr h="455248">
+              <a:tr h="568999">
                 <a:tc>
                   <a:txBody>
                     <a:bodyPr/>
                     <a:lstStyle/>
                     <a:p>
                       <a:r>
-                        <a:rPr lang="en-GB" sz="2400" dirty="0"/>
+                        <a:rPr lang="en-GB" sz="1800" cap="none" spc="0">
+                          <a:solidFill>
+                            <a:schemeClr val="tx1"/>
+                          </a:solidFill>
+                        </a:rPr>
                         <a:t>Programming</a:t>
                       </a:r>
-                      <a:endParaRPr lang="en-IN" sz="2400" dirty="0"/>
+                      <a:endParaRPr lang="en-IN" sz="1800" cap="none" spc="0">
+                        <a:solidFill>
+                          <a:schemeClr val="tx1"/>
+                        </a:solidFill>
+                      </a:endParaRPr>
                     </a:p>
                   </a:txBody>
-                  <a:tcPr/>
+                  <a:tcPr marL="156274" marR="192762" marT="120211" marB="120211">
+                    <a:lnL w="38100" cap="flat" cmpd="sng" algn="ctr">
+                      <a:noFill/>
+                      <a:prstDash val="solid"/>
+                    </a:lnL>
+                    <a:lnR w="6350" cap="flat" cmpd="sng" algn="ctr">
+                      <a:solidFill>
+                        <a:schemeClr val="tx1">
+                          <a:lumMod val="75000"/>
+                          <a:lumOff val="25000"/>
+                        </a:schemeClr>
+                      </a:solidFill>
+                      <a:prstDash val="solid"/>
+                    </a:lnR>
+                    <a:lnT w="38100" cmpd="sng">
+                      <a:noFill/>
+                    </a:lnT>
+                    <a:lnB w="6350" cap="flat" cmpd="sng" algn="ctr">
+                      <a:noFill/>
+                      <a:prstDash val="solid"/>
+                    </a:lnB>
+                    <a:solidFill>
+                      <a:srgbClr val="F2F2F2">
+                        <a:alpha val="30196"/>
+                      </a:srgbClr>
+                    </a:solidFill>
+                  </a:tcPr>
                 </a:tc>
                 <a:tc>
                   <a:txBody>
@@ -4508,13 +6089,47 @@
                     <a:lstStyle/>
                     <a:p>
                       <a:r>
-                        <a:rPr lang="en-GB" sz="2400" dirty="0"/>
+                        <a:rPr lang="en-GB" sz="1800" cap="none" spc="0">
+                          <a:solidFill>
+                            <a:schemeClr val="tx1"/>
+                          </a:solidFill>
+                        </a:rPr>
                         <a:t>Python</a:t>
                       </a:r>
-                      <a:endParaRPr lang="en-IN" sz="2400" dirty="0"/>
+                      <a:endParaRPr lang="en-IN" sz="1800" cap="none" spc="0">
+                        <a:solidFill>
+                          <a:schemeClr val="tx1"/>
+                        </a:solidFill>
+                      </a:endParaRPr>
                     </a:p>
                   </a:txBody>
-                  <a:tcPr/>
+                  <a:tcPr marL="156274" marR="192762" marT="120211" marB="120211">
+                    <a:lnL w="6350" cap="flat" cmpd="sng" algn="ctr">
+                      <a:solidFill>
+                        <a:schemeClr val="tx1">
+                          <a:lumMod val="75000"/>
+                          <a:lumOff val="25000"/>
+                        </a:schemeClr>
+                      </a:solidFill>
+                      <a:prstDash val="solid"/>
+                    </a:lnL>
+                    <a:lnR w="38100" cap="flat" cmpd="sng" algn="ctr">
+                      <a:noFill/>
+                      <a:prstDash val="solid"/>
+                    </a:lnR>
+                    <a:lnT w="38100" cmpd="sng">
+                      <a:noFill/>
+                    </a:lnT>
+                    <a:lnB w="6350" cap="flat" cmpd="sng" algn="ctr">
+                      <a:noFill/>
+                      <a:prstDash val="solid"/>
+                    </a:lnB>
+                    <a:solidFill>
+                      <a:srgbClr val="F2F2F2">
+                        <a:alpha val="30196"/>
+                      </a:srgbClr>
+                    </a:solidFill>
+                  </a:tcPr>
                 </a:tc>
                 <a:extLst>
                   <a:ext uri="{0D108BD9-81ED-4DB2-BD59-A6C34878D82A}">
@@ -4522,19 +6137,45 @@
                   </a:ext>
                 </a:extLst>
               </a:tr>
-              <a:tr h="455248">
+              <a:tr h="568999">
                 <a:tc>
                   <a:txBody>
                     <a:bodyPr/>
                     <a:lstStyle/>
                     <a:p>
                       <a:r>
-                        <a:rPr lang="en-GB" sz="2400" dirty="0"/>
+                        <a:rPr lang="en-GB" sz="1800" cap="none" spc="0">
+                          <a:solidFill>
+                            <a:schemeClr val="tx1"/>
+                          </a:solidFill>
+                        </a:rPr>
                         <a:t>RAG Framework</a:t>
                       </a:r>
                     </a:p>
                   </a:txBody>
-                  <a:tcPr/>
+                  <a:tcPr marL="156274" marR="192762" marT="120211" marB="120211">
+                    <a:lnL w="6350" cap="flat" cmpd="sng" algn="ctr">
+                      <a:noFill/>
+                      <a:prstDash val="solid"/>
+                    </a:lnL>
+                    <a:lnR w="6350" cap="flat" cmpd="sng" algn="ctr">
+                      <a:noFill/>
+                      <a:prstDash val="solid"/>
+                    </a:lnR>
+                    <a:lnT w="6350" cap="flat" cmpd="sng" algn="ctr">
+                      <a:noFill/>
+                      <a:prstDash val="solid"/>
+                    </a:lnT>
+                    <a:lnB w="12700" cmpd="sng">
+                      <a:noFill/>
+                      <a:prstDash val="solid"/>
+                    </a:lnB>
+                    <a:solidFill>
+                      <a:schemeClr val="bg1">
+                        <a:lumMod val="95000"/>
+                      </a:schemeClr>
+                    </a:solidFill>
+                  </a:tcPr>
                 </a:tc>
                 <a:tc>
                   <a:txBody>
@@ -4542,13 +6183,43 @@
                     <a:lstStyle/>
                     <a:p>
                       <a:r>
-                        <a:rPr lang="en-GB" sz="2400" dirty="0"/>
+                        <a:rPr lang="en-GB" sz="1800" cap="none" spc="0">
+                          <a:solidFill>
+                            <a:schemeClr val="tx1"/>
+                          </a:solidFill>
+                        </a:rPr>
                         <a:t>Lang Chain</a:t>
                       </a:r>
-                      <a:endParaRPr lang="en-IN" sz="2400" dirty="0"/>
+                      <a:endParaRPr lang="en-IN" sz="1800" cap="none" spc="0">
+                        <a:solidFill>
+                          <a:schemeClr val="tx1"/>
+                        </a:solidFill>
+                      </a:endParaRPr>
                     </a:p>
                   </a:txBody>
-                  <a:tcPr/>
+                  <a:tcPr marL="156274" marR="192762" marT="120211" marB="120211">
+                    <a:lnL w="6350" cap="flat" cmpd="sng" algn="ctr">
+                      <a:noFill/>
+                      <a:prstDash val="solid"/>
+                    </a:lnL>
+                    <a:lnR w="12700" cmpd="sng">
+                      <a:noFill/>
+                      <a:prstDash val="solid"/>
+                    </a:lnR>
+                    <a:lnT w="6350" cap="flat" cmpd="sng" algn="ctr">
+                      <a:noFill/>
+                      <a:prstDash val="solid"/>
+                    </a:lnT>
+                    <a:lnB w="12700" cmpd="sng">
+                      <a:noFill/>
+                      <a:prstDash val="solid"/>
+                    </a:lnB>
+                    <a:solidFill>
+                      <a:schemeClr val="bg1">
+                        <a:lumMod val="95000"/>
+                      </a:schemeClr>
+                    </a:solidFill>
+                  </a:tcPr>
                 </a:tc>
                 <a:extLst>
                   <a:ext uri="{0D108BD9-81ED-4DB2-BD59-A6C34878D82A}">
@@ -4556,19 +6227,50 @@
                   </a:ext>
                 </a:extLst>
               </a:tr>
-              <a:tr h="455248">
+              <a:tr h="568999">
                 <a:tc>
                   <a:txBody>
                     <a:bodyPr/>
                     <a:lstStyle/>
                     <a:p>
                       <a:r>
-                        <a:rPr lang="en-GB" sz="2400" dirty="0"/>
+                        <a:rPr lang="en-GB" sz="1800" cap="none" spc="0">
+                          <a:solidFill>
+                            <a:schemeClr val="tx1"/>
+                          </a:solidFill>
+                        </a:rPr>
                         <a:t>Embeddings</a:t>
                       </a:r>
                     </a:p>
                   </a:txBody>
-                  <a:tcPr/>
+                  <a:tcPr marL="156274" marR="192762" marT="120211" marB="120211">
+                    <a:lnL w="38100" cap="flat" cmpd="sng" algn="ctr">
+                      <a:noFill/>
+                      <a:prstDash val="solid"/>
+                    </a:lnL>
+                    <a:lnR w="6350" cap="flat" cmpd="sng" algn="ctr">
+                      <a:solidFill>
+                        <a:schemeClr val="tx1">
+                          <a:lumMod val="75000"/>
+                          <a:lumOff val="25000"/>
+                        </a:schemeClr>
+                      </a:solidFill>
+                      <a:prstDash val="solid"/>
+                    </a:lnR>
+                    <a:lnT w="12700" cmpd="sng">
+                      <a:noFill/>
+                      <a:prstDash val="solid"/>
+                    </a:lnT>
+                    <a:lnB w="6350" cap="flat" cmpd="sng" algn="ctr">
+                      <a:noFill/>
+                      <a:prstDash val="solid"/>
+                    </a:lnB>
+                    <a:solidFill>
+                      <a:srgbClr val="F2F2F2">
+                        <a:alpha val="30196"/>
+                      </a:srgbClr>
+                    </a:solidFill>
+                  </a:tcPr>
                 </a:tc>
                 <a:tc>
                   <a:txBody>
@@ -4576,13 +6278,48 @@
                     <a:lstStyle/>
                     <a:p>
                       <a:r>
-                        <a:rPr lang="en-GB" sz="2400" dirty="0"/>
+                        <a:rPr lang="en-GB" sz="1800" cap="none" spc="0">
+                          <a:solidFill>
+                            <a:schemeClr val="tx1"/>
+                          </a:solidFill>
+                        </a:rPr>
                         <a:t>Sentence Transformers</a:t>
                       </a:r>
-                      <a:endParaRPr lang="en-IN" sz="2400" dirty="0"/>
+                      <a:endParaRPr lang="en-IN" sz="1800" cap="none" spc="0">
+                        <a:solidFill>
+                          <a:schemeClr val="tx1"/>
+                        </a:solidFill>
+                      </a:endParaRPr>
                     </a:p>
                   </a:txBody>
-                  <a:tcPr/>
+                  <a:tcPr marL="156274" marR="192762" marT="120211" marB="120211">
+                    <a:lnL w="6350" cap="flat" cmpd="sng" algn="ctr">
+                      <a:solidFill>
+                        <a:schemeClr val="tx1">
+                          <a:lumMod val="75000"/>
+                          <a:lumOff val="25000"/>
+                        </a:schemeClr>
+                      </a:solidFill>
+                      <a:prstDash val="solid"/>
+                    </a:lnL>
+                    <a:lnR w="38100" cap="flat" cmpd="sng" algn="ctr">
+                      <a:noFill/>
+                      <a:prstDash val="solid"/>
+                    </a:lnR>
+                    <a:lnT w="12700" cmpd="sng">
+                      <a:noFill/>
+                      <a:prstDash val="solid"/>
+                    </a:lnT>
+                    <a:lnB w="6350" cap="flat" cmpd="sng" algn="ctr">
+                      <a:noFill/>
+                      <a:prstDash val="solid"/>
+                    </a:lnB>
+                    <a:solidFill>
+                      <a:srgbClr val="F2F2F2">
+                        <a:alpha val="30196"/>
+                      </a:srgbClr>
+                    </a:solidFill>
+                  </a:tcPr>
                 </a:tc>
                 <a:extLst>
                   <a:ext uri="{0D108BD9-81ED-4DB2-BD59-A6C34878D82A}">
@@ -4590,20 +6327,50 @@
                   </a:ext>
                 </a:extLst>
               </a:tr>
-              <a:tr h="455248">
+              <a:tr h="568999">
                 <a:tc>
                   <a:txBody>
                     <a:bodyPr/>
                     <a:lstStyle/>
                     <a:p>
                       <a:r>
-                        <a:rPr lang="en-GB" sz="2400" dirty="0"/>
+                        <a:rPr lang="en-GB" sz="1800" cap="none" spc="0">
+                          <a:solidFill>
+                            <a:schemeClr val="tx1"/>
+                          </a:solidFill>
+                        </a:rPr>
                         <a:t>Vector Search</a:t>
                       </a:r>
-                      <a:endParaRPr lang="en-IN" sz="2400" dirty="0"/>
+                      <a:endParaRPr lang="en-IN" sz="1800" cap="none" spc="0">
+                        <a:solidFill>
+                          <a:schemeClr val="tx1"/>
+                        </a:solidFill>
+                      </a:endParaRPr>
                     </a:p>
                   </a:txBody>
-                  <a:tcPr/>
+                  <a:tcPr marL="156274" marR="192762" marT="120211" marB="120211">
+                    <a:lnL w="6350" cap="flat" cmpd="sng" algn="ctr">
+                      <a:noFill/>
+                      <a:prstDash val="solid"/>
+                    </a:lnL>
+                    <a:lnR w="6350" cap="flat" cmpd="sng" algn="ctr">
+                      <a:noFill/>
+                      <a:prstDash val="solid"/>
+                    </a:lnR>
+                    <a:lnT w="6350" cap="flat" cmpd="sng" algn="ctr">
+                      <a:noFill/>
+                      <a:prstDash val="solid"/>
+                    </a:lnT>
+                    <a:lnB w="12700" cmpd="sng">
+                      <a:noFill/>
+                      <a:prstDash val="solid"/>
+                    </a:lnB>
+                    <a:solidFill>
+                      <a:schemeClr val="bg1">
+                        <a:lumMod val="95000"/>
+                      </a:schemeClr>
+                    </a:solidFill>
+                  </a:tcPr>
                 </a:tc>
                 <a:tc>
                   <a:txBody>
@@ -4611,13 +6378,43 @@
                     <a:lstStyle/>
                     <a:p>
                       <a:r>
-                        <a:rPr lang="en-GB" sz="2400" dirty="0"/>
+                        <a:rPr lang="en-GB" sz="1800" cap="none" spc="0">
+                          <a:solidFill>
+                            <a:schemeClr val="tx1"/>
+                          </a:solidFill>
+                        </a:rPr>
                         <a:t>FAISS</a:t>
                       </a:r>
-                      <a:endParaRPr lang="en-IN" sz="2400" dirty="0"/>
+                      <a:endParaRPr lang="en-IN" sz="1800" cap="none" spc="0">
+                        <a:solidFill>
+                          <a:schemeClr val="tx1"/>
+                        </a:solidFill>
+                      </a:endParaRPr>
                     </a:p>
                   </a:txBody>
-                  <a:tcPr/>
+                  <a:tcPr marL="156274" marR="192762" marT="120211" marB="120211">
+                    <a:lnL w="6350" cap="flat" cmpd="sng" algn="ctr">
+                      <a:noFill/>
+                      <a:prstDash val="solid"/>
+                    </a:lnL>
+                    <a:lnR w="12700" cmpd="sng">
+                      <a:noFill/>
+                      <a:prstDash val="solid"/>
+                    </a:lnR>
+                    <a:lnT w="6350" cap="flat" cmpd="sng" algn="ctr">
+                      <a:noFill/>
+                      <a:prstDash val="solid"/>
+                    </a:lnT>
+                    <a:lnB w="12700" cmpd="sng">
+                      <a:noFill/>
+                      <a:prstDash val="solid"/>
+                    </a:lnB>
+                    <a:solidFill>
+                      <a:schemeClr val="bg1">
+                        <a:lumMod val="95000"/>
+                      </a:schemeClr>
+                    </a:solidFill>
+                  </a:tcPr>
                 </a:tc>
                 <a:extLst>
                   <a:ext uri="{0D108BD9-81ED-4DB2-BD59-A6C34878D82A}">
@@ -4625,19 +6422,50 @@
                   </a:ext>
                 </a:extLst>
               </a:tr>
-              <a:tr h="455248">
+              <a:tr h="568999">
                 <a:tc>
                   <a:txBody>
                     <a:bodyPr/>
                     <a:lstStyle/>
                     <a:p>
                       <a:r>
-                        <a:rPr lang="en-GB" sz="2400" dirty="0"/>
+                        <a:rPr lang="en-GB" sz="1800" cap="none" spc="0">
+                          <a:solidFill>
+                            <a:schemeClr val="tx1"/>
+                          </a:solidFill>
+                        </a:rPr>
                         <a:t>Keyword Search</a:t>
                       </a:r>
                     </a:p>
                   </a:txBody>
-                  <a:tcPr/>
+                  <a:tcPr marL="156274" marR="192762" marT="120211" marB="120211">
+                    <a:lnL w="38100" cap="flat" cmpd="sng" algn="ctr">
+                      <a:noFill/>
+                      <a:prstDash val="solid"/>
+                    </a:lnL>
+                    <a:lnR w="6350" cap="flat" cmpd="sng" algn="ctr">
+                      <a:solidFill>
+                        <a:schemeClr val="tx1">
+                          <a:lumMod val="75000"/>
+                          <a:lumOff val="25000"/>
+                        </a:schemeClr>
+                      </a:solidFill>
+                      <a:prstDash val="solid"/>
+                    </a:lnR>
+                    <a:lnT w="12700" cmpd="sng">
+                      <a:noFill/>
+                      <a:prstDash val="solid"/>
+                    </a:lnT>
+                    <a:lnB w="6350" cap="flat" cmpd="sng" algn="ctr">
+                      <a:noFill/>
+                      <a:prstDash val="solid"/>
+                    </a:lnB>
+                    <a:solidFill>
+                      <a:srgbClr val="F2F2F2">
+                        <a:alpha val="30196"/>
+                      </a:srgbClr>
+                    </a:solidFill>
+                  </a:tcPr>
                 </a:tc>
                 <a:tc>
                   <a:txBody>
@@ -4645,12 +6473,43 @@
                     <a:lstStyle/>
                     <a:p>
                       <a:r>
-                        <a:rPr lang="en-GB" sz="2400" dirty="0"/>
+                        <a:rPr lang="en-GB" sz="1800" cap="none" spc="0">
+                          <a:solidFill>
+                            <a:schemeClr val="tx1"/>
+                          </a:solidFill>
+                        </a:rPr>
                         <a:t>BM25</a:t>
                       </a:r>
                     </a:p>
                   </a:txBody>
-                  <a:tcPr/>
+                  <a:tcPr marL="156274" marR="192762" marT="120211" marB="120211">
+                    <a:lnL w="6350" cap="flat" cmpd="sng" algn="ctr">
+                      <a:solidFill>
+                        <a:schemeClr val="tx1">
+                          <a:lumMod val="75000"/>
+                          <a:lumOff val="25000"/>
+                        </a:schemeClr>
+                      </a:solidFill>
+                      <a:prstDash val="solid"/>
+                    </a:lnL>
+                    <a:lnR w="38100" cap="flat" cmpd="sng" algn="ctr">
+                      <a:noFill/>
+                      <a:prstDash val="solid"/>
+                    </a:lnR>
+                    <a:lnT w="12700" cmpd="sng">
+                      <a:noFill/>
+                      <a:prstDash val="solid"/>
+                    </a:lnT>
+                    <a:lnB w="6350" cap="flat" cmpd="sng" algn="ctr">
+                      <a:noFill/>
+                      <a:prstDash val="solid"/>
+                    </a:lnB>
+                    <a:solidFill>
+                      <a:srgbClr val="F2F2F2">
+                        <a:alpha val="30196"/>
+                      </a:srgbClr>
+                    </a:solidFill>
+                  </a:tcPr>
                 </a:tc>
                 <a:extLst>
                   <a:ext uri="{0D108BD9-81ED-4DB2-BD59-A6C34878D82A}">
@@ -4658,20 +6517,50 @@
                   </a:ext>
                 </a:extLst>
               </a:tr>
-              <a:tr h="455248">
+              <a:tr h="568999">
                 <a:tc>
                   <a:txBody>
                     <a:bodyPr/>
                     <a:lstStyle/>
                     <a:p>
                       <a:r>
-                        <a:rPr lang="en-GB" sz="2400" dirty="0"/>
+                        <a:rPr lang="en-GB" sz="1800" cap="none" spc="0">
+                          <a:solidFill>
+                            <a:schemeClr val="tx1"/>
+                          </a:solidFill>
+                        </a:rPr>
                         <a:t>Backend</a:t>
                       </a:r>
-                      <a:endParaRPr lang="en-IN" sz="2400" dirty="0"/>
+                      <a:endParaRPr lang="en-IN" sz="1800" cap="none" spc="0">
+                        <a:solidFill>
+                          <a:schemeClr val="tx1"/>
+                        </a:solidFill>
+                      </a:endParaRPr>
                     </a:p>
                   </a:txBody>
-                  <a:tcPr/>
+                  <a:tcPr marL="156274" marR="192762" marT="120211" marB="120211">
+                    <a:lnL w="6350" cap="flat" cmpd="sng" algn="ctr">
+                      <a:noFill/>
+                      <a:prstDash val="solid"/>
+                    </a:lnL>
+                    <a:lnR w="6350" cap="flat" cmpd="sng" algn="ctr">
+                      <a:noFill/>
+                      <a:prstDash val="solid"/>
+                    </a:lnR>
+                    <a:lnT w="6350" cap="flat" cmpd="sng" algn="ctr">
+                      <a:noFill/>
+                      <a:prstDash val="solid"/>
+                    </a:lnT>
+                    <a:lnB w="12700" cmpd="sng">
+                      <a:noFill/>
+                      <a:prstDash val="solid"/>
+                    </a:lnB>
+                    <a:solidFill>
+                      <a:schemeClr val="bg1">
+                        <a:lumMod val="95000"/>
+                      </a:schemeClr>
+                    </a:solidFill>
+                  </a:tcPr>
                 </a:tc>
                 <a:tc>
                   <a:txBody>
@@ -4679,13 +6568,43 @@
                     <a:lstStyle/>
                     <a:p>
                       <a:r>
-                        <a:rPr lang="en-GB" sz="2400" dirty="0"/>
+                        <a:rPr lang="en-GB" sz="1800" cap="none" spc="0">
+                          <a:solidFill>
+                            <a:schemeClr val="tx1"/>
+                          </a:solidFill>
+                        </a:rPr>
                         <a:t>Fast API</a:t>
                       </a:r>
-                      <a:endParaRPr lang="en-IN" sz="2400" dirty="0"/>
+                      <a:endParaRPr lang="en-IN" sz="1800" cap="none" spc="0">
+                        <a:solidFill>
+                          <a:schemeClr val="tx1"/>
+                        </a:solidFill>
+                      </a:endParaRPr>
                     </a:p>
                   </a:txBody>
-                  <a:tcPr/>
+                  <a:tcPr marL="156274" marR="192762" marT="120211" marB="120211">
+                    <a:lnL w="6350" cap="flat" cmpd="sng" algn="ctr">
+                      <a:noFill/>
+                      <a:prstDash val="solid"/>
+                    </a:lnL>
+                    <a:lnR w="12700" cmpd="sng">
+                      <a:noFill/>
+                      <a:prstDash val="solid"/>
+                    </a:lnR>
+                    <a:lnT w="6350" cap="flat" cmpd="sng" algn="ctr">
+                      <a:noFill/>
+                      <a:prstDash val="solid"/>
+                    </a:lnT>
+                    <a:lnB w="12700" cmpd="sng">
+                      <a:noFill/>
+                      <a:prstDash val="solid"/>
+                    </a:lnB>
+                    <a:solidFill>
+                      <a:schemeClr val="bg1">
+                        <a:lumMod val="95000"/>
+                      </a:schemeClr>
+                    </a:solidFill>
+                  </a:tcPr>
                 </a:tc>
                 <a:extLst>
                   <a:ext uri="{0D108BD9-81ED-4DB2-BD59-A6C34878D82A}">
@@ -4693,20 +6612,55 @@
                   </a:ext>
                 </a:extLst>
               </a:tr>
-              <a:tr h="455248">
+              <a:tr h="568999">
                 <a:tc>
                   <a:txBody>
                     <a:bodyPr/>
                     <a:lstStyle/>
                     <a:p>
                       <a:r>
-                        <a:rPr lang="en-GB" sz="2400" dirty="0"/>
+                        <a:rPr lang="en-GB" sz="1800" cap="none" spc="0">
+                          <a:solidFill>
+                            <a:schemeClr val="tx1"/>
+                          </a:solidFill>
+                        </a:rPr>
                         <a:t>Frontend</a:t>
                       </a:r>
-                      <a:endParaRPr lang="en-IN" sz="2400" dirty="0"/>
+                      <a:endParaRPr lang="en-IN" sz="1800" cap="none" spc="0">
+                        <a:solidFill>
+                          <a:schemeClr val="tx1"/>
+                        </a:solidFill>
+                      </a:endParaRPr>
                     </a:p>
                   </a:txBody>
-                  <a:tcPr/>
+                  <a:tcPr marL="156274" marR="192762" marT="120211" marB="120211">
+                    <a:lnL w="38100" cap="flat" cmpd="sng" algn="ctr">
+                      <a:noFill/>
+                      <a:prstDash val="solid"/>
+                    </a:lnL>
+                    <a:lnR w="6350" cap="flat" cmpd="sng" algn="ctr">
+                      <a:solidFill>
+                        <a:schemeClr val="tx1">
+                          <a:lumMod val="75000"/>
+                          <a:lumOff val="25000"/>
+                        </a:schemeClr>
+                      </a:solidFill>
+                      <a:prstDash val="solid"/>
+                    </a:lnR>
+                    <a:lnT w="12700" cmpd="sng">
+                      <a:noFill/>
+                      <a:prstDash val="solid"/>
+                    </a:lnT>
+                    <a:lnB w="6350" cap="flat" cmpd="sng" algn="ctr">
+                      <a:noFill/>
+                      <a:prstDash val="solid"/>
+                    </a:lnB>
+                    <a:solidFill>
+                      <a:srgbClr val="F2F2F2">
+                        <a:alpha val="30196"/>
+                      </a:srgbClr>
+                    </a:solidFill>
+                  </a:tcPr>
                 </a:tc>
                 <a:tc>
                   <a:txBody>
@@ -4714,13 +6668,48 @@
                     <a:lstStyle/>
                     <a:p>
                       <a:r>
-                        <a:rPr lang="en-GB" sz="2400" dirty="0"/>
+                        <a:rPr lang="en-GB" sz="1800" cap="none" spc="0">
+                          <a:solidFill>
+                            <a:schemeClr val="tx1"/>
+                          </a:solidFill>
+                        </a:rPr>
                         <a:t>Stream lit</a:t>
                       </a:r>
-                      <a:endParaRPr lang="en-IN" sz="2400" dirty="0"/>
+                      <a:endParaRPr lang="en-IN" sz="1800" cap="none" spc="0">
+                        <a:solidFill>
+                          <a:schemeClr val="tx1"/>
+                        </a:solidFill>
+                      </a:endParaRPr>
                     </a:p>
                   </a:txBody>
-                  <a:tcPr/>
+                  <a:tcPr marL="156274" marR="192762" marT="120211" marB="120211">
+                    <a:lnL w="6350" cap="flat" cmpd="sng" algn="ctr">
+                      <a:solidFill>
+                        <a:schemeClr val="tx1">
+                          <a:lumMod val="75000"/>
+                          <a:lumOff val="25000"/>
+                        </a:schemeClr>
+                      </a:solidFill>
+                      <a:prstDash val="solid"/>
+                    </a:lnL>
+                    <a:lnR w="38100" cap="flat" cmpd="sng" algn="ctr">
+                      <a:noFill/>
+                      <a:prstDash val="solid"/>
+                    </a:lnR>
+                    <a:lnT w="12700" cmpd="sng">
+                      <a:noFill/>
+                      <a:prstDash val="solid"/>
+                    </a:lnT>
+                    <a:lnB w="6350" cap="flat" cmpd="sng" algn="ctr">
+                      <a:noFill/>
+                      <a:prstDash val="solid"/>
+                    </a:lnB>
+                    <a:solidFill>
+                      <a:srgbClr val="F2F2F2">
+                        <a:alpha val="30196"/>
+                      </a:srgbClr>
+                    </a:solidFill>
+                  </a:tcPr>
                 </a:tc>
                 <a:extLst>
                   <a:ext uri="{0D108BD9-81ED-4DB2-BD59-A6C34878D82A}">
@@ -4728,20 +6717,50 @@
                   </a:ext>
                 </a:extLst>
               </a:tr>
-              <a:tr h="455248">
+              <a:tr h="568999">
                 <a:tc>
                   <a:txBody>
                     <a:bodyPr/>
                     <a:lstStyle/>
                     <a:p>
                       <a:r>
-                        <a:rPr lang="en-GB" sz="2400" dirty="0"/>
+                        <a:rPr lang="en-GB" sz="1800" cap="none" spc="0">
+                          <a:solidFill>
+                            <a:schemeClr val="tx1"/>
+                          </a:solidFill>
+                        </a:rPr>
                         <a:t>Containerization</a:t>
                       </a:r>
-                      <a:endParaRPr lang="en-IN" sz="2400" dirty="0"/>
+                      <a:endParaRPr lang="en-IN" sz="1800" cap="none" spc="0">
+                        <a:solidFill>
+                          <a:schemeClr val="tx1"/>
+                        </a:solidFill>
+                      </a:endParaRPr>
                     </a:p>
                   </a:txBody>
-                  <a:tcPr/>
+                  <a:tcPr marL="156274" marR="192762" marT="120211" marB="120211">
+                    <a:lnL w="6350" cap="flat" cmpd="sng" algn="ctr">
+                      <a:noFill/>
+                      <a:prstDash val="solid"/>
+                    </a:lnL>
+                    <a:lnR w="6350" cap="flat" cmpd="sng" algn="ctr">
+                      <a:noFill/>
+                      <a:prstDash val="solid"/>
+                    </a:lnR>
+                    <a:lnT w="6350" cap="flat" cmpd="sng" algn="ctr">
+                      <a:noFill/>
+                      <a:prstDash val="solid"/>
+                    </a:lnT>
+                    <a:lnB w="12700" cmpd="sng">
+                      <a:noFill/>
+                      <a:prstDash val="solid"/>
+                    </a:lnB>
+                    <a:solidFill>
+                      <a:schemeClr val="bg1">
+                        <a:lumMod val="95000"/>
+                      </a:schemeClr>
+                    </a:solidFill>
+                  </a:tcPr>
                 </a:tc>
                 <a:tc>
                   <a:txBody>
@@ -4749,13 +6768,43 @@
                     <a:lstStyle/>
                     <a:p>
                       <a:r>
-                        <a:rPr lang="en-GB" sz="2400" dirty="0"/>
+                        <a:rPr lang="en-GB" sz="1800" cap="none" spc="0">
+                          <a:solidFill>
+                            <a:schemeClr val="tx1"/>
+                          </a:solidFill>
+                        </a:rPr>
                         <a:t>Docker</a:t>
                       </a:r>
-                      <a:endParaRPr lang="en-IN" sz="2400" dirty="0"/>
+                      <a:endParaRPr lang="en-IN" sz="1800" cap="none" spc="0">
+                        <a:solidFill>
+                          <a:schemeClr val="tx1"/>
+                        </a:solidFill>
+                      </a:endParaRPr>
                     </a:p>
                   </a:txBody>
-                  <a:tcPr/>
+                  <a:tcPr marL="156274" marR="192762" marT="120211" marB="120211">
+                    <a:lnL w="6350" cap="flat" cmpd="sng" algn="ctr">
+                      <a:noFill/>
+                      <a:prstDash val="solid"/>
+                    </a:lnL>
+                    <a:lnR w="12700" cmpd="sng">
+                      <a:noFill/>
+                      <a:prstDash val="solid"/>
+                    </a:lnR>
+                    <a:lnT w="6350" cap="flat" cmpd="sng" algn="ctr">
+                      <a:noFill/>
+                      <a:prstDash val="solid"/>
+                    </a:lnT>
+                    <a:lnB w="12700" cmpd="sng">
+                      <a:noFill/>
+                      <a:prstDash val="solid"/>
+                    </a:lnB>
+                    <a:solidFill>
+                      <a:schemeClr val="bg1">
+                        <a:lumMod val="95000"/>
+                      </a:schemeClr>
+                    </a:solidFill>
+                  </a:tcPr>
                 </a:tc>
                 <a:extLst>
                   <a:ext uri="{0D108BD9-81ED-4DB2-BD59-A6C34878D82A}">
@@ -4763,20 +6812,55 @@
                   </a:ext>
                 </a:extLst>
               </a:tr>
-              <a:tr h="455248">
+              <a:tr h="568999">
                 <a:tc>
                   <a:txBody>
                     <a:bodyPr/>
                     <a:lstStyle/>
                     <a:p>
                       <a:r>
-                        <a:rPr lang="en-GB" sz="2400" dirty="0"/>
+                        <a:rPr lang="en-GB" sz="1800" cap="none" spc="0">
+                          <a:solidFill>
+                            <a:schemeClr val="tx1"/>
+                          </a:solidFill>
+                        </a:rPr>
                         <a:t>CI/CD</a:t>
                       </a:r>
-                      <a:endParaRPr lang="en-IN" sz="2400" dirty="0"/>
+                      <a:endParaRPr lang="en-IN" sz="1800" cap="none" spc="0">
+                        <a:solidFill>
+                          <a:schemeClr val="tx1"/>
+                        </a:solidFill>
+                      </a:endParaRPr>
                     </a:p>
                   </a:txBody>
-                  <a:tcPr/>
+                  <a:tcPr marL="156274" marR="192762" marT="120211" marB="120211">
+                    <a:lnL w="38100" cap="flat" cmpd="sng" algn="ctr">
+                      <a:noFill/>
+                      <a:prstDash val="solid"/>
+                    </a:lnL>
+                    <a:lnR w="6350" cap="flat" cmpd="sng" algn="ctr">
+                      <a:solidFill>
+                        <a:schemeClr val="tx1">
+                          <a:lumMod val="75000"/>
+                          <a:lumOff val="25000"/>
+                        </a:schemeClr>
+                      </a:solidFill>
+                      <a:prstDash val="solid"/>
+                    </a:lnR>
+                    <a:lnT w="12700" cmpd="sng">
+                      <a:noFill/>
+                      <a:prstDash val="solid"/>
+                    </a:lnT>
+                    <a:lnB w="6350" cap="flat" cmpd="sng" algn="ctr">
+                      <a:noFill/>
+                      <a:prstDash val="solid"/>
+                    </a:lnB>
+                    <a:solidFill>
+                      <a:srgbClr val="F2F2F2">
+                        <a:alpha val="30196"/>
+                      </a:srgbClr>
+                    </a:solidFill>
+                  </a:tcPr>
                 </a:tc>
                 <a:tc>
                   <a:txBody>
@@ -4784,13 +6868,48 @@
                     <a:lstStyle/>
                     <a:p>
                       <a:r>
-                        <a:rPr lang="en-GB" sz="2400" dirty="0"/>
+                        <a:rPr lang="en-GB" sz="1800" cap="none" spc="0">
+                          <a:solidFill>
+                            <a:schemeClr val="tx1"/>
+                          </a:solidFill>
+                        </a:rPr>
                         <a:t>GitHub Actions</a:t>
                       </a:r>
-                      <a:endParaRPr lang="en-IN" sz="2400" dirty="0"/>
+                      <a:endParaRPr lang="en-IN" sz="1800" cap="none" spc="0">
+                        <a:solidFill>
+                          <a:schemeClr val="tx1"/>
+                        </a:solidFill>
+                      </a:endParaRPr>
                     </a:p>
                   </a:txBody>
-                  <a:tcPr/>
+                  <a:tcPr marL="156274" marR="192762" marT="120211" marB="120211">
+                    <a:lnL w="6350" cap="flat" cmpd="sng" algn="ctr">
+                      <a:solidFill>
+                        <a:schemeClr val="tx1">
+                          <a:lumMod val="75000"/>
+                          <a:lumOff val="25000"/>
+                        </a:schemeClr>
+                      </a:solidFill>
+                      <a:prstDash val="solid"/>
+                    </a:lnL>
+                    <a:lnR w="38100" cap="flat" cmpd="sng" algn="ctr">
+                      <a:noFill/>
+                      <a:prstDash val="solid"/>
+                    </a:lnR>
+                    <a:lnT w="12700" cmpd="sng">
+                      <a:noFill/>
+                      <a:prstDash val="solid"/>
+                    </a:lnT>
+                    <a:lnB w="6350" cap="flat" cmpd="sng" algn="ctr">
+                      <a:noFill/>
+                      <a:prstDash val="solid"/>
+                    </a:lnB>
+                    <a:solidFill>
+                      <a:srgbClr val="F2F2F2">
+                        <a:alpha val="30196"/>
+                      </a:srgbClr>
+                    </a:solidFill>
+                  </a:tcPr>
                 </a:tc>
                 <a:extLst>
                   <a:ext uri="{0D108BD9-81ED-4DB2-BD59-A6C34878D82A}">
@@ -4798,20 +6917,50 @@
                   </a:ext>
                 </a:extLst>
               </a:tr>
-              <a:tr h="455248">
+              <a:tr h="568999">
                 <a:tc>
                   <a:txBody>
                     <a:bodyPr/>
                     <a:lstStyle/>
                     <a:p>
                       <a:r>
-                        <a:rPr lang="en-GB" sz="2400" dirty="0"/>
+                        <a:rPr lang="en-GB" sz="1800" cap="none" spc="0">
+                          <a:solidFill>
+                            <a:schemeClr val="tx1"/>
+                          </a:solidFill>
+                        </a:rPr>
                         <a:t>Testing</a:t>
                       </a:r>
-                      <a:endParaRPr lang="en-IN" sz="2400" dirty="0"/>
+                      <a:endParaRPr lang="en-IN" sz="1800" cap="none" spc="0">
+                        <a:solidFill>
+                          <a:schemeClr val="tx1"/>
+                        </a:solidFill>
+                      </a:endParaRPr>
                     </a:p>
                   </a:txBody>
-                  <a:tcPr/>
+                  <a:tcPr marL="156274" marR="192762" marT="120211" marB="120211">
+                    <a:lnL w="6350" cap="flat" cmpd="sng" algn="ctr">
+                      <a:noFill/>
+                      <a:prstDash val="solid"/>
+                    </a:lnL>
+                    <a:lnR w="6350" cap="flat" cmpd="sng" algn="ctr">
+                      <a:noFill/>
+                      <a:prstDash val="solid"/>
+                    </a:lnR>
+                    <a:lnT w="6350" cap="flat" cmpd="sng" algn="ctr">
+                      <a:noFill/>
+                      <a:prstDash val="solid"/>
+                    </a:lnT>
+                    <a:lnB w="12700" cmpd="sng">
+                      <a:noFill/>
+                      <a:prstDash val="solid"/>
+                    </a:lnB>
+                    <a:solidFill>
+                      <a:schemeClr val="bg1">
+                        <a:lumMod val="95000"/>
+                      </a:schemeClr>
+                    </a:solidFill>
+                  </a:tcPr>
                 </a:tc>
                 <a:tc>
                   <a:txBody>
@@ -4819,13 +6968,43 @@
                     <a:lstStyle/>
                     <a:p>
                       <a:r>
-                        <a:rPr lang="en-GB" sz="2400" dirty="0"/>
+                        <a:rPr lang="en-GB" sz="1800" cap="none" spc="0">
+                          <a:solidFill>
+                            <a:schemeClr val="tx1"/>
+                          </a:solidFill>
+                        </a:rPr>
                         <a:t>Py Test</a:t>
                       </a:r>
-                      <a:endParaRPr lang="en-IN" sz="2400" dirty="0"/>
+                      <a:endParaRPr lang="en-IN" sz="1800" cap="none" spc="0">
+                        <a:solidFill>
+                          <a:schemeClr val="tx1"/>
+                        </a:solidFill>
+                      </a:endParaRPr>
                     </a:p>
                   </a:txBody>
-                  <a:tcPr/>
+                  <a:tcPr marL="156274" marR="192762" marT="120211" marB="120211">
+                    <a:lnL w="6350" cap="flat" cmpd="sng" algn="ctr">
+                      <a:noFill/>
+                      <a:prstDash val="solid"/>
+                    </a:lnL>
+                    <a:lnR w="12700" cmpd="sng">
+                      <a:noFill/>
+                      <a:prstDash val="solid"/>
+                    </a:lnR>
+                    <a:lnT w="6350" cap="flat" cmpd="sng" algn="ctr">
+                      <a:noFill/>
+                      <a:prstDash val="solid"/>
+                    </a:lnT>
+                    <a:lnB w="12700" cmpd="sng">
+                      <a:noFill/>
+                      <a:prstDash val="solid"/>
+                    </a:lnB>
+                    <a:solidFill>
+                      <a:schemeClr val="bg1">
+                        <a:lumMod val="95000"/>
+                      </a:schemeClr>
+                    </a:solidFill>
+                  </a:tcPr>
                 </a:tc>
                 <a:extLst>
                   <a:ext uri="{0D108BD9-81ED-4DB2-BD59-A6C34878D82A}">
@@ -4853,6 +7032,14 @@
 <file path=ppt/slides/slide4.xml><?xml version="1.0" encoding="utf-8"?>
 <p:sld xmlns:a="http://schemas.openxmlformats.org/drawingml/2006/main" xmlns:r="http://schemas.openxmlformats.org/officeDocument/2006/relationships" xmlns:p="http://schemas.openxmlformats.org/presentationml/2006/main">
   <p:cSld>
+    <p:bg>
+      <p:bgPr>
+        <a:solidFill>
+          <a:schemeClr val="bg1"/>
+        </a:solidFill>
+        <a:effectLst/>
+      </p:bgPr>
+    </p:bg>
     <p:spTree>
       <p:nvGrpSpPr>
         <p:cNvPr id="1" name=""/>
@@ -4867,6 +7054,261 @@
           <a:chExt cx="0" cy="0"/>
         </a:xfrm>
       </p:grpSpPr>
+      <p:sp useBgFill="1">
+        <p:nvSpPr>
+          <p:cNvPr id="35" name="Rectangle 34">
+            <a:extLst>
+              <a:ext uri="{FF2B5EF4-FFF2-40B4-BE49-F238E27FC236}">
+                <a16:creationId xmlns:a16="http://schemas.microsoft.com/office/drawing/2014/main" id="{907EF6B7-1338-4443-8C46-6A318D952DFD}"/>
+              </a:ext>
+              <a:ext uri="{C183D7F6-B498-43B3-948B-1728B52AA6E4}">
+                <adec:decorative xmlns:adec="http://schemas.microsoft.com/office/drawing/2017/decorative" val="1"/>
+              </a:ext>
+            </a:extLst>
+          </p:cNvPr>
+          <p:cNvSpPr>
+            <a:spLocks noGrp="1" noRot="1" noChangeAspect="1" noMove="1" noResize="1" noEditPoints="1" noAdjustHandles="1" noChangeArrowheads="1" noChangeShapeType="1" noTextEdit="1"/>
+          </p:cNvSpPr>
+          <p:nvPr>
+            <p:extLst>
+              <p:ext uri="{386F3935-93C4-4BCD-93E2-E3B085C9AB24}">
+                <p16:designElem xmlns:p16="http://schemas.microsoft.com/office/powerpoint/2015/main" val="1"/>
+              </p:ext>
+            </p:extLst>
+          </p:nvPr>
+        </p:nvSpPr>
+        <p:spPr>
+          <a:xfrm>
+            <a:off x="3048" y="0"/>
+            <a:ext cx="12188952" cy="6858000"/>
+          </a:xfrm>
+          <a:prstGeom prst="rect">
+            <a:avLst/>
+          </a:prstGeom>
+          <a:ln>
+            <a:noFill/>
+          </a:ln>
+        </p:spPr>
+        <p:style>
+          <a:lnRef idx="2">
+            <a:schemeClr val="accent1">
+              <a:shade val="50000"/>
+            </a:schemeClr>
+          </a:lnRef>
+          <a:fillRef idx="1">
+            <a:schemeClr val="accent1"/>
+          </a:fillRef>
+          <a:effectRef idx="0">
+            <a:schemeClr val="accent1"/>
+          </a:effectRef>
+          <a:fontRef idx="minor">
+            <a:schemeClr val="lt1"/>
+          </a:fontRef>
+        </p:style>
+        <p:txBody>
+          <a:bodyPr rtlCol="0" anchor="ctr"/>
+          <a:lstStyle/>
+          <a:p>
+            <a:pPr algn="ctr"/>
+            <a:endParaRPr lang="en-US"/>
+          </a:p>
+        </p:txBody>
+      </p:sp>
+      <p:sp>
+        <p:nvSpPr>
+          <p:cNvPr id="36" name="Freeform: Shape 9">
+            <a:extLst>
+              <a:ext uri="{FF2B5EF4-FFF2-40B4-BE49-F238E27FC236}">
+                <a16:creationId xmlns:a16="http://schemas.microsoft.com/office/drawing/2014/main" id="{DAAE4CDD-124C-4DCF-9584-B6033B545DD5}"/>
+              </a:ext>
+              <a:ext uri="{C183D7F6-B498-43B3-948B-1728B52AA6E4}">
+                <adec:decorative xmlns:adec="http://schemas.microsoft.com/office/drawing/2017/decorative" val="1"/>
+              </a:ext>
+            </a:extLst>
+          </p:cNvPr>
+          <p:cNvSpPr>
+            <a:spLocks noGrp="1" noRot="1" noChangeAspect="1" noMove="1" noResize="1" noEditPoints="1" noAdjustHandles="1" noChangeArrowheads="1" noChangeShapeType="1" noTextEdit="1"/>
+          </p:cNvSpPr>
+          <p:nvPr>
+            <p:extLst>
+              <p:ext uri="{386F3935-93C4-4BCD-93E2-E3B085C9AB24}">
+                <p16:designElem xmlns:p16="http://schemas.microsoft.com/office/powerpoint/2015/main" val="1"/>
+              </p:ext>
+            </p:extLst>
+          </p:nvPr>
+        </p:nvSpPr>
+        <p:spPr>
+          <a:xfrm>
+            <a:off x="1" y="0"/>
+            <a:ext cx="4167271" cy="6858000"/>
+          </a:xfrm>
+          <a:custGeom>
+            <a:avLst/>
+            <a:gdLst>
+              <a:gd name="connsiteX0" fmla="*/ 0 w 4167271"/>
+              <a:gd name="connsiteY0" fmla="*/ 0 h 6858000"/>
+              <a:gd name="connsiteX1" fmla="*/ 2259550 w 4167271"/>
+              <a:gd name="connsiteY1" fmla="*/ 0 h 6858000"/>
+              <a:gd name="connsiteX2" fmla="*/ 2387803 w 4167271"/>
+              <a:gd name="connsiteY2" fmla="*/ 82222 h 6858000"/>
+              <a:gd name="connsiteX3" fmla="*/ 4167271 w 4167271"/>
+              <a:gd name="connsiteY3" fmla="*/ 3429000 h 6858000"/>
+              <a:gd name="connsiteX4" fmla="*/ 2387803 w 4167271"/>
+              <a:gd name="connsiteY4" fmla="*/ 6775779 h 6858000"/>
+              <a:gd name="connsiteX5" fmla="*/ 2259550 w 4167271"/>
+              <a:gd name="connsiteY5" fmla="*/ 6858000 h 6858000"/>
+              <a:gd name="connsiteX6" fmla="*/ 0 w 4167271"/>
+              <a:gd name="connsiteY6" fmla="*/ 6858000 h 6858000"/>
+            </a:gdLst>
+            <a:ahLst/>
+            <a:cxnLst>
+              <a:cxn ang="0">
+                <a:pos x="connsiteX0" y="connsiteY0"/>
+              </a:cxn>
+              <a:cxn ang="0">
+                <a:pos x="connsiteX1" y="connsiteY1"/>
+              </a:cxn>
+              <a:cxn ang="0">
+                <a:pos x="connsiteX2" y="connsiteY2"/>
+              </a:cxn>
+              <a:cxn ang="0">
+                <a:pos x="connsiteX3" y="connsiteY3"/>
+              </a:cxn>
+              <a:cxn ang="0">
+                <a:pos x="connsiteX4" y="connsiteY4"/>
+              </a:cxn>
+              <a:cxn ang="0">
+                <a:pos x="connsiteX5" y="connsiteY5"/>
+              </a:cxn>
+              <a:cxn ang="0">
+                <a:pos x="connsiteX6" y="connsiteY6"/>
+              </a:cxn>
+            </a:cxnLst>
+            <a:rect l="l" t="t" r="r" b="b"/>
+            <a:pathLst>
+              <a:path w="4167271" h="6858000">
+                <a:moveTo>
+                  <a:pt x="0" y="0"/>
+                </a:moveTo>
+                <a:lnTo>
+                  <a:pt x="2259550" y="0"/>
+                </a:lnTo>
+                <a:lnTo>
+                  <a:pt x="2387803" y="82222"/>
+                </a:lnTo>
+                <a:cubicBezTo>
+                  <a:pt x="3461407" y="807534"/>
+                  <a:pt x="4167271" y="2035835"/>
+                  <a:pt x="4167271" y="3429000"/>
+                </a:cubicBezTo>
+                <a:cubicBezTo>
+                  <a:pt x="4167271" y="4822165"/>
+                  <a:pt x="3461407" y="6050467"/>
+                  <a:pt x="2387803" y="6775779"/>
+                </a:cubicBezTo>
+                <a:lnTo>
+                  <a:pt x="2259550" y="6858000"/>
+                </a:lnTo>
+                <a:lnTo>
+                  <a:pt x="0" y="6858000"/>
+                </a:lnTo>
+                <a:close/>
+              </a:path>
+            </a:pathLst>
+          </a:custGeom>
+          <a:solidFill>
+            <a:schemeClr val="accent2"/>
+          </a:solidFill>
+          <a:ln>
+            <a:noFill/>
+          </a:ln>
+        </p:spPr>
+        <p:style>
+          <a:lnRef idx="2">
+            <a:schemeClr val="accent1">
+              <a:shade val="50000"/>
+            </a:schemeClr>
+          </a:lnRef>
+          <a:fillRef idx="1">
+            <a:schemeClr val="accent1"/>
+          </a:fillRef>
+          <a:effectRef idx="0">
+            <a:schemeClr val="accent1"/>
+          </a:effectRef>
+          <a:fontRef idx="minor">
+            <a:schemeClr val="lt1"/>
+          </a:fontRef>
+        </p:style>
+        <p:txBody>
+          <a:bodyPr rtlCol="0" anchor="ctr"/>
+          <a:lstStyle/>
+          <a:p>
+            <a:pPr algn="ctr"/>
+            <a:endParaRPr lang="en-US"/>
+          </a:p>
+        </p:txBody>
+      </p:sp>
+      <p:sp>
+        <p:nvSpPr>
+          <p:cNvPr id="37" name="Arc 36">
+            <a:extLst>
+              <a:ext uri="{FF2B5EF4-FFF2-40B4-BE49-F238E27FC236}">
+                <a16:creationId xmlns:a16="http://schemas.microsoft.com/office/drawing/2014/main" id="{081E4A58-353D-44AE-B2FC-2A74E2E400F7}"/>
+              </a:ext>
+              <a:ext uri="{C183D7F6-B498-43B3-948B-1728B52AA6E4}">
+                <adec:decorative xmlns:adec="http://schemas.microsoft.com/office/drawing/2017/decorative" val="1"/>
+              </a:ext>
+            </a:extLst>
+          </p:cNvPr>
+          <p:cNvSpPr>
+            <a:spLocks noGrp="1" noRot="1" noChangeAspect="1" noMove="1" noResize="1" noEditPoints="1" noAdjustHandles="1" noChangeArrowheads="1" noChangeShapeType="1" noTextEdit="1"/>
+          </p:cNvSpPr>
+          <p:nvPr>
+            <p:extLst>
+              <p:ext uri="{386F3935-93C4-4BCD-93E2-E3B085C9AB24}">
+                <p16:designElem xmlns:p16="http://schemas.microsoft.com/office/powerpoint/2015/main" val="1"/>
+              </p:ext>
+            </p:extLst>
+          </p:nvPr>
+        </p:nvSpPr>
+        <p:spPr>
+          <a:xfrm flipV="1">
+            <a:off x="7550402" y="2455479"/>
+            <a:ext cx="4083433" cy="4083433"/>
+          </a:xfrm>
+          <a:prstGeom prst="arc">
+            <a:avLst/>
+          </a:prstGeom>
+          <a:ln w="127000" cap="rnd">
+            <a:solidFill>
+              <a:schemeClr val="accent4"/>
+            </a:solidFill>
+            <a:prstDash val="dash"/>
+          </a:ln>
+        </p:spPr>
+        <p:style>
+          <a:lnRef idx="1">
+            <a:schemeClr val="accent1"/>
+          </a:lnRef>
+          <a:fillRef idx="0">
+            <a:schemeClr val="accent1"/>
+          </a:fillRef>
+          <a:effectRef idx="0">
+            <a:schemeClr val="accent1"/>
+          </a:effectRef>
+          <a:fontRef idx="minor">
+            <a:schemeClr val="tx1"/>
+          </a:fontRef>
+        </p:style>
+        <p:txBody>
+          <a:bodyPr rtlCol="0" anchor="ctr"/>
+          <a:lstStyle/>
+          <a:p>
+            <a:pPr algn="ctr"/>
+            <a:endParaRPr lang="en-US" dirty="0"/>
+          </a:p>
+        </p:txBody>
+      </p:sp>
       <p:sp>
         <p:nvSpPr>
           <p:cNvPr id="3" name="Content Placeholder 2">
@@ -4885,12 +7327,12 @@
         </p:nvSpPr>
         <p:spPr>
           <a:xfrm>
-            <a:off x="839448" y="1199213"/>
-            <a:ext cx="10514351" cy="4977750"/>
+            <a:off x="4447308" y="591344"/>
+            <a:ext cx="6906491" cy="5585619"/>
           </a:xfrm>
         </p:spPr>
         <p:txBody>
-          <a:bodyPr>
+          <a:bodyPr anchor="ctr">
             <a:normAutofit/>
           </a:bodyPr>
           <a:lstStyle/>
@@ -4899,19 +7341,19 @@
               <a:buNone/>
             </a:pPr>
             <a:r>
-              <a:rPr lang="en-GB" sz="2400" b="1" dirty="0"/>
+              <a:rPr lang="en-GB" sz="2600" b="1"/>
               <a:t>Input Dataset:</a:t>
             </a:r>
           </a:p>
           <a:p>
             <a:r>
-              <a:rPr lang="en-IN" sz="2400" dirty="0"/>
+              <a:rPr lang="en-IN" sz="2600"/>
               <a:t>PDF, DOCX, and TXT documents containing HR, IT, technical and company policies.</a:t>
             </a:r>
           </a:p>
           <a:p>
             <a:r>
-              <a:rPr lang="en-IN" sz="2400" dirty="0"/>
+              <a:rPr lang="en-IN" sz="2600"/>
               <a:t>Initially use synthetic/sample enterprise documents with metadata such as department and access role.</a:t>
             </a:r>
           </a:p>
@@ -4920,19 +7362,19 @@
               <a:buNone/>
             </a:pPr>
             <a:r>
-              <a:rPr lang="en-IN" sz="2400" b="1" dirty="0"/>
+              <a:rPr lang="en-IN" sz="2600" b="1"/>
               <a:t>Outcome:</a:t>
             </a:r>
           </a:p>
           <a:p>
             <a:r>
-              <a:rPr lang="en-IN" sz="2400" dirty="0"/>
+              <a:rPr lang="en-IN" sz="2600"/>
               <a:t>A secure enterprise assistant providing relevant answers with citations and confidence scores.</a:t>
             </a:r>
           </a:p>
           <a:p>
             <a:r>
-              <a:rPr lang="en-IN" sz="2400" dirty="0"/>
+              <a:rPr lang="en-IN" sz="2600"/>
               <a:t>Reduced retrieval errors and hallucinations through hybrid retrieval and evidence verification.</a:t>
             </a:r>
           </a:p>
@@ -4940,7 +7382,7 @@
             <a:pPr marL="0" indent="0">
               <a:buNone/>
             </a:pPr>
-            <a:endParaRPr lang="en-IN" sz="2400" dirty="0"/>
+            <a:endParaRPr lang="en-IN" sz="2600"/>
           </a:p>
         </p:txBody>
       </p:sp>
@@ -4960,6 +7402,14 @@
 <file path=ppt/slides/slide5.xml><?xml version="1.0" encoding="utf-8"?>
 <p:sld xmlns:a="http://schemas.openxmlformats.org/drawingml/2006/main" xmlns:r="http://schemas.openxmlformats.org/officeDocument/2006/relationships" xmlns:p="http://schemas.openxmlformats.org/presentationml/2006/main">
   <p:cSld>
+    <p:bg>
+      <p:bgPr>
+        <a:solidFill>
+          <a:schemeClr val="bg1"/>
+        </a:solidFill>
+        <a:effectLst/>
+      </p:bgPr>
+    </p:bg>
     <p:spTree>
       <p:nvGrpSpPr>
         <p:cNvPr id="1" name=""/>
@@ -4974,6 +7424,200 @@
           <a:chExt cx="0" cy="0"/>
         </a:xfrm>
       </p:grpSpPr>
+      <p:sp useBgFill="1">
+        <p:nvSpPr>
+          <p:cNvPr id="8" name="Rectangle 7">
+            <a:extLst>
+              <a:ext uri="{FF2B5EF4-FFF2-40B4-BE49-F238E27FC236}">
+                <a16:creationId xmlns:a16="http://schemas.microsoft.com/office/drawing/2014/main" id="{907EF6B7-1338-4443-8C46-6A318D952DFD}"/>
+              </a:ext>
+              <a:ext uri="{C183D7F6-B498-43B3-948B-1728B52AA6E4}">
+                <adec:decorative xmlns:adec="http://schemas.microsoft.com/office/drawing/2017/decorative" val="1"/>
+              </a:ext>
+            </a:extLst>
+          </p:cNvPr>
+          <p:cNvSpPr>
+            <a:spLocks noGrp="1" noRot="1" noChangeAspect="1" noMove="1" noResize="1" noEditPoints="1" noAdjustHandles="1" noChangeArrowheads="1" noChangeShapeType="1" noTextEdit="1"/>
+          </p:cNvSpPr>
+          <p:nvPr>
+            <p:extLst>
+              <p:ext uri="{386F3935-93C4-4BCD-93E2-E3B085C9AB24}">
+                <p16:designElem xmlns:p16="http://schemas.microsoft.com/office/powerpoint/2015/main" val="1"/>
+              </p:ext>
+            </p:extLst>
+          </p:nvPr>
+        </p:nvSpPr>
+        <p:spPr>
+          <a:xfrm>
+            <a:off x="3048" y="0"/>
+            <a:ext cx="12188952" cy="6858000"/>
+          </a:xfrm>
+          <a:prstGeom prst="rect">
+            <a:avLst/>
+          </a:prstGeom>
+          <a:ln>
+            <a:noFill/>
+          </a:ln>
+        </p:spPr>
+        <p:style>
+          <a:lnRef idx="2">
+            <a:schemeClr val="accent1">
+              <a:shade val="50000"/>
+            </a:schemeClr>
+          </a:lnRef>
+          <a:fillRef idx="1">
+            <a:schemeClr val="accent1"/>
+          </a:fillRef>
+          <a:effectRef idx="0">
+            <a:schemeClr val="accent1"/>
+          </a:effectRef>
+          <a:fontRef idx="minor">
+            <a:schemeClr val="lt1"/>
+          </a:fontRef>
+        </p:style>
+        <p:txBody>
+          <a:bodyPr rtlCol="0" anchor="ctr"/>
+          <a:lstStyle/>
+          <a:p>
+            <a:pPr algn="ctr"/>
+            <a:endParaRPr lang="en-US"/>
+          </a:p>
+        </p:txBody>
+      </p:sp>
+      <p:sp>
+        <p:nvSpPr>
+          <p:cNvPr id="10" name="Freeform: Shape 9">
+            <a:extLst>
+              <a:ext uri="{FF2B5EF4-FFF2-40B4-BE49-F238E27FC236}">
+                <a16:creationId xmlns:a16="http://schemas.microsoft.com/office/drawing/2014/main" id="{DAAE4CDD-124C-4DCF-9584-B6033B545DD5}"/>
+              </a:ext>
+              <a:ext uri="{C183D7F6-B498-43B3-948B-1728B52AA6E4}">
+                <adec:decorative xmlns:adec="http://schemas.microsoft.com/office/drawing/2017/decorative" val="1"/>
+              </a:ext>
+            </a:extLst>
+          </p:cNvPr>
+          <p:cNvSpPr>
+            <a:spLocks noGrp="1" noRot="1" noChangeAspect="1" noMove="1" noResize="1" noEditPoints="1" noAdjustHandles="1" noChangeArrowheads="1" noChangeShapeType="1" noTextEdit="1"/>
+          </p:cNvSpPr>
+          <p:nvPr>
+            <p:extLst>
+              <p:ext uri="{386F3935-93C4-4BCD-93E2-E3B085C9AB24}">
+                <p16:designElem xmlns:p16="http://schemas.microsoft.com/office/powerpoint/2015/main" val="1"/>
+              </p:ext>
+            </p:extLst>
+          </p:nvPr>
+        </p:nvSpPr>
+        <p:spPr>
+          <a:xfrm>
+            <a:off x="1" y="0"/>
+            <a:ext cx="4167271" cy="6858000"/>
+          </a:xfrm>
+          <a:custGeom>
+            <a:avLst/>
+            <a:gdLst>
+              <a:gd name="connsiteX0" fmla="*/ 0 w 4167271"/>
+              <a:gd name="connsiteY0" fmla="*/ 0 h 6858000"/>
+              <a:gd name="connsiteX1" fmla="*/ 2259550 w 4167271"/>
+              <a:gd name="connsiteY1" fmla="*/ 0 h 6858000"/>
+              <a:gd name="connsiteX2" fmla="*/ 2387803 w 4167271"/>
+              <a:gd name="connsiteY2" fmla="*/ 82222 h 6858000"/>
+              <a:gd name="connsiteX3" fmla="*/ 4167271 w 4167271"/>
+              <a:gd name="connsiteY3" fmla="*/ 3429000 h 6858000"/>
+              <a:gd name="connsiteX4" fmla="*/ 2387803 w 4167271"/>
+              <a:gd name="connsiteY4" fmla="*/ 6775779 h 6858000"/>
+              <a:gd name="connsiteX5" fmla="*/ 2259550 w 4167271"/>
+              <a:gd name="connsiteY5" fmla="*/ 6858000 h 6858000"/>
+              <a:gd name="connsiteX6" fmla="*/ 0 w 4167271"/>
+              <a:gd name="connsiteY6" fmla="*/ 6858000 h 6858000"/>
+            </a:gdLst>
+            <a:ahLst/>
+            <a:cxnLst>
+              <a:cxn ang="0">
+                <a:pos x="connsiteX0" y="connsiteY0"/>
+              </a:cxn>
+              <a:cxn ang="0">
+                <a:pos x="connsiteX1" y="connsiteY1"/>
+              </a:cxn>
+              <a:cxn ang="0">
+                <a:pos x="connsiteX2" y="connsiteY2"/>
+              </a:cxn>
+              <a:cxn ang="0">
+                <a:pos x="connsiteX3" y="connsiteY3"/>
+              </a:cxn>
+              <a:cxn ang="0">
+                <a:pos x="connsiteX4" y="connsiteY4"/>
+              </a:cxn>
+              <a:cxn ang="0">
+                <a:pos x="connsiteX5" y="connsiteY5"/>
+              </a:cxn>
+              <a:cxn ang="0">
+                <a:pos x="connsiteX6" y="connsiteY6"/>
+              </a:cxn>
+            </a:cxnLst>
+            <a:rect l="l" t="t" r="r" b="b"/>
+            <a:pathLst>
+              <a:path w="4167271" h="6858000">
+                <a:moveTo>
+                  <a:pt x="0" y="0"/>
+                </a:moveTo>
+                <a:lnTo>
+                  <a:pt x="2259550" y="0"/>
+                </a:lnTo>
+                <a:lnTo>
+                  <a:pt x="2387803" y="82222"/>
+                </a:lnTo>
+                <a:cubicBezTo>
+                  <a:pt x="3461407" y="807534"/>
+                  <a:pt x="4167271" y="2035835"/>
+                  <a:pt x="4167271" y="3429000"/>
+                </a:cubicBezTo>
+                <a:cubicBezTo>
+                  <a:pt x="4167271" y="4822165"/>
+                  <a:pt x="3461407" y="6050467"/>
+                  <a:pt x="2387803" y="6775779"/>
+                </a:cubicBezTo>
+                <a:lnTo>
+                  <a:pt x="2259550" y="6858000"/>
+                </a:lnTo>
+                <a:lnTo>
+                  <a:pt x="0" y="6858000"/>
+                </a:lnTo>
+                <a:close/>
+              </a:path>
+            </a:pathLst>
+          </a:custGeom>
+          <a:solidFill>
+            <a:schemeClr val="accent2"/>
+          </a:solidFill>
+          <a:ln>
+            <a:noFill/>
+          </a:ln>
+        </p:spPr>
+        <p:style>
+          <a:lnRef idx="2">
+            <a:schemeClr val="accent1">
+              <a:shade val="50000"/>
+            </a:schemeClr>
+          </a:lnRef>
+          <a:fillRef idx="1">
+            <a:schemeClr val="accent1"/>
+          </a:fillRef>
+          <a:effectRef idx="0">
+            <a:schemeClr val="accent1"/>
+          </a:effectRef>
+          <a:fontRef idx="minor">
+            <a:schemeClr val="lt1"/>
+          </a:fontRef>
+        </p:style>
+        <p:txBody>
+          <a:bodyPr rtlCol="0" anchor="ctr"/>
+          <a:lstStyle/>
+          <a:p>
+            <a:pPr algn="ctr"/>
+            <a:endParaRPr lang="en-US"/>
+          </a:p>
+        </p:txBody>
+      </p:sp>
       <p:sp>
         <p:nvSpPr>
           <p:cNvPr id="2" name="Title 1">
@@ -4990,7 +7634,12 @@
             <p:ph type="title"/>
           </p:nvPr>
         </p:nvSpPr>
-        <p:spPr/>
+        <p:spPr>
+          <a:xfrm>
+            <a:off x="686834" y="1153572"/>
+            <a:ext cx="3200400" cy="4461163"/>
+          </a:xfrm>
+        </p:spPr>
         <p:txBody>
           <a:bodyPr>
             <a:normAutofit/>
@@ -4998,10 +7647,79 @@
           <a:lstStyle/>
           <a:p>
             <a:r>
-              <a:rPr lang="en-GB" sz="2400" b="1" dirty="0"/>
+              <a:rPr lang="en-GB" sz="3400" b="1">
+                <a:solidFill>
+                  <a:srgbClr val="FFFFFF"/>
+                </a:solidFill>
+              </a:rPr>
               <a:t>Project 2: Agentic AI-Based Data Centre Cooling Optimization and Thermal Anomaly Management System</a:t>
             </a:r>
-            <a:endParaRPr lang="en-IN" sz="2400" b="1" dirty="0"/>
+            <a:endParaRPr lang="en-IN" sz="3400" b="1">
+              <a:solidFill>
+                <a:srgbClr val="FFFFFF"/>
+              </a:solidFill>
+            </a:endParaRPr>
+          </a:p>
+        </p:txBody>
+      </p:sp>
+      <p:sp>
+        <p:nvSpPr>
+          <p:cNvPr id="12" name="Arc 11">
+            <a:extLst>
+              <a:ext uri="{FF2B5EF4-FFF2-40B4-BE49-F238E27FC236}">
+                <a16:creationId xmlns:a16="http://schemas.microsoft.com/office/drawing/2014/main" id="{081E4A58-353D-44AE-B2FC-2A74E2E400F7}"/>
+              </a:ext>
+              <a:ext uri="{C183D7F6-B498-43B3-948B-1728B52AA6E4}">
+                <adec:decorative xmlns:adec="http://schemas.microsoft.com/office/drawing/2017/decorative" val="1"/>
+              </a:ext>
+            </a:extLst>
+          </p:cNvPr>
+          <p:cNvSpPr>
+            <a:spLocks noGrp="1" noRot="1" noChangeAspect="1" noMove="1" noResize="1" noEditPoints="1" noAdjustHandles="1" noChangeArrowheads="1" noChangeShapeType="1" noTextEdit="1"/>
+          </p:cNvSpPr>
+          <p:nvPr>
+            <p:extLst>
+              <p:ext uri="{386F3935-93C4-4BCD-93E2-E3B085C9AB24}">
+                <p16:designElem xmlns:p16="http://schemas.microsoft.com/office/powerpoint/2015/main" val="1"/>
+              </p:ext>
+            </p:extLst>
+          </p:nvPr>
+        </p:nvSpPr>
+        <p:spPr>
+          <a:xfrm flipV="1">
+            <a:off x="7550402" y="2455479"/>
+            <a:ext cx="4083433" cy="4083433"/>
+          </a:xfrm>
+          <a:prstGeom prst="arc">
+            <a:avLst/>
+          </a:prstGeom>
+          <a:ln w="127000" cap="rnd">
+            <a:solidFill>
+              <a:schemeClr val="accent4"/>
+            </a:solidFill>
+            <a:prstDash val="dash"/>
+          </a:ln>
+        </p:spPr>
+        <p:style>
+          <a:lnRef idx="1">
+            <a:schemeClr val="accent1"/>
+          </a:lnRef>
+          <a:fillRef idx="0">
+            <a:schemeClr val="accent1"/>
+          </a:fillRef>
+          <a:effectRef idx="0">
+            <a:schemeClr val="accent1"/>
+          </a:effectRef>
+          <a:fontRef idx="minor">
+            <a:schemeClr val="tx1"/>
+          </a:fontRef>
+        </p:style>
+        <p:txBody>
+          <a:bodyPr rtlCol="0" anchor="ctr"/>
+          <a:lstStyle/>
+          <a:p>
+            <a:pPr algn="ctr"/>
+            <a:endParaRPr lang="en-US" dirty="0"/>
           </a:p>
         </p:txBody>
       </p:sp>
@@ -5021,9 +7739,14 @@
             <p:ph idx="1"/>
           </p:nvPr>
         </p:nvSpPr>
-        <p:spPr/>
+        <p:spPr>
+          <a:xfrm>
+            <a:off x="4447308" y="591344"/>
+            <a:ext cx="6906491" cy="5585619"/>
+          </a:xfrm>
+        </p:spPr>
         <p:txBody>
-          <a:bodyPr>
+          <a:bodyPr anchor="ctr">
             <a:normAutofit/>
           </a:bodyPr>
           <a:lstStyle/>
@@ -5032,19 +7755,19 @@
               <a:buNone/>
             </a:pPr>
             <a:r>
-              <a:rPr lang="en-GB" sz="2400" b="1" dirty="0"/>
+              <a:rPr lang="en-GB" sz="2600" b="1"/>
               <a:t>Problem Statement:</a:t>
             </a:r>
           </a:p>
           <a:p>
             <a:r>
-              <a:rPr lang="en-GB" sz="2400" dirty="0"/>
+              <a:rPr lang="en-GB" sz="2600"/>
               <a:t>Data centres generate high heat due to increasing CPU/GPU workloads, while cooling systems consume significant energy.</a:t>
             </a:r>
           </a:p>
           <a:p>
             <a:r>
-              <a:rPr lang="en-GB" sz="2400" dirty="0"/>
+              <a:rPr lang="en-GB" sz="2600"/>
               <a:t>Traditional rule-based cooling may not predict thermal problems or select the most energy-efficient cooling action.</a:t>
             </a:r>
           </a:p>
@@ -5053,19 +7776,19 @@
               <a:buNone/>
             </a:pPr>
             <a:r>
-              <a:rPr lang="en-IN" sz="2400" b="1" dirty="0"/>
+              <a:rPr lang="en-IN" sz="2600" b="1"/>
               <a:t>Objective:</a:t>
             </a:r>
           </a:p>
           <a:p>
             <a:r>
-              <a:rPr lang="en-IN" sz="2400" dirty="0"/>
+              <a:rPr lang="en-IN" sz="2600"/>
               <a:t>Predict temperature and detect thermal anomalies using ML techniques.</a:t>
             </a:r>
           </a:p>
           <a:p>
             <a:r>
-              <a:rPr lang="en-IN" sz="2400" dirty="0"/>
+              <a:rPr lang="en-IN" sz="2600"/>
               <a:t>Use a single Agentic AI cooling agent to identify the cause and recommend an energy-efficient cooling action.</a:t>
             </a:r>
           </a:p>
@@ -5087,6 +7810,14 @@
 <file path=ppt/slides/slide6.xml><?xml version="1.0" encoding="utf-8"?>
 <p:sld xmlns:a="http://schemas.openxmlformats.org/drawingml/2006/main" xmlns:r="http://schemas.openxmlformats.org/officeDocument/2006/relationships" xmlns:p="http://schemas.openxmlformats.org/presentationml/2006/main">
   <p:cSld>
+    <p:bg>
+      <p:bgPr>
+        <a:solidFill>
+          <a:schemeClr val="bg1"/>
+        </a:solidFill>
+        <a:effectLst/>
+      </p:bgPr>
+    </p:bg>
     <p:spTree>
       <p:nvGrpSpPr>
         <p:cNvPr id="1" name=""/>
@@ -5101,6 +7832,138 @@
           <a:chExt cx="0" cy="0"/>
         </a:xfrm>
       </p:grpSpPr>
+      <p:sp useBgFill="1">
+        <p:nvSpPr>
+          <p:cNvPr id="18" name="Rectangle 17">
+            <a:extLst>
+              <a:ext uri="{FF2B5EF4-FFF2-40B4-BE49-F238E27FC236}">
+                <a16:creationId xmlns:a16="http://schemas.microsoft.com/office/drawing/2014/main" id="{A2679492-7988-4050-9056-542444452411}"/>
+              </a:ext>
+              <a:ext uri="{C183D7F6-B498-43B3-948B-1728B52AA6E4}">
+                <adec:decorative xmlns:adec="http://schemas.microsoft.com/office/drawing/2017/decorative" val="1"/>
+              </a:ext>
+            </a:extLst>
+          </p:cNvPr>
+          <p:cNvSpPr>
+            <a:spLocks noGrp="1" noRot="1" noChangeAspect="1" noMove="1" noResize="1" noEditPoints="1" noAdjustHandles="1" noChangeArrowheads="1" noChangeShapeType="1" noTextEdit="1"/>
+          </p:cNvSpPr>
+          <p:nvPr>
+            <p:extLst>
+              <p:ext uri="{386F3935-93C4-4BCD-93E2-E3B085C9AB24}">
+                <p16:designElem xmlns:p16="http://schemas.microsoft.com/office/powerpoint/2015/main" val="1"/>
+              </p:ext>
+            </p:extLst>
+          </p:nvPr>
+        </p:nvSpPr>
+        <p:spPr>
+          <a:xfrm>
+            <a:off x="0" y="0"/>
+            <a:ext cx="12192000" cy="6858000"/>
+          </a:xfrm>
+          <a:prstGeom prst="rect">
+            <a:avLst/>
+          </a:prstGeom>
+          <a:ln>
+            <a:noFill/>
+          </a:ln>
+        </p:spPr>
+        <p:style>
+          <a:lnRef idx="2">
+            <a:schemeClr val="accent1">
+              <a:shade val="50000"/>
+            </a:schemeClr>
+          </a:lnRef>
+          <a:fillRef idx="1">
+            <a:schemeClr val="accent1"/>
+          </a:fillRef>
+          <a:effectRef idx="0">
+            <a:schemeClr val="accent1"/>
+          </a:effectRef>
+          <a:fontRef idx="minor">
+            <a:schemeClr val="lt1"/>
+          </a:fontRef>
+        </p:style>
+        <p:txBody>
+          <a:bodyPr rtlCol="0" anchor="ctr"/>
+          <a:lstStyle/>
+          <a:p>
+            <a:pPr algn="ctr"/>
+            <a:endParaRPr lang="en-US"/>
+          </a:p>
+        </p:txBody>
+      </p:sp>
+      <p:sp>
+        <p:nvSpPr>
+          <p:cNvPr id="20" name="Rectangle 19">
+            <a:extLst>
+              <a:ext uri="{FF2B5EF4-FFF2-40B4-BE49-F238E27FC236}">
+                <a16:creationId xmlns:a16="http://schemas.microsoft.com/office/drawing/2014/main" id="{B091B163-7D61-4891-ABCF-5C13D9C418D0}"/>
+              </a:ext>
+              <a:ext uri="{C183D7F6-B498-43B3-948B-1728B52AA6E4}">
+                <adec:decorative xmlns:adec="http://schemas.microsoft.com/office/drawing/2017/decorative" val="1"/>
+              </a:ext>
+            </a:extLst>
+          </p:cNvPr>
+          <p:cNvSpPr>
+            <a:spLocks noGrp="1" noRot="1" noChangeAspect="1" noMove="1" noResize="1" noEditPoints="1" noAdjustHandles="1" noChangeArrowheads="1" noChangeShapeType="1" noTextEdit="1"/>
+          </p:cNvSpPr>
+          <p:nvPr>
+            <p:extLst>
+              <p:ext uri="{386F3935-93C4-4BCD-93E2-E3B085C9AB24}">
+                <p16:designElem xmlns:p16="http://schemas.microsoft.com/office/powerpoint/2015/main" val="1"/>
+              </p:ext>
+            </p:extLst>
+          </p:nvPr>
+        </p:nvSpPr>
+        <p:spPr>
+          <a:xfrm>
+            <a:off x="0" y="0"/>
+            <a:ext cx="5779911" cy="6858000"/>
+          </a:xfrm>
+          <a:prstGeom prst="rect">
+            <a:avLst/>
+          </a:prstGeom>
+          <a:gradFill flip="none" rotWithShape="1">
+            <a:gsLst>
+              <a:gs pos="0">
+                <a:schemeClr val="accent1"/>
+              </a:gs>
+              <a:gs pos="100000">
+                <a:schemeClr val="accent2"/>
+              </a:gs>
+            </a:gsLst>
+            <a:lin ang="2700000" scaled="1"/>
+            <a:tileRect/>
+          </a:gradFill>
+          <a:ln>
+            <a:noFill/>
+          </a:ln>
+        </p:spPr>
+        <p:style>
+          <a:lnRef idx="2">
+            <a:schemeClr val="accent1">
+              <a:shade val="50000"/>
+            </a:schemeClr>
+          </a:lnRef>
+          <a:fillRef idx="1">
+            <a:schemeClr val="accent1"/>
+          </a:fillRef>
+          <a:effectRef idx="0">
+            <a:schemeClr val="accent1"/>
+          </a:effectRef>
+          <a:fontRef idx="minor">
+            <a:schemeClr val="lt1"/>
+          </a:fontRef>
+        </p:style>
+        <p:txBody>
+          <a:bodyPr rtlCol="0" anchor="ctr"/>
+          <a:lstStyle/>
+          <a:p>
+            <a:pPr algn="ctr"/>
+            <a:endParaRPr lang="en-US"/>
+          </a:p>
+        </p:txBody>
+      </p:sp>
       <p:sp>
         <p:nvSpPr>
           <p:cNvPr id="3" name="Content Placeholder 2">
@@ -5119,12 +7982,12 @@
         </p:nvSpPr>
         <p:spPr>
           <a:xfrm>
-            <a:off x="838200" y="689548"/>
-            <a:ext cx="10515600" cy="5487415"/>
+            <a:off x="6392583" y="2645922"/>
+            <a:ext cx="4434721" cy="3710427"/>
           </a:xfrm>
         </p:spPr>
         <p:txBody>
-          <a:bodyPr>
+          <a:bodyPr anchor="t">
             <a:normAutofit/>
           </a:bodyPr>
           <a:lstStyle/>
@@ -5133,7 +7996,13 @@
               <a:buNone/>
             </a:pPr>
             <a:r>
-              <a:rPr lang="en-GB" sz="2400" b="1" dirty="0"/>
+              <a:rPr lang="en-GB" sz="2000" b="1">
+                <a:solidFill>
+                  <a:schemeClr val="tx1">
+                    <a:alpha val="80000"/>
+                  </a:schemeClr>
+                </a:solidFill>
+              </a:rPr>
               <a:t>Technical stack:</a:t>
             </a:r>
           </a:p>
@@ -5141,10 +8010,78 @@
             <a:pPr marL="0" indent="0">
               <a:buNone/>
             </a:pPr>
-            <a:endParaRPr lang="en-IN" sz="2400" dirty="0"/>
+            <a:endParaRPr lang="en-IN" sz="2000">
+              <a:solidFill>
+                <a:schemeClr val="tx1">
+                  <a:alpha val="80000"/>
+                </a:schemeClr>
+              </a:solidFill>
+            </a:endParaRPr>
           </a:p>
         </p:txBody>
       </p:sp>
+      <p:cxnSp>
+        <p:nvCxnSpPr>
+          <p:cNvPr id="22" name="Straight Connector 21">
+            <a:extLst>
+              <a:ext uri="{FF2B5EF4-FFF2-40B4-BE49-F238E27FC236}">
+                <a16:creationId xmlns:a16="http://schemas.microsoft.com/office/drawing/2014/main" id="{C49DA8F6-BCC1-4447-B54C-57856834B94B}"/>
+              </a:ext>
+              <a:ext uri="{C183D7F6-B498-43B3-948B-1728B52AA6E4}">
+                <adec:decorative xmlns:adec="http://schemas.microsoft.com/office/drawing/2017/decorative" val="1"/>
+              </a:ext>
+            </a:extLst>
+          </p:cNvPr>
+          <p:cNvCxnSpPr>
+            <a:cxnSpLocks noGrp="1" noRot="1" noChangeAspect="1" noMove="1" noResize="1" noEditPoints="1" noAdjustHandles="1" noChangeArrowheads="1" noChangeShapeType="1"/>
+          </p:cNvCxnSpPr>
+          <p:nvPr>
+            <p:extLst>
+              <p:ext uri="{386F3935-93C4-4BCD-93E2-E3B085C9AB24}">
+                <p16:designElem xmlns:p16="http://schemas.microsoft.com/office/powerpoint/2015/main" val="1"/>
+              </p:ext>
+            </p:extLst>
+          </p:nvPr>
+        </p:nvCxnSpPr>
+        <p:spPr>
+          <a:xfrm>
+            <a:off x="11586162" y="3610394"/>
+            <a:ext cx="0" cy="3238728"/>
+          </a:xfrm>
+          <a:prstGeom prst="line">
+            <a:avLst/>
+          </a:prstGeom>
+          <a:ln w="25400" cap="sq">
+            <a:gradFill flip="none" rotWithShape="1">
+              <a:gsLst>
+                <a:gs pos="0">
+                  <a:schemeClr val="accent1"/>
+                </a:gs>
+                <a:gs pos="100000">
+                  <a:schemeClr val="accent2"/>
+                </a:gs>
+              </a:gsLst>
+              <a:lin ang="16200000" scaled="1"/>
+              <a:tileRect/>
+            </a:gradFill>
+            <a:bevel/>
+          </a:ln>
+        </p:spPr>
+        <p:style>
+          <a:lnRef idx="1">
+            <a:schemeClr val="accent1"/>
+          </a:lnRef>
+          <a:fillRef idx="0">
+            <a:schemeClr val="accent1"/>
+          </a:fillRef>
+          <a:effectRef idx="0">
+            <a:schemeClr val="accent1"/>
+          </a:effectRef>
+          <a:fontRef idx="minor">
+            <a:schemeClr val="tx1"/>
+          </a:fontRef>
+        </p:style>
+      </p:cxnSp>
       <p:graphicFrame>
         <p:nvGraphicFramePr>
           <p:cNvPr id="4" name="Table 3">
@@ -5160,30 +8097,31 @@
           <p:nvPr>
             <p:extLst>
               <p:ext uri="{D42A27DB-BD31-4B8C-83A1-F6EECF244321}">
-                <p14:modId xmlns:p14="http://schemas.microsoft.com/office/powerpoint/2010/main" val="1416126769"/>
+                <p14:modId xmlns:p14="http://schemas.microsoft.com/office/powerpoint/2010/main" val="683347178"/>
               </p:ext>
             </p:extLst>
           </p:nvPr>
         </p:nvGraphicFramePr>
         <p:xfrm>
-          <a:off x="1282491" y="1424203"/>
-          <a:ext cx="8326204" cy="4663450"/>
+          <a:off x="279143" y="361748"/>
+          <a:ext cx="5221625" cy="6134510"/>
         </p:xfrm>
         <a:graphic>
           <a:graphicData uri="http://schemas.openxmlformats.org/drawingml/2006/table">
             <a:tbl>
               <a:tblPr firstRow="1" bandRow="1">
+                <a:noFill/>
                 <a:tableStyleId>{5940675A-B579-460E-94D1-54222C63F5DA}</a:tableStyleId>
               </a:tblPr>
               <a:tblGrid>
-                <a:gridCol w="4163102">
+                <a:gridCol w="2380215">
                   <a:extLst>
                     <a:ext uri="{9D8B030D-6E8A-4147-A177-3AD203B41FA5}">
                       <a16:colId xmlns:a16="http://schemas.microsoft.com/office/drawing/2014/main" val="2614492282"/>
                     </a:ext>
                   </a:extLst>
                 </a:gridCol>
-                <a:gridCol w="4163102">
+                <a:gridCol w="2841410">
                   <a:extLst>
                     <a:ext uri="{9D8B030D-6E8A-4147-A177-3AD203B41FA5}">
                       <a16:colId xmlns:a16="http://schemas.microsoft.com/office/drawing/2014/main" val="1642429659"/>
@@ -5191,20 +8129,43 @@
                   </a:extLst>
                 </a:gridCol>
               </a:tblGrid>
-              <a:tr h="466345">
+              <a:tr h="629685">
                 <a:tc>
                   <a:txBody>
                     <a:bodyPr/>
                     <a:lstStyle/>
                     <a:p>
                       <a:r>
-                        <a:rPr lang="en-GB" sz="2400" b="1" dirty="0"/>
+                        <a:rPr lang="en-GB" sz="2600" b="0" cap="none" spc="0">
+                          <a:solidFill>
+                            <a:schemeClr val="tx1"/>
+                          </a:solidFill>
+                        </a:rPr>
                         <a:t>Category</a:t>
                       </a:r>
-                      <a:endParaRPr lang="en-IN" sz="2400" b="1" dirty="0"/>
+                      <a:endParaRPr lang="en-IN" sz="2600" b="0" cap="none" spc="0">
+                        <a:solidFill>
+                          <a:schemeClr val="tx1"/>
+                        </a:solidFill>
+                      </a:endParaRPr>
                     </a:p>
                   </a:txBody>
-                  <a:tcPr/>
+                  <a:tcPr marL="0" marR="142908" marT="29516" marB="147582" anchor="b">
+                    <a:lnL w="12700" cmpd="sng">
+                      <a:noFill/>
+                    </a:lnL>
+                    <a:lnR w="12700" cmpd="sng">
+                      <a:noFill/>
+                    </a:lnR>
+                    <a:lnT w="9525" cap="flat" cmpd="sng" algn="ctr">
+                      <a:noFill/>
+                      <a:prstDash val="solid"/>
+                    </a:lnT>
+                    <a:lnB w="38100" cmpd="sng">
+                      <a:noFill/>
+                    </a:lnB>
+                    <a:noFill/>
+                  </a:tcPr>
                 </a:tc>
                 <a:tc>
                   <a:txBody>
@@ -5212,13 +8173,36 @@
                     <a:lstStyle/>
                     <a:p>
                       <a:r>
-                        <a:rPr lang="en-GB" sz="2400" b="1" dirty="0"/>
+                        <a:rPr lang="en-GB" sz="2600" b="0" cap="none" spc="0">
+                          <a:solidFill>
+                            <a:schemeClr val="tx1"/>
+                          </a:solidFill>
+                        </a:rPr>
                         <a:t>Technology</a:t>
                       </a:r>
-                      <a:endParaRPr lang="en-IN" sz="2400" b="1" dirty="0"/>
+                      <a:endParaRPr lang="en-IN" sz="2600" b="0" cap="none" spc="0">
+                        <a:solidFill>
+                          <a:schemeClr val="tx1"/>
+                        </a:solidFill>
+                      </a:endParaRPr>
                     </a:p>
                   </a:txBody>
-                  <a:tcPr/>
+                  <a:tcPr marL="0" marR="142908" marT="29516" marB="147582" anchor="b">
+                    <a:lnL w="12700" cmpd="sng">
+                      <a:noFill/>
+                    </a:lnL>
+                    <a:lnR w="12700" cmpd="sng">
+                      <a:noFill/>
+                    </a:lnR>
+                    <a:lnT w="9525" cap="flat" cmpd="sng" algn="ctr">
+                      <a:noFill/>
+                      <a:prstDash val="solid"/>
+                    </a:lnT>
+                    <a:lnB w="38100" cmpd="sng">
+                      <a:noFill/>
+                    </a:lnB>
+                    <a:noFill/>
+                  </a:tcPr>
                 </a:tc>
                 <a:extLst>
                   <a:ext uri="{0D108BD9-81ED-4DB2-BD59-A6C34878D82A}">
@@ -5226,19 +8210,42 @@
                   </a:ext>
                 </a:extLst>
               </a:tr>
-              <a:tr h="466345">
+              <a:tr h="546055">
                 <a:tc>
                   <a:txBody>
                     <a:bodyPr/>
                     <a:lstStyle/>
                     <a:p>
                       <a:r>
-                        <a:rPr lang="en-GB" sz="2400" b="0" dirty="0"/>
+                        <a:rPr lang="en-GB" sz="1900" b="0" cap="none" spc="0">
+                          <a:solidFill>
+                            <a:schemeClr val="tx1"/>
+                          </a:solidFill>
+                        </a:rPr>
                         <a:t>Programming</a:t>
                       </a:r>
                     </a:p>
                   </a:txBody>
-                  <a:tcPr/>
+                  <a:tcPr marL="0" marR="142908" marT="44275" marB="147582">
+                    <a:lnL w="12700" cmpd="sng">
+                      <a:noFill/>
+                      <a:prstDash val="solid"/>
+                    </a:lnL>
+                    <a:lnR w="12700" cmpd="sng">
+                      <a:noFill/>
+                      <a:prstDash val="solid"/>
+                    </a:lnR>
+                    <a:lnT w="38100" cmpd="sng">
+                      <a:noFill/>
+                    </a:lnT>
+                    <a:lnB w="9525" cap="flat" cmpd="sng" algn="ctr">
+                      <a:solidFill>
+                        <a:schemeClr val="tx1"/>
+                      </a:solidFill>
+                      <a:prstDash val="solid"/>
+                    </a:lnB>
+                    <a:noFill/>
+                  </a:tcPr>
                 </a:tc>
                 <a:tc>
                   <a:txBody>
@@ -5246,13 +8253,40 @@
                     <a:lstStyle/>
                     <a:p>
                       <a:r>
-                        <a:rPr lang="en-GB" sz="2400" dirty="0"/>
+                        <a:rPr lang="en-GB" sz="1900" cap="none" spc="0">
+                          <a:solidFill>
+                            <a:schemeClr val="tx1"/>
+                          </a:solidFill>
+                        </a:rPr>
                         <a:t>Python</a:t>
                       </a:r>
-                      <a:endParaRPr lang="en-IN" sz="2400" dirty="0"/>
+                      <a:endParaRPr lang="en-IN" sz="1900" cap="none" spc="0">
+                        <a:solidFill>
+                          <a:schemeClr val="tx1"/>
+                        </a:solidFill>
+                      </a:endParaRPr>
                     </a:p>
                   </a:txBody>
-                  <a:tcPr/>
+                  <a:tcPr marL="0" marR="142908" marT="44275" marB="147582">
+                    <a:lnL w="12700" cmpd="sng">
+                      <a:noFill/>
+                      <a:prstDash val="solid"/>
+                    </a:lnL>
+                    <a:lnR w="12700" cmpd="sng">
+                      <a:noFill/>
+                      <a:prstDash val="solid"/>
+                    </a:lnR>
+                    <a:lnT w="38100" cmpd="sng">
+                      <a:noFill/>
+                    </a:lnT>
+                    <a:lnB w="9525" cap="flat" cmpd="sng" algn="ctr">
+                      <a:solidFill>
+                        <a:schemeClr val="tx1"/>
+                      </a:solidFill>
+                      <a:prstDash val="solid"/>
+                    </a:lnB>
+                    <a:noFill/>
+                  </a:tcPr>
                 </a:tc>
                 <a:extLst>
                   <a:ext uri="{0D108BD9-81ED-4DB2-BD59-A6C34878D82A}">
@@ -5260,19 +8294,47 @@
                   </a:ext>
                 </a:extLst>
               </a:tr>
-              <a:tr h="466345">
+              <a:tr h="841220">
                 <a:tc>
                   <a:txBody>
                     <a:bodyPr/>
                     <a:lstStyle/>
                     <a:p>
                       <a:r>
-                        <a:rPr lang="en-GB" sz="2400" dirty="0"/>
+                        <a:rPr lang="en-GB" sz="1900" cap="none" spc="0">
+                          <a:solidFill>
+                            <a:schemeClr val="tx1"/>
+                          </a:solidFill>
+                        </a:rPr>
                         <a:t>Machine Learning</a:t>
                       </a:r>
                     </a:p>
                   </a:txBody>
-                  <a:tcPr/>
+                  <a:tcPr marL="0" marR="142908" marT="44275" marB="147582">
+                    <a:lnL w="12700" cmpd="sng">
+                      <a:noFill/>
+                      <a:prstDash val="solid"/>
+                    </a:lnL>
+                    <a:lnR w="12700" cmpd="sng">
+                      <a:noFill/>
+                      <a:prstDash val="solid"/>
+                    </a:lnR>
+                    <a:lnT w="9525" cap="flat" cmpd="sng" algn="ctr">
+                      <a:solidFill>
+                        <a:schemeClr val="tx1"/>
+                      </a:solidFill>
+                      <a:prstDash val="solid"/>
+                    </a:lnT>
+                    <a:lnB w="12700" cmpd="sng">
+                      <a:noFill/>
+                      <a:prstDash val="solid"/>
+                    </a:lnB>
+                    <a:solidFill>
+                      <a:schemeClr val="bg1">
+                        <a:lumMod val="95000"/>
+                      </a:schemeClr>
+                    </a:solidFill>
+                  </a:tcPr>
                 </a:tc>
                 <a:tc>
                   <a:txBody>
@@ -5280,13 +8342,45 @@
                     <a:lstStyle/>
                     <a:p>
                       <a:r>
-                        <a:rPr lang="en-GB" sz="2400" dirty="0"/>
+                        <a:rPr lang="en-GB" sz="1900" cap="none" spc="0">
+                          <a:solidFill>
+                            <a:schemeClr val="tx1"/>
+                          </a:solidFill>
+                        </a:rPr>
                         <a:t>Scikit-learn, XG Boost/LSTM</a:t>
                       </a:r>
-                      <a:endParaRPr lang="en-IN" sz="2400" dirty="0"/>
+                      <a:endParaRPr lang="en-IN" sz="1900" cap="none" spc="0">
+                        <a:solidFill>
+                          <a:schemeClr val="tx1"/>
+                        </a:solidFill>
+                      </a:endParaRPr>
                     </a:p>
                   </a:txBody>
-                  <a:tcPr/>
+                  <a:tcPr marL="0" marR="142908" marT="44275" marB="147582">
+                    <a:lnL w="12700" cmpd="sng">
+                      <a:noFill/>
+                      <a:prstDash val="solid"/>
+                    </a:lnL>
+                    <a:lnR w="12700" cmpd="sng">
+                      <a:noFill/>
+                      <a:prstDash val="solid"/>
+                    </a:lnR>
+                    <a:lnT w="9525" cap="flat" cmpd="sng" algn="ctr">
+                      <a:solidFill>
+                        <a:schemeClr val="tx1"/>
+                      </a:solidFill>
+                      <a:prstDash val="solid"/>
+                    </a:lnT>
+                    <a:lnB w="12700" cmpd="sng">
+                      <a:noFill/>
+                      <a:prstDash val="solid"/>
+                    </a:lnB>
+                    <a:solidFill>
+                      <a:schemeClr val="bg1">
+                        <a:lumMod val="95000"/>
+                      </a:schemeClr>
+                    </a:solidFill>
+                  </a:tcPr>
                 </a:tc>
                 <a:extLst>
                   <a:ext uri="{0D108BD9-81ED-4DB2-BD59-A6C34878D82A}">
@@ -5294,20 +8388,48 @@
                   </a:ext>
                 </a:extLst>
               </a:tr>
-              <a:tr h="466345">
+              <a:tr h="546055">
                 <a:tc>
                   <a:txBody>
                     <a:bodyPr/>
                     <a:lstStyle/>
                     <a:p>
                       <a:r>
-                        <a:rPr lang="en-GB" sz="2400" dirty="0"/>
+                        <a:rPr lang="en-GB" sz="1900" cap="none" spc="0">
+                          <a:solidFill>
+                            <a:schemeClr val="tx1"/>
+                          </a:solidFill>
+                        </a:rPr>
                         <a:t>Anomaly Detection</a:t>
                       </a:r>
-                      <a:endParaRPr lang="en-IN" sz="2400" dirty="0"/>
+                      <a:endParaRPr lang="en-IN" sz="1900" cap="none" spc="0">
+                        <a:solidFill>
+                          <a:schemeClr val="tx1"/>
+                        </a:solidFill>
+                      </a:endParaRPr>
                     </a:p>
                   </a:txBody>
-                  <a:tcPr/>
+                  <a:tcPr marL="0" marR="142908" marT="44275" marB="147582">
+                    <a:lnL w="12700" cmpd="sng">
+                      <a:noFill/>
+                      <a:prstDash val="solid"/>
+                    </a:lnL>
+                    <a:lnR w="12700" cmpd="sng">
+                      <a:noFill/>
+                      <a:prstDash val="solid"/>
+                    </a:lnR>
+                    <a:lnT w="12700" cmpd="sng">
+                      <a:noFill/>
+                      <a:prstDash val="solid"/>
+                    </a:lnT>
+                    <a:lnB w="9525" cap="flat" cmpd="sng" algn="ctr">
+                      <a:solidFill>
+                        <a:schemeClr val="tx1"/>
+                      </a:solidFill>
+                      <a:prstDash val="solid"/>
+                    </a:lnB>
+                    <a:noFill/>
+                  </a:tcPr>
                 </a:tc>
                 <a:tc>
                   <a:txBody>
@@ -5315,13 +8437,41 @@
                     <a:lstStyle/>
                     <a:p>
                       <a:r>
-                        <a:rPr lang="en-GB" sz="2400" dirty="0"/>
+                        <a:rPr lang="en-GB" sz="1900" cap="none" spc="0">
+                          <a:solidFill>
+                            <a:schemeClr val="tx1"/>
+                          </a:solidFill>
+                        </a:rPr>
                         <a:t>Isolation Forest</a:t>
                       </a:r>
-                      <a:endParaRPr lang="en-IN" sz="2400" dirty="0"/>
+                      <a:endParaRPr lang="en-IN" sz="1900" cap="none" spc="0">
+                        <a:solidFill>
+                          <a:schemeClr val="tx1"/>
+                        </a:solidFill>
+                      </a:endParaRPr>
                     </a:p>
                   </a:txBody>
-                  <a:tcPr/>
+                  <a:tcPr marL="0" marR="142908" marT="44275" marB="147582">
+                    <a:lnL w="12700" cmpd="sng">
+                      <a:noFill/>
+                      <a:prstDash val="solid"/>
+                    </a:lnL>
+                    <a:lnR w="12700" cmpd="sng">
+                      <a:noFill/>
+                      <a:prstDash val="solid"/>
+                    </a:lnR>
+                    <a:lnT w="12700" cmpd="sng">
+                      <a:noFill/>
+                      <a:prstDash val="solid"/>
+                    </a:lnT>
+                    <a:lnB w="9525" cap="flat" cmpd="sng" algn="ctr">
+                      <a:solidFill>
+                        <a:schemeClr val="tx1"/>
+                      </a:solidFill>
+                      <a:prstDash val="solid"/>
+                    </a:lnB>
+                    <a:noFill/>
+                  </a:tcPr>
                 </a:tc>
                 <a:extLst>
                   <a:ext uri="{0D108BD9-81ED-4DB2-BD59-A6C34878D82A}">
@@ -5329,20 +8479,52 @@
                   </a:ext>
                 </a:extLst>
               </a:tr>
-              <a:tr h="466345">
+              <a:tr h="546055">
                 <a:tc>
                   <a:txBody>
                     <a:bodyPr/>
                     <a:lstStyle/>
                     <a:p>
                       <a:r>
-                        <a:rPr lang="en-GB" sz="2400" dirty="0"/>
+                        <a:rPr lang="en-GB" sz="1900" cap="none" spc="0">
+                          <a:solidFill>
+                            <a:schemeClr val="tx1"/>
+                          </a:solidFill>
+                        </a:rPr>
                         <a:t>Agentic AI</a:t>
                       </a:r>
-                      <a:endParaRPr lang="en-IN" sz="2400" dirty="0"/>
+                      <a:endParaRPr lang="en-IN" sz="1900" cap="none" spc="0">
+                        <a:solidFill>
+                          <a:schemeClr val="tx1"/>
+                        </a:solidFill>
+                      </a:endParaRPr>
                     </a:p>
                   </a:txBody>
-                  <a:tcPr/>
+                  <a:tcPr marL="0" marR="142908" marT="44275" marB="147582">
+                    <a:lnL w="12700" cmpd="sng">
+                      <a:noFill/>
+                      <a:prstDash val="solid"/>
+                    </a:lnL>
+                    <a:lnR w="12700" cmpd="sng">
+                      <a:noFill/>
+                      <a:prstDash val="solid"/>
+                    </a:lnR>
+                    <a:lnT w="9525" cap="flat" cmpd="sng" algn="ctr">
+                      <a:solidFill>
+                        <a:schemeClr val="tx1"/>
+                      </a:solidFill>
+                      <a:prstDash val="solid"/>
+                    </a:lnT>
+                    <a:lnB w="12700" cmpd="sng">
+                      <a:noFill/>
+                      <a:prstDash val="solid"/>
+                    </a:lnB>
+                    <a:solidFill>
+                      <a:schemeClr val="bg1">
+                        <a:lumMod val="95000"/>
+                      </a:schemeClr>
+                    </a:solidFill>
+                  </a:tcPr>
                 </a:tc>
                 <a:tc>
                   <a:txBody>
@@ -5350,13 +8532,45 @@
                     <a:lstStyle/>
                     <a:p>
                       <a:r>
-                        <a:rPr lang="en-GB" sz="2400" dirty="0"/>
+                        <a:rPr lang="en-GB" sz="1900" cap="none" spc="0">
+                          <a:solidFill>
+                            <a:schemeClr val="tx1"/>
+                          </a:solidFill>
+                        </a:rPr>
                         <a:t>LLM + Single AI Agent </a:t>
                       </a:r>
-                      <a:endParaRPr lang="en-IN" sz="2400" dirty="0"/>
+                      <a:endParaRPr lang="en-IN" sz="1900" cap="none" spc="0">
+                        <a:solidFill>
+                          <a:schemeClr val="tx1"/>
+                        </a:solidFill>
+                      </a:endParaRPr>
                     </a:p>
                   </a:txBody>
-                  <a:tcPr/>
+                  <a:tcPr marL="0" marR="142908" marT="44275" marB="147582">
+                    <a:lnL w="12700" cmpd="sng">
+                      <a:noFill/>
+                      <a:prstDash val="solid"/>
+                    </a:lnL>
+                    <a:lnR w="12700" cmpd="sng">
+                      <a:noFill/>
+                      <a:prstDash val="solid"/>
+                    </a:lnR>
+                    <a:lnT w="9525" cap="flat" cmpd="sng" algn="ctr">
+                      <a:solidFill>
+                        <a:schemeClr val="tx1"/>
+                      </a:solidFill>
+                      <a:prstDash val="solid"/>
+                    </a:lnT>
+                    <a:lnB w="12700" cmpd="sng">
+                      <a:noFill/>
+                      <a:prstDash val="solid"/>
+                    </a:lnB>
+                    <a:solidFill>
+                      <a:schemeClr val="bg1">
+                        <a:lumMod val="95000"/>
+                      </a:schemeClr>
+                    </a:solidFill>
+                  </a:tcPr>
                 </a:tc>
                 <a:extLst>
                   <a:ext uri="{0D108BD9-81ED-4DB2-BD59-A6C34878D82A}">
@@ -5364,19 +8578,43 @@
                   </a:ext>
                 </a:extLst>
               </a:tr>
-              <a:tr h="466345">
+              <a:tr h="546055">
                 <a:tc>
                   <a:txBody>
                     <a:bodyPr/>
                     <a:lstStyle/>
                     <a:p>
                       <a:r>
-                        <a:rPr lang="en-GB" sz="2400" dirty="0"/>
+                        <a:rPr lang="en-GB" sz="1900" cap="none" spc="0">
+                          <a:solidFill>
+                            <a:schemeClr val="tx1"/>
+                          </a:solidFill>
+                        </a:rPr>
                         <a:t>Backend</a:t>
                       </a:r>
                     </a:p>
                   </a:txBody>
-                  <a:tcPr/>
+                  <a:tcPr marL="0" marR="142908" marT="44275" marB="147582">
+                    <a:lnL w="12700" cmpd="sng">
+                      <a:noFill/>
+                      <a:prstDash val="solid"/>
+                    </a:lnL>
+                    <a:lnR w="12700" cmpd="sng">
+                      <a:noFill/>
+                      <a:prstDash val="solid"/>
+                    </a:lnR>
+                    <a:lnT w="12700" cmpd="sng">
+                      <a:noFill/>
+                      <a:prstDash val="solid"/>
+                    </a:lnT>
+                    <a:lnB w="9525" cap="flat" cmpd="sng" algn="ctr">
+                      <a:solidFill>
+                        <a:schemeClr val="tx1"/>
+                      </a:solidFill>
+                      <a:prstDash val="solid"/>
+                    </a:lnB>
+                    <a:noFill/>
+                  </a:tcPr>
                 </a:tc>
                 <a:tc>
                   <a:txBody>
@@ -5384,12 +8622,36 @@
                     <a:lstStyle/>
                     <a:p>
                       <a:r>
-                        <a:rPr lang="en-GB" sz="2400" dirty="0"/>
+                        <a:rPr lang="en-GB" sz="1900" cap="none" spc="0">
+                          <a:solidFill>
+                            <a:schemeClr val="tx1"/>
+                          </a:solidFill>
+                        </a:rPr>
                         <a:t>Fast API</a:t>
                       </a:r>
                     </a:p>
                   </a:txBody>
-                  <a:tcPr/>
+                  <a:tcPr marL="0" marR="142908" marT="44275" marB="147582">
+                    <a:lnL w="12700" cmpd="sng">
+                      <a:noFill/>
+                      <a:prstDash val="solid"/>
+                    </a:lnL>
+                    <a:lnR w="12700" cmpd="sng">
+                      <a:noFill/>
+                      <a:prstDash val="solid"/>
+                    </a:lnR>
+                    <a:lnT w="12700" cmpd="sng">
+                      <a:noFill/>
+                      <a:prstDash val="solid"/>
+                    </a:lnT>
+                    <a:lnB w="9525" cap="flat" cmpd="sng" algn="ctr">
+                      <a:solidFill>
+                        <a:schemeClr val="tx1"/>
+                      </a:solidFill>
+                      <a:prstDash val="solid"/>
+                    </a:lnB>
+                    <a:noFill/>
+                  </a:tcPr>
                 </a:tc>
                 <a:extLst>
                   <a:ext uri="{0D108BD9-81ED-4DB2-BD59-A6C34878D82A}">
@@ -5397,20 +8659,52 @@
                   </a:ext>
                 </a:extLst>
               </a:tr>
-              <a:tr h="466345">
+              <a:tr h="841220">
                 <a:tc>
                   <a:txBody>
                     <a:bodyPr/>
                     <a:lstStyle/>
                     <a:p>
                       <a:r>
-                        <a:rPr lang="en-GB" sz="2400" dirty="0"/>
+                        <a:rPr lang="en-GB" sz="1900" cap="none" spc="0">
+                          <a:solidFill>
+                            <a:schemeClr val="tx1"/>
+                          </a:solidFill>
+                        </a:rPr>
                         <a:t>Database</a:t>
                       </a:r>
-                      <a:endParaRPr lang="en-IN" sz="2400" dirty="0"/>
+                      <a:endParaRPr lang="en-IN" sz="1900" cap="none" spc="0">
+                        <a:solidFill>
+                          <a:schemeClr val="tx1"/>
+                        </a:solidFill>
+                      </a:endParaRPr>
                     </a:p>
                   </a:txBody>
-                  <a:tcPr/>
+                  <a:tcPr marL="0" marR="142908" marT="44275" marB="147582">
+                    <a:lnL w="12700" cmpd="sng">
+                      <a:noFill/>
+                      <a:prstDash val="solid"/>
+                    </a:lnL>
+                    <a:lnR w="12700" cmpd="sng">
+                      <a:noFill/>
+                      <a:prstDash val="solid"/>
+                    </a:lnR>
+                    <a:lnT w="9525" cap="flat" cmpd="sng" algn="ctr">
+                      <a:solidFill>
+                        <a:schemeClr val="tx1"/>
+                      </a:solidFill>
+                      <a:prstDash val="solid"/>
+                    </a:lnT>
+                    <a:lnB w="12700" cmpd="sng">
+                      <a:noFill/>
+                      <a:prstDash val="solid"/>
+                    </a:lnB>
+                    <a:solidFill>
+                      <a:schemeClr val="bg1">
+                        <a:lumMod val="95000"/>
+                      </a:schemeClr>
+                    </a:solidFill>
+                  </a:tcPr>
                 </a:tc>
                 <a:tc>
                   <a:txBody>
@@ -5418,13 +8712,45 @@
                     <a:lstStyle/>
                     <a:p>
                       <a:r>
-                        <a:rPr lang="en-GB" sz="2400" dirty="0"/>
+                        <a:rPr lang="en-GB" sz="1900" cap="none" spc="0">
+                          <a:solidFill>
+                            <a:schemeClr val="tx1"/>
+                          </a:solidFill>
+                        </a:rPr>
                         <a:t>Postgres SQL / Timescale DB</a:t>
                       </a:r>
-                      <a:endParaRPr lang="en-IN" sz="2400" dirty="0"/>
+                      <a:endParaRPr lang="en-IN" sz="1900" cap="none" spc="0">
+                        <a:solidFill>
+                          <a:schemeClr val="tx1"/>
+                        </a:solidFill>
+                      </a:endParaRPr>
                     </a:p>
                   </a:txBody>
-                  <a:tcPr/>
+                  <a:tcPr marL="0" marR="142908" marT="44275" marB="147582">
+                    <a:lnL w="12700" cmpd="sng">
+                      <a:noFill/>
+                      <a:prstDash val="solid"/>
+                    </a:lnL>
+                    <a:lnR w="12700" cmpd="sng">
+                      <a:noFill/>
+                      <a:prstDash val="solid"/>
+                    </a:lnR>
+                    <a:lnT w="9525" cap="flat" cmpd="sng" algn="ctr">
+                      <a:solidFill>
+                        <a:schemeClr val="tx1"/>
+                      </a:solidFill>
+                      <a:prstDash val="solid"/>
+                    </a:lnT>
+                    <a:lnB w="12700" cmpd="sng">
+                      <a:noFill/>
+                      <a:prstDash val="solid"/>
+                    </a:lnB>
+                    <a:solidFill>
+                      <a:schemeClr val="bg1">
+                        <a:lumMod val="95000"/>
+                      </a:schemeClr>
+                    </a:solidFill>
+                  </a:tcPr>
                 </a:tc>
                 <a:extLst>
                   <a:ext uri="{0D108BD9-81ED-4DB2-BD59-A6C34878D82A}">
@@ -5432,20 +8758,48 @@
                   </a:ext>
                 </a:extLst>
               </a:tr>
-              <a:tr h="466345">
+              <a:tr h="546055">
                 <a:tc>
                   <a:txBody>
                     <a:bodyPr/>
                     <a:lstStyle/>
                     <a:p>
                       <a:r>
-                        <a:rPr lang="en-GB" sz="2400" dirty="0"/>
+                        <a:rPr lang="en-GB" sz="1900" cap="none" spc="0">
+                          <a:solidFill>
+                            <a:schemeClr val="tx1"/>
+                          </a:solidFill>
+                        </a:rPr>
                         <a:t>Dashboard</a:t>
                       </a:r>
-                      <a:endParaRPr lang="en-IN" sz="2400" dirty="0"/>
+                      <a:endParaRPr lang="en-IN" sz="1900" cap="none" spc="0">
+                        <a:solidFill>
+                          <a:schemeClr val="tx1"/>
+                        </a:solidFill>
+                      </a:endParaRPr>
                     </a:p>
                   </a:txBody>
-                  <a:tcPr/>
+                  <a:tcPr marL="0" marR="142908" marT="44275" marB="147582">
+                    <a:lnL w="12700" cmpd="sng">
+                      <a:noFill/>
+                      <a:prstDash val="solid"/>
+                    </a:lnL>
+                    <a:lnR w="12700" cmpd="sng">
+                      <a:noFill/>
+                      <a:prstDash val="solid"/>
+                    </a:lnR>
+                    <a:lnT w="12700" cmpd="sng">
+                      <a:noFill/>
+                      <a:prstDash val="solid"/>
+                    </a:lnT>
+                    <a:lnB w="9525" cap="flat" cmpd="sng" algn="ctr">
+                      <a:solidFill>
+                        <a:schemeClr val="tx1"/>
+                      </a:solidFill>
+                      <a:prstDash val="solid"/>
+                    </a:lnB>
+                    <a:noFill/>
+                  </a:tcPr>
                 </a:tc>
                 <a:tc>
                   <a:txBody>
@@ -5453,13 +8807,41 @@
                     <a:lstStyle/>
                     <a:p>
                       <a:r>
-                        <a:rPr lang="en-GB" sz="2400" dirty="0"/>
+                        <a:rPr lang="en-GB" sz="1900" cap="none" spc="0">
+                          <a:solidFill>
+                            <a:schemeClr val="tx1"/>
+                          </a:solidFill>
+                        </a:rPr>
                         <a:t>React / Grafana</a:t>
                       </a:r>
-                      <a:endParaRPr lang="en-IN" sz="2400" dirty="0"/>
+                      <a:endParaRPr lang="en-IN" sz="1900" cap="none" spc="0">
+                        <a:solidFill>
+                          <a:schemeClr val="tx1"/>
+                        </a:solidFill>
+                      </a:endParaRPr>
                     </a:p>
                   </a:txBody>
-                  <a:tcPr/>
+                  <a:tcPr marL="0" marR="142908" marT="44275" marB="147582">
+                    <a:lnL w="12700" cmpd="sng">
+                      <a:noFill/>
+                      <a:prstDash val="solid"/>
+                    </a:lnL>
+                    <a:lnR w="12700" cmpd="sng">
+                      <a:noFill/>
+                      <a:prstDash val="solid"/>
+                    </a:lnR>
+                    <a:lnT w="12700" cmpd="sng">
+                      <a:noFill/>
+                      <a:prstDash val="solid"/>
+                    </a:lnT>
+                    <a:lnB w="9525" cap="flat" cmpd="sng" algn="ctr">
+                      <a:solidFill>
+                        <a:schemeClr val="tx1"/>
+                      </a:solidFill>
+                      <a:prstDash val="solid"/>
+                    </a:lnB>
+                    <a:noFill/>
+                  </a:tcPr>
                 </a:tc>
                 <a:extLst>
                   <a:ext uri="{0D108BD9-81ED-4DB2-BD59-A6C34878D82A}">
@@ -5467,20 +8849,52 @@
                   </a:ext>
                 </a:extLst>
               </a:tr>
-              <a:tr h="466345">
+              <a:tr h="546055">
                 <a:tc>
                   <a:txBody>
                     <a:bodyPr/>
                     <a:lstStyle/>
                     <a:p>
                       <a:r>
-                        <a:rPr lang="en-GB" sz="2400" dirty="0"/>
+                        <a:rPr lang="en-GB" sz="1900" cap="none" spc="0">
+                          <a:solidFill>
+                            <a:schemeClr val="tx1"/>
+                          </a:solidFill>
+                        </a:rPr>
                         <a:t>Containerization</a:t>
                       </a:r>
-                      <a:endParaRPr lang="en-IN" sz="2400" dirty="0"/>
+                      <a:endParaRPr lang="en-IN" sz="1900" cap="none" spc="0">
+                        <a:solidFill>
+                          <a:schemeClr val="tx1"/>
+                        </a:solidFill>
+                      </a:endParaRPr>
                     </a:p>
                   </a:txBody>
-                  <a:tcPr/>
+                  <a:tcPr marL="0" marR="142908" marT="44275" marB="147582">
+                    <a:lnL w="12700" cmpd="sng">
+                      <a:noFill/>
+                      <a:prstDash val="solid"/>
+                    </a:lnL>
+                    <a:lnR w="12700" cmpd="sng">
+                      <a:noFill/>
+                      <a:prstDash val="solid"/>
+                    </a:lnR>
+                    <a:lnT w="9525" cap="flat" cmpd="sng" algn="ctr">
+                      <a:solidFill>
+                        <a:schemeClr val="tx1"/>
+                      </a:solidFill>
+                      <a:prstDash val="solid"/>
+                    </a:lnT>
+                    <a:lnB w="12700" cmpd="sng">
+                      <a:noFill/>
+                      <a:prstDash val="solid"/>
+                    </a:lnB>
+                    <a:solidFill>
+                      <a:schemeClr val="bg1">
+                        <a:lumMod val="95000"/>
+                      </a:schemeClr>
+                    </a:solidFill>
+                  </a:tcPr>
                 </a:tc>
                 <a:tc>
                   <a:txBody>
@@ -5488,13 +8902,45 @@
                     <a:lstStyle/>
                     <a:p>
                       <a:r>
-                        <a:rPr lang="en-GB" sz="2400" dirty="0"/>
+                        <a:rPr lang="en-GB" sz="1900" cap="none" spc="0">
+                          <a:solidFill>
+                            <a:schemeClr val="tx1"/>
+                          </a:solidFill>
+                        </a:rPr>
                         <a:t>Docker</a:t>
                       </a:r>
-                      <a:endParaRPr lang="en-IN" sz="2400" dirty="0"/>
+                      <a:endParaRPr lang="en-IN" sz="1900" cap="none" spc="0">
+                        <a:solidFill>
+                          <a:schemeClr val="tx1"/>
+                        </a:solidFill>
+                      </a:endParaRPr>
                     </a:p>
                   </a:txBody>
-                  <a:tcPr/>
+                  <a:tcPr marL="0" marR="142908" marT="44275" marB="147582">
+                    <a:lnL w="12700" cmpd="sng">
+                      <a:noFill/>
+                      <a:prstDash val="solid"/>
+                    </a:lnL>
+                    <a:lnR w="12700" cmpd="sng">
+                      <a:noFill/>
+                      <a:prstDash val="solid"/>
+                    </a:lnR>
+                    <a:lnT w="9525" cap="flat" cmpd="sng" algn="ctr">
+                      <a:solidFill>
+                        <a:schemeClr val="tx1"/>
+                      </a:solidFill>
+                      <a:prstDash val="solid"/>
+                    </a:lnT>
+                    <a:lnB w="12700" cmpd="sng">
+                      <a:noFill/>
+                      <a:prstDash val="solid"/>
+                    </a:lnB>
+                    <a:solidFill>
+                      <a:schemeClr val="bg1">
+                        <a:lumMod val="95000"/>
+                      </a:schemeClr>
+                    </a:solidFill>
+                  </a:tcPr>
                 </a:tc>
                 <a:extLst>
                   <a:ext uri="{0D108BD9-81ED-4DB2-BD59-A6C34878D82A}">
@@ -5502,20 +8948,46 @@
                   </a:ext>
                 </a:extLst>
               </a:tr>
-              <a:tr h="466345">
+              <a:tr h="546055">
                 <a:tc>
                   <a:txBody>
                     <a:bodyPr/>
                     <a:lstStyle/>
                     <a:p>
                       <a:r>
-                        <a:rPr lang="en-GB" sz="2400" dirty="0"/>
+                        <a:rPr lang="en-GB" sz="1900" cap="none" spc="0">
+                          <a:solidFill>
+                            <a:schemeClr val="tx1"/>
+                          </a:solidFill>
+                        </a:rPr>
                         <a:t>CI/CD</a:t>
                       </a:r>
-                      <a:endParaRPr lang="en-IN" sz="2400" dirty="0"/>
+                      <a:endParaRPr lang="en-IN" sz="1900" cap="none" spc="0">
+                        <a:solidFill>
+                          <a:schemeClr val="tx1"/>
+                        </a:solidFill>
+                      </a:endParaRPr>
                     </a:p>
                   </a:txBody>
-                  <a:tcPr/>
+                  <a:tcPr marL="0" marR="142908" marT="44275" marB="147582">
+                    <a:lnL w="12700" cmpd="sng">
+                      <a:noFill/>
+                      <a:prstDash val="solid"/>
+                    </a:lnL>
+                    <a:lnR w="12700" cmpd="sng">
+                      <a:noFill/>
+                      <a:prstDash val="solid"/>
+                    </a:lnR>
+                    <a:lnT w="12700" cmpd="sng">
+                      <a:noFill/>
+                      <a:prstDash val="solid"/>
+                    </a:lnT>
+                    <a:lnB w="12700" cmpd="sng">
+                      <a:noFill/>
+                      <a:prstDash val="solid"/>
+                    </a:lnB>
+                    <a:noFill/>
+                  </a:tcPr>
                 </a:tc>
                 <a:tc>
                   <a:txBody>
@@ -5523,13 +8995,39 @@
                     <a:lstStyle/>
                     <a:p>
                       <a:r>
-                        <a:rPr lang="en-GB" sz="2400" dirty="0"/>
+                        <a:rPr lang="en-GB" sz="1900" cap="none" spc="0">
+                          <a:solidFill>
+                            <a:schemeClr val="tx1"/>
+                          </a:solidFill>
+                        </a:rPr>
                         <a:t>GitHub Actions</a:t>
                       </a:r>
-                      <a:endParaRPr lang="en-IN" sz="2400" dirty="0"/>
+                      <a:endParaRPr lang="en-IN" sz="1900" cap="none" spc="0">
+                        <a:solidFill>
+                          <a:schemeClr val="tx1"/>
+                        </a:solidFill>
+                      </a:endParaRPr>
                     </a:p>
                   </a:txBody>
-                  <a:tcPr/>
+                  <a:tcPr marL="0" marR="142908" marT="44275" marB="147582">
+                    <a:lnL w="12700" cmpd="sng">
+                      <a:noFill/>
+                      <a:prstDash val="solid"/>
+                    </a:lnL>
+                    <a:lnR w="12700" cmpd="sng">
+                      <a:noFill/>
+                      <a:prstDash val="solid"/>
+                    </a:lnR>
+                    <a:lnT w="12700" cmpd="sng">
+                      <a:noFill/>
+                      <a:prstDash val="solid"/>
+                    </a:lnT>
+                    <a:lnB w="12700" cmpd="sng">
+                      <a:noFill/>
+                      <a:prstDash val="solid"/>
+                    </a:lnB>
+                    <a:noFill/>
+                  </a:tcPr>
                 </a:tc>
                 <a:extLst>
                   <a:ext uri="{0D108BD9-81ED-4DB2-BD59-A6C34878D82A}">
@@ -5557,6 +9055,14 @@
 <file path=ppt/slides/slide7.xml><?xml version="1.0" encoding="utf-8"?>
 <p:sld xmlns:a="http://schemas.openxmlformats.org/drawingml/2006/main" xmlns:r="http://schemas.openxmlformats.org/officeDocument/2006/relationships" xmlns:p="http://schemas.openxmlformats.org/presentationml/2006/main">
   <p:cSld>
+    <p:bg>
+      <p:bgPr>
+        <a:solidFill>
+          <a:schemeClr val="bg1"/>
+        </a:solidFill>
+        <a:effectLst/>
+      </p:bgPr>
+    </p:bg>
     <p:spTree>
       <p:nvGrpSpPr>
         <p:cNvPr id="1" name=""/>
@@ -5571,6 +9077,261 @@
           <a:chExt cx="0" cy="0"/>
         </a:xfrm>
       </p:grpSpPr>
+      <p:sp useBgFill="1">
+        <p:nvSpPr>
+          <p:cNvPr id="8" name="Rectangle 7">
+            <a:extLst>
+              <a:ext uri="{FF2B5EF4-FFF2-40B4-BE49-F238E27FC236}">
+                <a16:creationId xmlns:a16="http://schemas.microsoft.com/office/drawing/2014/main" id="{907EF6B7-1338-4443-8C46-6A318D952DFD}"/>
+              </a:ext>
+              <a:ext uri="{C183D7F6-B498-43B3-948B-1728B52AA6E4}">
+                <adec:decorative xmlns:adec="http://schemas.microsoft.com/office/drawing/2017/decorative" val="1"/>
+              </a:ext>
+            </a:extLst>
+          </p:cNvPr>
+          <p:cNvSpPr>
+            <a:spLocks noGrp="1" noRot="1" noChangeAspect="1" noMove="1" noResize="1" noEditPoints="1" noAdjustHandles="1" noChangeArrowheads="1" noChangeShapeType="1" noTextEdit="1"/>
+          </p:cNvSpPr>
+          <p:nvPr>
+            <p:extLst>
+              <p:ext uri="{386F3935-93C4-4BCD-93E2-E3B085C9AB24}">
+                <p16:designElem xmlns:p16="http://schemas.microsoft.com/office/powerpoint/2015/main" val="1"/>
+              </p:ext>
+            </p:extLst>
+          </p:nvPr>
+        </p:nvSpPr>
+        <p:spPr>
+          <a:xfrm>
+            <a:off x="3048" y="0"/>
+            <a:ext cx="12188952" cy="6858000"/>
+          </a:xfrm>
+          <a:prstGeom prst="rect">
+            <a:avLst/>
+          </a:prstGeom>
+          <a:ln>
+            <a:noFill/>
+          </a:ln>
+        </p:spPr>
+        <p:style>
+          <a:lnRef idx="2">
+            <a:schemeClr val="accent1">
+              <a:shade val="50000"/>
+            </a:schemeClr>
+          </a:lnRef>
+          <a:fillRef idx="1">
+            <a:schemeClr val="accent1"/>
+          </a:fillRef>
+          <a:effectRef idx="0">
+            <a:schemeClr val="accent1"/>
+          </a:effectRef>
+          <a:fontRef idx="minor">
+            <a:schemeClr val="lt1"/>
+          </a:fontRef>
+        </p:style>
+        <p:txBody>
+          <a:bodyPr rtlCol="0" anchor="ctr"/>
+          <a:lstStyle/>
+          <a:p>
+            <a:pPr algn="ctr"/>
+            <a:endParaRPr lang="en-US"/>
+          </a:p>
+        </p:txBody>
+      </p:sp>
+      <p:sp>
+        <p:nvSpPr>
+          <p:cNvPr id="10" name="Freeform: Shape 9">
+            <a:extLst>
+              <a:ext uri="{FF2B5EF4-FFF2-40B4-BE49-F238E27FC236}">
+                <a16:creationId xmlns:a16="http://schemas.microsoft.com/office/drawing/2014/main" id="{DAAE4CDD-124C-4DCF-9584-B6033B545DD5}"/>
+              </a:ext>
+              <a:ext uri="{C183D7F6-B498-43B3-948B-1728B52AA6E4}">
+                <adec:decorative xmlns:adec="http://schemas.microsoft.com/office/drawing/2017/decorative" val="1"/>
+              </a:ext>
+            </a:extLst>
+          </p:cNvPr>
+          <p:cNvSpPr>
+            <a:spLocks noGrp="1" noRot="1" noChangeAspect="1" noMove="1" noResize="1" noEditPoints="1" noAdjustHandles="1" noChangeArrowheads="1" noChangeShapeType="1" noTextEdit="1"/>
+          </p:cNvSpPr>
+          <p:nvPr>
+            <p:extLst>
+              <p:ext uri="{386F3935-93C4-4BCD-93E2-E3B085C9AB24}">
+                <p16:designElem xmlns:p16="http://schemas.microsoft.com/office/powerpoint/2015/main" val="1"/>
+              </p:ext>
+            </p:extLst>
+          </p:nvPr>
+        </p:nvSpPr>
+        <p:spPr>
+          <a:xfrm>
+            <a:off x="1" y="0"/>
+            <a:ext cx="4167271" cy="6858000"/>
+          </a:xfrm>
+          <a:custGeom>
+            <a:avLst/>
+            <a:gdLst>
+              <a:gd name="connsiteX0" fmla="*/ 0 w 4167271"/>
+              <a:gd name="connsiteY0" fmla="*/ 0 h 6858000"/>
+              <a:gd name="connsiteX1" fmla="*/ 2259550 w 4167271"/>
+              <a:gd name="connsiteY1" fmla="*/ 0 h 6858000"/>
+              <a:gd name="connsiteX2" fmla="*/ 2387803 w 4167271"/>
+              <a:gd name="connsiteY2" fmla="*/ 82222 h 6858000"/>
+              <a:gd name="connsiteX3" fmla="*/ 4167271 w 4167271"/>
+              <a:gd name="connsiteY3" fmla="*/ 3429000 h 6858000"/>
+              <a:gd name="connsiteX4" fmla="*/ 2387803 w 4167271"/>
+              <a:gd name="connsiteY4" fmla="*/ 6775779 h 6858000"/>
+              <a:gd name="connsiteX5" fmla="*/ 2259550 w 4167271"/>
+              <a:gd name="connsiteY5" fmla="*/ 6858000 h 6858000"/>
+              <a:gd name="connsiteX6" fmla="*/ 0 w 4167271"/>
+              <a:gd name="connsiteY6" fmla="*/ 6858000 h 6858000"/>
+            </a:gdLst>
+            <a:ahLst/>
+            <a:cxnLst>
+              <a:cxn ang="0">
+                <a:pos x="connsiteX0" y="connsiteY0"/>
+              </a:cxn>
+              <a:cxn ang="0">
+                <a:pos x="connsiteX1" y="connsiteY1"/>
+              </a:cxn>
+              <a:cxn ang="0">
+                <a:pos x="connsiteX2" y="connsiteY2"/>
+              </a:cxn>
+              <a:cxn ang="0">
+                <a:pos x="connsiteX3" y="connsiteY3"/>
+              </a:cxn>
+              <a:cxn ang="0">
+                <a:pos x="connsiteX4" y="connsiteY4"/>
+              </a:cxn>
+              <a:cxn ang="0">
+                <a:pos x="connsiteX5" y="connsiteY5"/>
+              </a:cxn>
+              <a:cxn ang="0">
+                <a:pos x="connsiteX6" y="connsiteY6"/>
+              </a:cxn>
+            </a:cxnLst>
+            <a:rect l="l" t="t" r="r" b="b"/>
+            <a:pathLst>
+              <a:path w="4167271" h="6858000">
+                <a:moveTo>
+                  <a:pt x="0" y="0"/>
+                </a:moveTo>
+                <a:lnTo>
+                  <a:pt x="2259550" y="0"/>
+                </a:lnTo>
+                <a:lnTo>
+                  <a:pt x="2387803" y="82222"/>
+                </a:lnTo>
+                <a:cubicBezTo>
+                  <a:pt x="3461407" y="807534"/>
+                  <a:pt x="4167271" y="2035835"/>
+                  <a:pt x="4167271" y="3429000"/>
+                </a:cubicBezTo>
+                <a:cubicBezTo>
+                  <a:pt x="4167271" y="4822165"/>
+                  <a:pt x="3461407" y="6050467"/>
+                  <a:pt x="2387803" y="6775779"/>
+                </a:cubicBezTo>
+                <a:lnTo>
+                  <a:pt x="2259550" y="6858000"/>
+                </a:lnTo>
+                <a:lnTo>
+                  <a:pt x="0" y="6858000"/>
+                </a:lnTo>
+                <a:close/>
+              </a:path>
+            </a:pathLst>
+          </a:custGeom>
+          <a:solidFill>
+            <a:schemeClr val="accent2"/>
+          </a:solidFill>
+          <a:ln>
+            <a:noFill/>
+          </a:ln>
+        </p:spPr>
+        <p:style>
+          <a:lnRef idx="2">
+            <a:schemeClr val="accent1">
+              <a:shade val="50000"/>
+            </a:schemeClr>
+          </a:lnRef>
+          <a:fillRef idx="1">
+            <a:schemeClr val="accent1"/>
+          </a:fillRef>
+          <a:effectRef idx="0">
+            <a:schemeClr val="accent1"/>
+          </a:effectRef>
+          <a:fontRef idx="minor">
+            <a:schemeClr val="lt1"/>
+          </a:fontRef>
+        </p:style>
+        <p:txBody>
+          <a:bodyPr rtlCol="0" anchor="ctr"/>
+          <a:lstStyle/>
+          <a:p>
+            <a:pPr algn="ctr"/>
+            <a:endParaRPr lang="en-US"/>
+          </a:p>
+        </p:txBody>
+      </p:sp>
+      <p:sp>
+        <p:nvSpPr>
+          <p:cNvPr id="12" name="Arc 11">
+            <a:extLst>
+              <a:ext uri="{FF2B5EF4-FFF2-40B4-BE49-F238E27FC236}">
+                <a16:creationId xmlns:a16="http://schemas.microsoft.com/office/drawing/2014/main" id="{081E4A58-353D-44AE-B2FC-2A74E2E400F7}"/>
+              </a:ext>
+              <a:ext uri="{C183D7F6-B498-43B3-948B-1728B52AA6E4}">
+                <adec:decorative xmlns:adec="http://schemas.microsoft.com/office/drawing/2017/decorative" val="1"/>
+              </a:ext>
+            </a:extLst>
+          </p:cNvPr>
+          <p:cNvSpPr>
+            <a:spLocks noGrp="1" noRot="1" noChangeAspect="1" noMove="1" noResize="1" noEditPoints="1" noAdjustHandles="1" noChangeArrowheads="1" noChangeShapeType="1" noTextEdit="1"/>
+          </p:cNvSpPr>
+          <p:nvPr>
+            <p:extLst>
+              <p:ext uri="{386F3935-93C4-4BCD-93E2-E3B085C9AB24}">
+                <p16:designElem xmlns:p16="http://schemas.microsoft.com/office/powerpoint/2015/main" val="1"/>
+              </p:ext>
+            </p:extLst>
+          </p:nvPr>
+        </p:nvSpPr>
+        <p:spPr>
+          <a:xfrm flipV="1">
+            <a:off x="7550402" y="2455479"/>
+            <a:ext cx="4083433" cy="4083433"/>
+          </a:xfrm>
+          <a:prstGeom prst="arc">
+            <a:avLst/>
+          </a:prstGeom>
+          <a:ln w="127000" cap="rnd">
+            <a:solidFill>
+              <a:schemeClr val="accent4"/>
+            </a:solidFill>
+            <a:prstDash val="dash"/>
+          </a:ln>
+        </p:spPr>
+        <p:style>
+          <a:lnRef idx="1">
+            <a:schemeClr val="accent1"/>
+          </a:lnRef>
+          <a:fillRef idx="0">
+            <a:schemeClr val="accent1"/>
+          </a:fillRef>
+          <a:effectRef idx="0">
+            <a:schemeClr val="accent1"/>
+          </a:effectRef>
+          <a:fontRef idx="minor">
+            <a:schemeClr val="tx1"/>
+          </a:fontRef>
+        </p:style>
+        <p:txBody>
+          <a:bodyPr rtlCol="0" anchor="ctr"/>
+          <a:lstStyle/>
+          <a:p>
+            <a:pPr algn="ctr"/>
+            <a:endParaRPr lang="en-US" dirty="0"/>
+          </a:p>
+        </p:txBody>
+      </p:sp>
       <p:sp>
         <p:nvSpPr>
           <p:cNvPr id="3" name="Content Placeholder 2">
@@ -5589,12 +9350,12 @@
         </p:nvSpPr>
         <p:spPr>
           <a:xfrm>
-            <a:off x="838200" y="1315387"/>
-            <a:ext cx="10515600" cy="4227226"/>
+            <a:off x="4447308" y="591344"/>
+            <a:ext cx="6906491" cy="5585619"/>
           </a:xfrm>
         </p:spPr>
         <p:txBody>
-          <a:bodyPr>
+          <a:bodyPr anchor="ctr">
             <a:normAutofit/>
           </a:bodyPr>
           <a:lstStyle/>
@@ -5603,19 +9364,19 @@
               <a:buNone/>
             </a:pPr>
             <a:r>
-              <a:rPr lang="en-GB" sz="2400" b="1" dirty="0"/>
+              <a:rPr lang="en-GB" b="1"/>
               <a:t>Input Dataset:</a:t>
             </a:r>
           </a:p>
           <a:p>
             <a:r>
-              <a:rPr lang="en-GB" sz="2400" dirty="0"/>
+              <a:rPr lang="en-GB"/>
               <a:t>Synthetic data-centre telemetry generated using a simulator for multiple racks.</a:t>
             </a:r>
           </a:p>
           <a:p>
             <a:r>
-              <a:rPr lang="en-GB" sz="2400" dirty="0"/>
+              <a:rPr lang="en-GB"/>
               <a:t>Includes temperature, CPU/GPU utilization, power, fan speed, airflow, humidity and cooling load.</a:t>
             </a:r>
           </a:p>
@@ -5624,22 +9385,22 @@
               <a:buNone/>
             </a:pPr>
             <a:r>
-              <a:rPr lang="en-GB" sz="2400" b="1" dirty="0"/>
+              <a:rPr lang="en-GB" b="1"/>
               <a:t>Outcome:</a:t>
             </a:r>
           </a:p>
           <a:p>
             <a:r>
-              <a:rPr lang="en-GB" sz="2400" dirty="0"/>
+              <a:rPr lang="en-GB"/>
               <a:t>A PoC that monitors and detects thermal problems in simulated data-centre racks.</a:t>
             </a:r>
           </a:p>
           <a:p>
             <a:r>
-              <a:rPr lang="en-GB" sz="2400" dirty="0"/>
+              <a:rPr lang="en-GB"/>
               <a:t>Provides explainable, energy-efficient, colling recommendations through a dashboard with human approval.       </a:t>
             </a:r>
-            <a:endParaRPr lang="en-IN" sz="2400" dirty="0"/>
+            <a:endParaRPr lang="en-IN"/>
           </a:p>
         </p:txBody>
       </p:sp>
